--- a/presentation/stripe_presentation_bloc2.pptx
+++ b/presentation/stripe_presentation_bloc2.pptx
@@ -5,21 +5,23 @@
     <p:sldMasterId id="2147483648" r:id="rId1"/>
   </p:sldMasterIdLst>
   <p:notesMasterIdLst>
-    <p:notesMasterId r:id="rId12"/>
+    <p:notesMasterId r:id="rId14"/>
   </p:notesMasterIdLst>
   <p:sldIdLst>
     <p:sldId id="256" r:id="rId2"/>
     <p:sldId id="257" r:id="rId3"/>
     <p:sldId id="258" r:id="rId4"/>
-    <p:sldId id="266" r:id="rId17"/>
-    <p:sldId id="259" r:id="rId5"/>
-    <p:sldId id="260" r:id="rId6"/>
-    <p:sldId id="267" r:id="rId18"/>
-    <p:sldId id="261" r:id="rId7"/>
-    <p:sldId id="262" r:id="rId8"/>
-    <p:sldId id="263" r:id="rId9"/>
-    <p:sldId id="264" r:id="rId10"/>
-    <p:sldId id="265" r:id="rId11"/>
+    <p:sldId id="266" r:id="rId5"/>
+    <p:sldId id="259" r:id="rId6"/>
+    <p:sldId id="260" r:id="rId7"/>
+    <p:sldId id="267" r:id="rId8"/>
+    <p:sldId id="273" r:id="rId9"/>
+    <p:sldId id="262" r:id="rId10"/>
+    <p:sldId id="274" r:id="rId19"/>
+    <p:sldId id="263" r:id="rId11"/>
+    <p:sldId id="271" r:id="rId12"/>
+    <p:sldId id="265" r:id="rId13"/>
+    <p:sldId id="275" r:id="rId20"/>
   </p:sldIdLst>
   <p:sldSz cx="12192000" cy="6858000"/>
   <p:notesSz cx="6858000" cy="12192000"/>
@@ -397,7 +399,7 @@
           <a:p>
             <a:fld id="{F7021451-1387-4CA6-816F-3879F97B5CBC}" type="slidenum">
               <a:rPr lang="en-US"/>
-              <a:t>10</a:t>
+              <a:t>12</a:t>
             </a:fld>
             <a:endParaRPr lang="en-US"/>
           </a:p>
@@ -649,7 +651,7 @@
           <a:p>
             <a:fld id="{F7021451-1387-4CA6-816F-3879F97B5CBC}" type="slidenum">
               <a:rPr lang="en-US"/>
-              <a:t>4</a:t>
+              <a:t>5</a:t>
             </a:fld>
             <a:endParaRPr lang="en-US"/>
           </a:p>
@@ -733,7 +735,7 @@
           <a:p>
             <a:fld id="{F7021451-1387-4CA6-816F-3879F97B5CBC}" type="slidenum">
               <a:rPr lang="en-US"/>
-              <a:t>5</a:t>
+              <a:t>6</a:t>
             </a:fld>
             <a:endParaRPr lang="en-US"/>
           </a:p>
@@ -817,7 +819,7 @@
           <a:p>
             <a:fld id="{F7021451-1387-4CA6-816F-3879F97B5CBC}" type="slidenum">
               <a:rPr lang="en-US"/>
-              <a:t>6</a:t>
+              <a:t>8</a:t>
             </a:fld>
             <a:endParaRPr lang="en-US"/>
           </a:p>
@@ -901,7 +903,7 @@
           <a:p>
             <a:fld id="{F7021451-1387-4CA6-816F-3879F97B5CBC}" type="slidenum">
               <a:rPr lang="en-US"/>
-              <a:t>7</a:t>
+              <a:t>9</a:t>
             </a:fld>
             <a:endParaRPr lang="en-US"/>
           </a:p>
@@ -985,7 +987,7 @@
           <a:p>
             <a:fld id="{F7021451-1387-4CA6-816F-3879F97B5CBC}" type="slidenum">
               <a:rPr lang="en-US"/>
-              <a:t>8</a:t>
+              <a:t>10</a:t>
             </a:fld>
             <a:endParaRPr lang="en-US"/>
           </a:p>
@@ -1069,7 +1071,7 @@
           <a:p>
             <a:fld id="{F7021451-1387-4CA6-816F-3879F97B5CBC}" type="slidenum">
               <a:rPr lang="en-US"/>
-              <a:t>9</a:t>
+              <a:t>11</a:t>
             </a:fld>
             <a:endParaRPr lang="en-US"/>
           </a:p>
@@ -1444,6 +1446,13 @@
           </a:solidFill>
           <a:ln/>
         </p:spPr>
+        <p:txBody>
+          <a:bodyPr/>
+          <a:lstStyle/>
+          <a:p>
+            <a:endParaRPr lang="fr-FR"/>
+          </a:p>
+        </p:txBody>
       </p:sp>
       <p:sp>
         <p:nvSpPr>
@@ -1464,6 +1473,13 @@
           </a:solidFill>
           <a:ln/>
         </p:spPr>
+        <p:txBody>
+          <a:bodyPr/>
+          <a:lstStyle/>
+          <a:p>
+            <a:endParaRPr lang="fr-FR"/>
+          </a:p>
+        </p:txBody>
       </p:sp>
       <p:sp>
         <p:nvSpPr>
@@ -1473,7 +1489,7 @@
         </p:nvSpPr>
         <p:spPr>
           <a:xfrm>
-            <a:off x="822960" y="1554480"/>
+            <a:off x="822960" y="1905000"/>
             <a:ext cx="10058400" cy="1005840"/>
           </a:xfrm>
           <a:prstGeom prst="rect">
@@ -1512,7 +1528,7 @@
         </p:nvSpPr>
         <p:spPr>
           <a:xfrm>
-            <a:off x="841248" y="2697480"/>
+            <a:off x="841248" y="3073400"/>
             <a:ext cx="10515600" cy="548640"/>
           </a:xfrm>
           <a:prstGeom prst="rect">
@@ -1551,7 +1567,7 @@
         </p:nvSpPr>
         <p:spPr>
           <a:xfrm>
-            <a:off x="868680" y="3429000"/>
+            <a:off x="868680" y="3810000"/>
             <a:ext cx="3108960" cy="41148"/>
           </a:xfrm>
           <a:prstGeom prst="rect">
@@ -1562,6 +1578,13 @@
           </a:solidFill>
           <a:ln/>
         </p:spPr>
+        <p:txBody>
+          <a:bodyPr/>
+          <a:lstStyle/>
+          <a:p>
+            <a:endParaRPr lang="fr-FR"/>
+          </a:p>
+        </p:txBody>
       </p:sp>
       <p:sp>
         <p:nvSpPr>
@@ -1571,7 +1594,7 @@
         </p:nvSpPr>
         <p:spPr>
           <a:xfrm>
-            <a:off x="841248" y="3611880"/>
+            <a:off x="841248" y="3987800"/>
             <a:ext cx="10058400" cy="457200"/>
           </a:xfrm>
           <a:prstGeom prst="rect">
@@ -1652,7 +1675,7 @@
                 <a:ea typeface="Calibri" pitchFamily="34" charset="-122"/>
                 <a:cs typeface="Calibri" pitchFamily="34" charset="-120"/>
               </a:rPr>
-              <a:t>Certification AIA — RNCP41993 · Bloc 2 — Juin 2026</a:t>
+              <a:t>Certification AIA — RNCP41993 · Bloc 2 — Octobre 2026</a:t>
             </a:r>
             <a:endParaRPr lang="en-US" sz="1500" dirty="0"/>
           </a:p>
@@ -1667,6 +1690,1557 @@
 </file>
 
 <file path=ppt/slides/slide10.xml><?xml version="1.0" encoding="utf-8"?>
+<p:sld xmlns:a="http://schemas.openxmlformats.org/drawingml/2006/main" xmlns:r="http://schemas.openxmlformats.org/officeDocument/2006/relationships" xmlns:p="http://schemas.openxmlformats.org/presentationml/2006/main">
+  <p:cSld name="Slide 8">
+    <p:bg>
+      <p:bgPr>
+        <a:solidFill>
+          <a:srgbClr val="0E1330"/>
+        </a:solidFill>
+        <a:effectLst/>
+      </p:bgPr>
+    </p:bg>
+    <p:spTree>
+      <p:nvGrpSpPr>
+        <p:cNvPr id="1" name=""/>
+        <p:cNvGrpSpPr/>
+        <p:nvPr/>
+      </p:nvGrpSpPr>
+      <p:grpSpPr>
+        <a:xfrm>
+          <a:off x="0" y="0"/>
+          <a:ext cx="0" cy="0"/>
+          <a:chOff x="0" y="0"/>
+          <a:chExt cx="0" cy="0"/>
+        </a:xfrm>
+      </p:grpSpPr>
+      <p:sp>
+        <p:nvSpPr>
+          <p:cNvPr id="2" name="Text 0"/>
+          <p:cNvSpPr/>
+          <p:nvPr/>
+        </p:nvSpPr>
+        <p:spPr>
+          <a:xfrm>
+            <a:off x="548640" y="457200"/>
+            <a:ext cx="10972800" cy="274320"/>
+          </a:xfrm>
+          <a:prstGeom prst="rect">
+            <a:avLst/>
+          </a:prstGeom>
+          <a:noFill/>
+          <a:ln/>
+        </p:spPr>
+        <p:txBody>
+          <a:bodyPr wrap="square" lIns="0" tIns="0" rIns="0" bIns="0" rtlCol="0" anchor="ctr"/>
+          <a:lstStyle/>
+          <a:p>
+            <a:pPr marL="0" indent="0">
+              <a:buNone/>
+            </a:pPr>
+            <a:r>
+              <a:rPr lang="en-US" sz="1200" b="1" kern="0" spc="300" dirty="0">
+                <a:solidFill>
+                  <a:srgbClr val="6C63FF"/>
+                </a:solidFill>
+                <a:latin typeface="Calibri" pitchFamily="34" charset="0"/>
+                <a:ea typeface="Calibri" pitchFamily="34" charset="-122"/>
+                <a:cs typeface="Calibri" pitchFamily="34" charset="-120"/>
+              </a:rPr>
+              <a:t>DIFFÉRENCIATEUR</a:t>
+            </a:r>
+            <a:endParaRPr lang="en-US" sz="1200" dirty="0"/>
+          </a:p>
+        </p:txBody>
+      </p:sp>
+      <p:sp>
+        <p:nvSpPr>
+          <p:cNvPr id="3" name="Text 1"/>
+          <p:cNvSpPr/>
+          <p:nvPr/>
+        </p:nvSpPr>
+        <p:spPr>
+          <a:xfrm>
+            <a:off x="548640" y="749808"/>
+            <a:ext cx="10972800" cy="640080"/>
+          </a:xfrm>
+          <a:prstGeom prst="rect">
+            <a:avLst/>
+          </a:prstGeom>
+          <a:noFill/>
+          <a:ln/>
+        </p:spPr>
+        <p:txBody>
+          <a:bodyPr wrap="square" lIns="0" tIns="0" rIns="0" bIns="0" rtlCol="0" anchor="ctr"/>
+          <a:lstStyle/>
+          <a:p>
+            <a:pPr marL="0" indent="0">
+              <a:buNone/>
+            </a:pPr>
+            <a:r>
+              <a:rPr lang="en-US" sz="3000" b="1" dirty="0">
+                <a:solidFill>
+                  <a:srgbClr val="FFFFFF"/>
+                </a:solidFill>
+                <a:latin typeface="Georgia" pitchFamily="34" charset="0"/>
+                <a:ea typeface="Georgia" pitchFamily="34" charset="-122"/>
+                <a:cs typeface="Georgia" pitchFamily="34" charset="-120"/>
+              </a:rPr>
+              <a:t>Détection de fraude en temps réel</a:t>
+            </a:r>
+            <a:endParaRPr lang="en-US" sz="3000" dirty="0"/>
+          </a:p>
+        </p:txBody>
+      </p:sp>
+      <p:sp>
+        <p:nvSpPr>
+          <p:cNvPr id="4" name="Shape 2"/>
+          <p:cNvSpPr/>
+          <p:nvPr/>
+        </p:nvSpPr>
+        <p:spPr>
+          <a:xfrm>
+            <a:off x="548640" y="1783080"/>
+            <a:ext cx="3200400" cy="4023360"/>
+          </a:xfrm>
+          <a:prstGeom prst="rect">
+            <a:avLst/>
+          </a:prstGeom>
+          <a:solidFill>
+            <a:srgbClr val="16204A"/>
+          </a:solidFill>
+          <a:ln w="12700">
+            <a:solidFill>
+              <a:srgbClr val="2A356B"/>
+            </a:solidFill>
+            <a:prstDash val="solid"/>
+          </a:ln>
+        </p:spPr>
+        <p:txBody>
+          <a:bodyPr/>
+          <a:lstStyle/>
+          <a:p>
+            <a:endParaRPr lang="fr-FR"/>
+          </a:p>
+        </p:txBody>
+      </p:sp>
+      <p:pic>
+        <p:nvPicPr>
+          <p:cNvPr id="5" name="Image 0" descr="preencoded.png"/>
+          <p:cNvPicPr>
+            <a:picLocks noChangeAspect="1"/>
+          </p:cNvPicPr>
+          <p:nvPr/>
+        </p:nvPicPr>
+        <p:blipFill>
+          <a:blip r:embed="rId3"/>
+          <a:stretch>
+            <a:fillRect/>
+          </a:stretch>
+        </p:blipFill>
+        <p:spPr>
+          <a:xfrm>
+            <a:off x="960120" y="2148840"/>
+            <a:ext cx="822960" cy="822960"/>
+          </a:xfrm>
+          <a:prstGeom prst="rect">
+            <a:avLst/>
+          </a:prstGeom>
+        </p:spPr>
+      </p:pic>
+      <p:sp>
+        <p:nvSpPr>
+          <p:cNvPr id="6" name="Text 3"/>
+          <p:cNvSpPr/>
+          <p:nvPr/>
+        </p:nvSpPr>
+        <p:spPr>
+          <a:xfrm>
+            <a:off x="548640" y="3108960"/>
+            <a:ext cx="3200400" cy="822960"/>
+          </a:xfrm>
+          <a:prstGeom prst="rect">
+            <a:avLst/>
+          </a:prstGeom>
+          <a:noFill/>
+          <a:ln/>
+        </p:spPr>
+        <p:txBody>
+          <a:bodyPr wrap="square" lIns="0" tIns="0" rIns="0" bIns="0" rtlCol="0" anchor="ctr"/>
+          <a:lstStyle/>
+          <a:p>
+            <a:pPr marL="0" indent="0" algn="ctr">
+              <a:buNone/>
+            </a:pPr>
+            <a:r>
+              <a:rPr lang="en-US" sz="4400" b="1" dirty="0">
+                <a:solidFill>
+                  <a:srgbClr val="D85A30"/>
+                </a:solidFill>
+                <a:latin typeface="Georgia" pitchFamily="34" charset="0"/>
+                <a:ea typeface="Georgia" pitchFamily="34" charset="-122"/>
+                <a:cs typeface="Georgia" pitchFamily="34" charset="-120"/>
+              </a:rPr>
+              <a:t>&lt; 100 ms</a:t>
+            </a:r>
+            <a:endParaRPr lang="en-US" sz="4400" dirty="0"/>
+          </a:p>
+        </p:txBody>
+      </p:sp>
+      <p:sp>
+        <p:nvSpPr>
+          <p:cNvPr id="7" name="Text 4"/>
+          <p:cNvSpPr/>
+          <p:nvPr/>
+        </p:nvSpPr>
+        <p:spPr>
+          <a:xfrm>
+            <a:off x="685800" y="4023360"/>
+            <a:ext cx="2926080" cy="1097280"/>
+          </a:xfrm>
+          <a:prstGeom prst="rect">
+            <a:avLst/>
+          </a:prstGeom>
+          <a:noFill/>
+          <a:ln/>
+        </p:spPr>
+        <p:txBody>
+          <a:bodyPr wrap="square" lIns="0" tIns="0" rIns="0" bIns="0" rtlCol="0" anchor="ctr"/>
+          <a:lstStyle/>
+          <a:p>
+            <a:pPr marL="0" indent="0" algn="ctr">
+              <a:buNone/>
+            </a:pPr>
+            <a:r>
+              <a:rPr lang="en-US" sz="1400" dirty="0">
+                <a:solidFill>
+                  <a:srgbClr val="C8CCE6"/>
+                </a:solidFill>
+                <a:latin typeface="Calibri" pitchFamily="34" charset="0"/>
+                <a:ea typeface="Calibri" pitchFamily="34" charset="-122"/>
+                <a:cs typeface="Calibri" pitchFamily="34" charset="-120"/>
+              </a:rPr>
+              <a:t>scoring pendant que la transaction est en attente</a:t>
+            </a:r>
+            <a:endParaRPr lang="en-US" sz="1400" dirty="0"/>
+          </a:p>
+        </p:txBody>
+      </p:sp>
+      <p:sp>
+        <p:nvSpPr>
+          <p:cNvPr id="8" name="Shape 5"/>
+          <p:cNvSpPr/>
+          <p:nvPr/>
+        </p:nvSpPr>
+        <p:spPr>
+          <a:xfrm>
+            <a:off x="4160520" y="1874520"/>
+            <a:ext cx="457200" cy="457200"/>
+          </a:xfrm>
+          <a:prstGeom prst="ellipse">
+            <a:avLst/>
+          </a:prstGeom>
+          <a:solidFill>
+            <a:srgbClr val="6C63FF"/>
+          </a:solidFill>
+          <a:ln/>
+        </p:spPr>
+        <p:txBody>
+          <a:bodyPr/>
+          <a:lstStyle/>
+          <a:p>
+            <a:endParaRPr lang="fr-FR"/>
+          </a:p>
+        </p:txBody>
+      </p:sp>
+      <p:sp>
+        <p:nvSpPr>
+          <p:cNvPr id="9" name="Text 6"/>
+          <p:cNvSpPr/>
+          <p:nvPr/>
+        </p:nvSpPr>
+        <p:spPr>
+          <a:xfrm>
+            <a:off x="4160520" y="1874520"/>
+            <a:ext cx="457200" cy="457200"/>
+          </a:xfrm>
+          <a:prstGeom prst="rect">
+            <a:avLst/>
+          </a:prstGeom>
+          <a:noFill/>
+          <a:ln/>
+        </p:spPr>
+        <p:txBody>
+          <a:bodyPr wrap="square" lIns="0" tIns="0" rIns="0" bIns="0" rtlCol="0" anchor="ctr"/>
+          <a:lstStyle/>
+          <a:p>
+            <a:pPr marL="0" indent="0" algn="ctr">
+              <a:buNone/>
+            </a:pPr>
+            <a:r>
+              <a:rPr lang="en-US" sz="1600" b="1" dirty="0">
+                <a:solidFill>
+                  <a:srgbClr val="FFFFFF"/>
+                </a:solidFill>
+                <a:latin typeface="Calibri" pitchFamily="34" charset="0"/>
+                <a:ea typeface="Calibri" pitchFamily="34" charset="-122"/>
+                <a:cs typeface="Calibri" pitchFamily="34" charset="-120"/>
+              </a:rPr>
+              <a:t>1</a:t>
+            </a:r>
+            <a:endParaRPr lang="en-US" sz="1600" dirty="0"/>
+          </a:p>
+        </p:txBody>
+      </p:sp>
+      <p:sp>
+        <p:nvSpPr>
+          <p:cNvPr id="10" name="Text 7"/>
+          <p:cNvSpPr/>
+          <p:nvPr/>
+        </p:nvSpPr>
+        <p:spPr>
+          <a:xfrm>
+            <a:off x="4800600" y="1828800"/>
+            <a:ext cx="7040880" cy="548640"/>
+          </a:xfrm>
+          <a:prstGeom prst="rect">
+            <a:avLst/>
+          </a:prstGeom>
+          <a:noFill/>
+          <a:ln/>
+        </p:spPr>
+        <p:txBody>
+          <a:bodyPr wrap="square" lIns="0" tIns="0" rIns="0" bIns="0" rtlCol="0" anchor="ctr"/>
+          <a:lstStyle/>
+          <a:p>
+            <a:pPr marL="0" indent="0">
+              <a:buNone/>
+            </a:pPr>
+            <a:r>
+              <a:rPr lang="en-US" sz="1500" dirty="0">
+                <a:solidFill>
+                  <a:srgbClr val="EAECF7"/>
+                </a:solidFill>
+                <a:latin typeface="Calibri" pitchFamily="34" charset="0"/>
+                <a:ea typeface="Calibri" pitchFamily="34" charset="-122"/>
+                <a:cs typeface="Calibri" pitchFamily="34" charset="-120"/>
+              </a:rPr>
+              <a:t>Événement CDC Debezium consommé depuis Kafka</a:t>
+            </a:r>
+            <a:endParaRPr lang="en-US" sz="1500" dirty="0"/>
+          </a:p>
+        </p:txBody>
+      </p:sp>
+      <p:sp>
+        <p:nvSpPr>
+          <p:cNvPr id="11" name="Shape 8"/>
+          <p:cNvSpPr/>
+          <p:nvPr/>
+        </p:nvSpPr>
+        <p:spPr>
+          <a:xfrm>
+            <a:off x="4160520" y="2679192"/>
+            <a:ext cx="457200" cy="457200"/>
+          </a:xfrm>
+          <a:prstGeom prst="ellipse">
+            <a:avLst/>
+          </a:prstGeom>
+          <a:solidFill>
+            <a:srgbClr val="6C63FF"/>
+          </a:solidFill>
+          <a:ln/>
+        </p:spPr>
+        <p:txBody>
+          <a:bodyPr/>
+          <a:lstStyle/>
+          <a:p>
+            <a:endParaRPr lang="fr-FR"/>
+          </a:p>
+        </p:txBody>
+      </p:sp>
+      <p:sp>
+        <p:nvSpPr>
+          <p:cNvPr id="12" name="Text 9"/>
+          <p:cNvSpPr/>
+          <p:nvPr/>
+        </p:nvSpPr>
+        <p:spPr>
+          <a:xfrm>
+            <a:off x="4160520" y="2679192"/>
+            <a:ext cx="457200" cy="457200"/>
+          </a:xfrm>
+          <a:prstGeom prst="rect">
+            <a:avLst/>
+          </a:prstGeom>
+          <a:noFill/>
+          <a:ln/>
+        </p:spPr>
+        <p:txBody>
+          <a:bodyPr wrap="square" lIns="0" tIns="0" rIns="0" bIns="0" rtlCol="0" anchor="ctr"/>
+          <a:lstStyle/>
+          <a:p>
+            <a:pPr marL="0" indent="0" algn="ctr">
+              <a:buNone/>
+            </a:pPr>
+            <a:r>
+              <a:rPr lang="en-US" sz="1600" b="1" dirty="0">
+                <a:solidFill>
+                  <a:srgbClr val="FFFFFF"/>
+                </a:solidFill>
+                <a:latin typeface="Calibri" pitchFamily="34" charset="0"/>
+                <a:ea typeface="Calibri" pitchFamily="34" charset="-122"/>
+                <a:cs typeface="Calibri" pitchFamily="34" charset="-120"/>
+              </a:rPr>
+              <a:t>2</a:t>
+            </a:r>
+            <a:endParaRPr lang="en-US" sz="1600" dirty="0"/>
+          </a:p>
+        </p:txBody>
+      </p:sp>
+      <p:sp>
+        <p:nvSpPr>
+          <p:cNvPr id="13" name="Text 10"/>
+          <p:cNvSpPr/>
+          <p:nvPr/>
+        </p:nvSpPr>
+        <p:spPr>
+          <a:xfrm>
+            <a:off x="4800600" y="2633472"/>
+            <a:ext cx="7040880" cy="548640"/>
+          </a:xfrm>
+          <a:prstGeom prst="rect">
+            <a:avLst/>
+          </a:prstGeom>
+          <a:noFill/>
+          <a:ln/>
+        </p:spPr>
+        <p:txBody>
+          <a:bodyPr wrap="square" lIns="0" tIns="0" rIns="0" bIns="0" rtlCol="0" anchor="ctr"/>
+          <a:lstStyle/>
+          <a:p>
+            <a:pPr marL="0" indent="0">
+              <a:buNone/>
+            </a:pPr>
+            <a:r>
+              <a:rPr lang="en-US" sz="1500" dirty="0">
+                <a:solidFill>
+                  <a:srgbClr val="EAECF7"/>
+                </a:solidFill>
+                <a:latin typeface="Calibri" pitchFamily="34" charset="0"/>
+                <a:ea typeface="Calibri" pitchFamily="34" charset="-122"/>
+                <a:cs typeface="Calibri" pitchFamily="34" charset="-120"/>
+              </a:rPr>
+              <a:t>Vélocité 1 h / 24 h lue dans Redis (&lt; 1 ms)</a:t>
+            </a:r>
+            <a:endParaRPr lang="en-US" sz="1500" dirty="0"/>
+          </a:p>
+        </p:txBody>
+      </p:sp>
+      <p:sp>
+        <p:nvSpPr>
+          <p:cNvPr id="14" name="Shape 11"/>
+          <p:cNvSpPr/>
+          <p:nvPr/>
+        </p:nvSpPr>
+        <p:spPr>
+          <a:xfrm>
+            <a:off x="4160520" y="3483864"/>
+            <a:ext cx="457200" cy="457200"/>
+          </a:xfrm>
+          <a:prstGeom prst="ellipse">
+            <a:avLst/>
+          </a:prstGeom>
+          <a:solidFill>
+            <a:srgbClr val="6C63FF"/>
+          </a:solidFill>
+          <a:ln/>
+        </p:spPr>
+        <p:txBody>
+          <a:bodyPr/>
+          <a:lstStyle/>
+          <a:p>
+            <a:endParaRPr lang="fr-FR"/>
+          </a:p>
+        </p:txBody>
+      </p:sp>
+      <p:sp>
+        <p:nvSpPr>
+          <p:cNvPr id="15" name="Text 12"/>
+          <p:cNvSpPr/>
+          <p:nvPr/>
+        </p:nvSpPr>
+        <p:spPr>
+          <a:xfrm>
+            <a:off x="4160520" y="3483864"/>
+            <a:ext cx="457200" cy="457200"/>
+          </a:xfrm>
+          <a:prstGeom prst="rect">
+            <a:avLst/>
+          </a:prstGeom>
+          <a:noFill/>
+          <a:ln/>
+        </p:spPr>
+        <p:txBody>
+          <a:bodyPr wrap="square" lIns="0" tIns="0" rIns="0" bIns="0" rtlCol="0" anchor="ctr"/>
+          <a:lstStyle/>
+          <a:p>
+            <a:pPr marL="0" indent="0" algn="ctr">
+              <a:buNone/>
+            </a:pPr>
+            <a:r>
+              <a:rPr lang="en-US" sz="1600" b="1" dirty="0">
+                <a:solidFill>
+                  <a:srgbClr val="FFFFFF"/>
+                </a:solidFill>
+                <a:latin typeface="Calibri" pitchFamily="34" charset="0"/>
+                <a:ea typeface="Calibri" pitchFamily="34" charset="-122"/>
+                <a:cs typeface="Calibri" pitchFamily="34" charset="-120"/>
+              </a:rPr>
+              <a:t>3</a:t>
+            </a:r>
+            <a:endParaRPr lang="en-US" sz="1600" dirty="0"/>
+          </a:p>
+        </p:txBody>
+      </p:sp>
+      <p:sp>
+        <p:nvSpPr>
+          <p:cNvPr id="16" name="Text 13"/>
+          <p:cNvSpPr/>
+          <p:nvPr/>
+        </p:nvSpPr>
+        <p:spPr>
+          <a:xfrm>
+            <a:off x="4800600" y="3438144"/>
+            <a:ext cx="7040880" cy="548640"/>
+          </a:xfrm>
+          <a:prstGeom prst="rect">
+            <a:avLst/>
+          </a:prstGeom>
+          <a:noFill/>
+          <a:ln/>
+        </p:spPr>
+        <p:txBody>
+          <a:bodyPr wrap="square" lIns="0" tIns="0" rIns="0" bIns="0" rtlCol="0" anchor="ctr"/>
+          <a:lstStyle/>
+          <a:p>
+            <a:pPr marL="0" indent="0">
+              <a:buNone/>
+            </a:pPr>
+            <a:r>
+              <a:rPr lang="en-US" sz="1500" dirty="0">
+                <a:solidFill>
+                  <a:srgbClr val="EAECF7"/>
+                </a:solidFill>
+                <a:latin typeface="Calibri" pitchFamily="34" charset="0"/>
+                <a:ea typeface="Calibri" pitchFamily="34" charset="-122"/>
+                <a:cs typeface="Calibri" pitchFamily="34" charset="-120"/>
+              </a:rPr>
+              <a:t>XGBoost (MLflow) ou 5 règles en fallback ; seuils 0.60 / 0.85</a:t>
+            </a:r>
+            <a:endParaRPr lang="en-US" sz="1500" dirty="0"/>
+          </a:p>
+        </p:txBody>
+      </p:sp>
+      <p:sp>
+        <p:nvSpPr>
+          <p:cNvPr id="17" name="Shape 14"/>
+          <p:cNvSpPr/>
+          <p:nvPr/>
+        </p:nvSpPr>
+        <p:spPr>
+          <a:xfrm>
+            <a:off x="4160520" y="4288536"/>
+            <a:ext cx="457200" cy="457200"/>
+          </a:xfrm>
+          <a:prstGeom prst="ellipse">
+            <a:avLst/>
+          </a:prstGeom>
+          <a:solidFill>
+            <a:srgbClr val="6C63FF"/>
+          </a:solidFill>
+          <a:ln/>
+        </p:spPr>
+        <p:txBody>
+          <a:bodyPr/>
+          <a:lstStyle/>
+          <a:p>
+            <a:endParaRPr lang="fr-FR"/>
+          </a:p>
+        </p:txBody>
+      </p:sp>
+      <p:sp>
+        <p:nvSpPr>
+          <p:cNvPr id="18" name="Text 15"/>
+          <p:cNvSpPr/>
+          <p:nvPr/>
+        </p:nvSpPr>
+        <p:spPr>
+          <a:xfrm>
+            <a:off x="4160520" y="4288536"/>
+            <a:ext cx="457200" cy="457200"/>
+          </a:xfrm>
+          <a:prstGeom prst="rect">
+            <a:avLst/>
+          </a:prstGeom>
+          <a:noFill/>
+          <a:ln/>
+        </p:spPr>
+        <p:txBody>
+          <a:bodyPr wrap="square" lIns="0" tIns="0" rIns="0" bIns="0" rtlCol="0" anchor="ctr"/>
+          <a:lstStyle/>
+          <a:p>
+            <a:pPr marL="0" indent="0" algn="ctr">
+              <a:buNone/>
+            </a:pPr>
+            <a:r>
+              <a:rPr lang="en-US" sz="1600" b="1" dirty="0">
+                <a:solidFill>
+                  <a:srgbClr val="FFFFFF"/>
+                </a:solidFill>
+                <a:latin typeface="Calibri" pitchFamily="34" charset="0"/>
+                <a:ea typeface="Calibri" pitchFamily="34" charset="-122"/>
+                <a:cs typeface="Calibri" pitchFamily="34" charset="-120"/>
+              </a:rPr>
+              <a:t>4</a:t>
+            </a:r>
+            <a:endParaRPr lang="en-US" sz="1600" dirty="0"/>
+          </a:p>
+        </p:txBody>
+      </p:sp>
+      <p:sp>
+        <p:nvSpPr>
+          <p:cNvPr id="19" name="Text 16"/>
+          <p:cNvSpPr/>
+          <p:nvPr/>
+        </p:nvSpPr>
+        <p:spPr>
+          <a:xfrm>
+            <a:off x="4800600" y="4242816"/>
+            <a:ext cx="7040880" cy="548640"/>
+          </a:xfrm>
+          <a:prstGeom prst="rect">
+            <a:avLst/>
+          </a:prstGeom>
+          <a:noFill/>
+          <a:ln/>
+        </p:spPr>
+        <p:txBody>
+          <a:bodyPr wrap="square" lIns="0" tIns="0" rIns="0" bIns="0" rtlCol="0" anchor="ctr"/>
+          <a:lstStyle/>
+          <a:p>
+            <a:pPr marL="0" indent="0">
+              <a:buNone/>
+            </a:pPr>
+            <a:r>
+              <a:rPr lang="en-US" sz="1500" dirty="0">
+                <a:solidFill>
+                  <a:srgbClr val="EAECF7"/>
+                </a:solidFill>
+                <a:latin typeface="Calibri" pitchFamily="34" charset="0"/>
+                <a:ea typeface="Calibri" pitchFamily="34" charset="-122"/>
+                <a:cs typeface="Calibri" pitchFamily="34" charset="-120"/>
+              </a:rPr>
+              <a:t>Décision écrite dans PostgreSQL + MongoDB</a:t>
+            </a:r>
+            <a:endParaRPr lang="en-US" sz="1500" dirty="0"/>
+          </a:p>
+        </p:txBody>
+      </p:sp>
+      <p:sp>
+        <p:nvSpPr>
+          <p:cNvPr id="20" name="Shape 17"/>
+          <p:cNvSpPr/>
+          <p:nvPr/>
+        </p:nvSpPr>
+        <p:spPr>
+          <a:xfrm>
+            <a:off x="4160520" y="5093208"/>
+            <a:ext cx="457200" cy="457200"/>
+          </a:xfrm>
+          <a:prstGeom prst="ellipse">
+            <a:avLst/>
+          </a:prstGeom>
+          <a:solidFill>
+            <a:srgbClr val="6C63FF"/>
+          </a:solidFill>
+          <a:ln/>
+        </p:spPr>
+        <p:txBody>
+          <a:bodyPr/>
+          <a:lstStyle/>
+          <a:p>
+            <a:endParaRPr lang="fr-FR"/>
+          </a:p>
+        </p:txBody>
+      </p:sp>
+      <p:sp>
+        <p:nvSpPr>
+          <p:cNvPr id="21" name="Text 18"/>
+          <p:cNvSpPr/>
+          <p:nvPr/>
+        </p:nvSpPr>
+        <p:spPr>
+          <a:xfrm>
+            <a:off x="4160520" y="5093208"/>
+            <a:ext cx="457200" cy="457200"/>
+          </a:xfrm>
+          <a:prstGeom prst="rect">
+            <a:avLst/>
+          </a:prstGeom>
+          <a:noFill/>
+          <a:ln/>
+        </p:spPr>
+        <p:txBody>
+          <a:bodyPr wrap="square" lIns="0" tIns="0" rIns="0" bIns="0" rtlCol="0" anchor="ctr"/>
+          <a:lstStyle/>
+          <a:p>
+            <a:pPr marL="0" indent="0" algn="ctr">
+              <a:buNone/>
+            </a:pPr>
+            <a:r>
+              <a:rPr lang="en-US" sz="1600" b="1" dirty="0">
+                <a:solidFill>
+                  <a:srgbClr val="FFFFFF"/>
+                </a:solidFill>
+                <a:latin typeface="Calibri" pitchFamily="34" charset="0"/>
+                <a:ea typeface="Calibri" pitchFamily="34" charset="-122"/>
+                <a:cs typeface="Calibri" pitchFamily="34" charset="-120"/>
+              </a:rPr>
+              <a:t>5</a:t>
+            </a:r>
+            <a:endParaRPr lang="en-US" sz="1600" dirty="0"/>
+          </a:p>
+        </p:txBody>
+      </p:sp>
+      <p:sp>
+        <p:nvSpPr>
+          <p:cNvPr id="22" name="Text 19"/>
+          <p:cNvSpPr/>
+          <p:nvPr/>
+        </p:nvSpPr>
+        <p:spPr>
+          <a:xfrm>
+            <a:off x="4800600" y="5047488"/>
+            <a:ext cx="7040880" cy="548640"/>
+          </a:xfrm>
+          <a:prstGeom prst="rect">
+            <a:avLst/>
+          </a:prstGeom>
+          <a:noFill/>
+          <a:ln/>
+        </p:spPr>
+        <p:txBody>
+          <a:bodyPr wrap="square" lIns="0" tIns="0" rIns="0" bIns="0" rtlCol="0" anchor="ctr"/>
+          <a:lstStyle/>
+          <a:p>
+            <a:pPr marL="0" indent="0">
+              <a:buNone/>
+            </a:pPr>
+            <a:r>
+              <a:rPr lang="en-US" sz="1500" dirty="0">
+                <a:solidFill>
+                  <a:srgbClr val="EAECF7"/>
+                </a:solidFill>
+                <a:latin typeface="Calibri" pitchFamily="34" charset="0"/>
+                <a:ea typeface="Calibri" pitchFamily="34" charset="-122"/>
+                <a:cs typeface="Calibri" pitchFamily="34" charset="-120"/>
+              </a:rPr>
+              <a:t>Evidently suit la dérive · test offline : précision 0,95 · rappel 0,97</a:t>
+            </a:r>
+            <a:endParaRPr lang="en-US" sz="1500" dirty="0"/>
+          </a:p>
+        </p:txBody>
+      </p:sp>
+      <p:sp>
+        <p:nvSpPr>
+          <p:cNvPr id="23" name="Text 20"/>
+          <p:cNvSpPr/>
+          <p:nvPr/>
+        </p:nvSpPr>
+        <p:spPr>
+          <a:xfrm>
+            <a:off x="11430000" y="6355080"/>
+            <a:ext cx="548640" cy="274320"/>
+          </a:xfrm>
+          <a:prstGeom prst="rect">
+            <a:avLst/>
+          </a:prstGeom>
+          <a:noFill/>
+          <a:ln/>
+        </p:spPr>
+        <p:txBody>
+          <a:bodyPr wrap="square" lIns="0" tIns="0" rIns="0" bIns="0" rtlCol="0" anchor="ctr"/>
+          <a:lstStyle/>
+          <a:p>
+            <a:pPr marL="0" indent="0" algn="r">
+              <a:buNone/>
+            </a:pPr>
+            <a:r>
+              <a:rPr lang="en-US" sz="1100" dirty="0">
+                <a:solidFill>
+                  <a:srgbClr val="6B7280"/>
+                </a:solidFill>
+                <a:latin typeface="Calibri" pitchFamily="34" charset="0"/>
+                <a:ea typeface="Calibri" pitchFamily="34" charset="-122"/>
+                <a:cs typeface="Calibri" pitchFamily="34" charset="-120"/>
+              </a:rPr>
+              <a:t>08</a:t>
+            </a:r>
+            <a:endParaRPr lang="en-US" sz="1100" dirty="0"/>
+          </a:p>
+        </p:txBody>
+      </p:sp>
+    </p:spTree>
+  </p:cSld>
+  <p:clrMapOvr>
+    <a:masterClrMapping/>
+  </p:clrMapOvr>
+</p:sld>
+</file>
+
+<file path=ppt/slides/slide11.xml><?xml version="1.0" encoding="utf-8"?>
+<p:sld xmlns:a="http://schemas.openxmlformats.org/drawingml/2006/main" xmlns:r="http://schemas.openxmlformats.org/officeDocument/2006/relationships" xmlns:p="http://schemas.openxmlformats.org/presentationml/2006/main">
+  <p:cSld name="Slide 9">
+    <p:bg>
+      <p:bgPr>
+        <a:solidFill>
+          <a:srgbClr val="F4F5FB"/>
+        </a:solidFill>
+        <a:effectLst/>
+      </p:bgPr>
+    </p:bg>
+    <p:spTree>
+      <p:nvGrpSpPr>
+        <p:cNvPr id="1" name=""/>
+        <p:cNvGrpSpPr/>
+        <p:nvPr/>
+      </p:nvGrpSpPr>
+      <p:grpSpPr>
+        <a:xfrm>
+          <a:off x="0" y="0"/>
+          <a:ext cx="0" cy="0"/>
+          <a:chOff x="0" y="0"/>
+          <a:chExt cx="0" cy="0"/>
+        </a:xfrm>
+      </p:grpSpPr>
+      <p:sp>
+        <p:nvSpPr>
+          <p:cNvPr id="2" name="Text 0"/>
+          <p:cNvSpPr/>
+          <p:nvPr/>
+        </p:nvSpPr>
+        <p:spPr>
+          <a:xfrm>
+            <a:off x="548640" y="330200"/>
+            <a:ext cx="10972800" cy="274320"/>
+          </a:xfrm>
+          <a:prstGeom prst="rect">
+            <a:avLst/>
+          </a:prstGeom>
+          <a:noFill/>
+          <a:ln/>
+        </p:spPr>
+        <p:txBody>
+          <a:bodyPr wrap="square" lIns="0" tIns="0" rIns="0" bIns="0" rtlCol="0" anchor="ctr"/>
+          <a:lstStyle/>
+          <a:p>
+            <a:pPr marL="0" indent="0">
+              <a:buNone/>
+            </a:pPr>
+            <a:r>
+              <a:rPr lang="en-US" sz="1200" b="1" kern="0" spc="300" dirty="0">
+                <a:solidFill>
+                  <a:srgbClr val="6C63FF"/>
+                </a:solidFill>
+                <a:latin typeface="Calibri" pitchFamily="34" charset="0"/>
+                <a:ea typeface="Calibri" pitchFamily="34" charset="-122"/>
+                <a:cs typeface="Calibri" pitchFamily="34" charset="-120"/>
+              </a:rPr>
+              <a:t>INDUSTRIALISATION</a:t>
+            </a:r>
+            <a:endParaRPr lang="en-US" sz="1200" dirty="0"/>
+          </a:p>
+        </p:txBody>
+      </p:sp>
+      <p:sp>
+        <p:nvSpPr>
+          <p:cNvPr id="3" name="Text 1"/>
+          <p:cNvSpPr/>
+          <p:nvPr/>
+        </p:nvSpPr>
+        <p:spPr>
+          <a:xfrm>
+            <a:off x="548640" y="640080"/>
+            <a:ext cx="11064240" cy="640080"/>
+          </a:xfrm>
+          <a:prstGeom prst="rect">
+            <a:avLst/>
+          </a:prstGeom>
+          <a:noFill/>
+          <a:ln/>
+        </p:spPr>
+        <p:txBody>
+          <a:bodyPr wrap="square" lIns="0" tIns="0" rIns="0" bIns="0" rtlCol="0" anchor="ctr"/>
+          <a:lstStyle/>
+          <a:p>
+            <a:pPr marL="0" indent="0">
+              <a:buNone/>
+            </a:pPr>
+            <a:r>
+              <a:rPr lang="en-US" sz="3000" b="1" dirty="0">
+                <a:solidFill>
+                  <a:srgbClr val="1A1F36"/>
+                </a:solidFill>
+                <a:latin typeface="Georgia" pitchFamily="34" charset="0"/>
+                <a:ea typeface="Georgia" pitchFamily="34" charset="-122"/>
+                <a:cs typeface="Georgia" pitchFamily="34" charset="-120"/>
+              </a:rPr>
+              <a:t>Du PoC local à la cible cloud</a:t>
+            </a:r>
+            <a:endParaRPr lang="en-US" sz="3000" dirty="0"/>
+          </a:p>
+        </p:txBody>
+      </p:sp>
+      <p:sp>
+        <p:nvSpPr>
+          <p:cNvPr id="4" name="Shape 2"/>
+          <p:cNvSpPr/>
+          <p:nvPr/>
+        </p:nvSpPr>
+        <p:spPr>
+          <a:xfrm>
+            <a:off x="548640" y="1508760"/>
+            <a:ext cx="5394960" cy="4064000"/>
+          </a:xfrm>
+          <a:prstGeom prst="rect">
+            <a:avLst/>
+          </a:prstGeom>
+          <a:solidFill>
+            <a:srgbClr val="FFFFFF"/>
+          </a:solidFill>
+          <a:ln w="12700">
+            <a:solidFill>
+              <a:srgbClr val="E3E5F0"/>
+            </a:solidFill>
+            <a:prstDash val="solid"/>
+          </a:ln>
+          <a:effectLst>
+            <a:outerShdw blurRad="114300" dist="38100" dir="8100000" algn="bl" rotWithShape="0">
+              <a:srgbClr val="000000">
+                <a:alpha val="16000"/>
+              </a:srgbClr>
+            </a:outerShdw>
+          </a:effectLst>
+        </p:spPr>
+        <p:txBody>
+          <a:bodyPr/>
+          <a:lstStyle/>
+          <a:p>
+            <a:endParaRPr lang="fr-FR"/>
+          </a:p>
+        </p:txBody>
+      </p:sp>
+      <p:sp>
+        <p:nvSpPr>
+          <p:cNvPr id="5" name="Shape 3"/>
+          <p:cNvSpPr/>
+          <p:nvPr/>
+        </p:nvSpPr>
+        <p:spPr>
+          <a:xfrm>
+            <a:off x="548640" y="1508760"/>
+            <a:ext cx="5394960" cy="868680"/>
+          </a:xfrm>
+          <a:prstGeom prst="rect">
+            <a:avLst/>
+          </a:prstGeom>
+          <a:solidFill>
+            <a:srgbClr val="1D9E75"/>
+          </a:solidFill>
+          <a:ln/>
+        </p:spPr>
+        <p:txBody>
+          <a:bodyPr/>
+          <a:lstStyle/>
+          <a:p>
+            <a:endParaRPr lang="fr-FR"/>
+          </a:p>
+        </p:txBody>
+      </p:sp>
+      <p:pic>
+        <p:nvPicPr>
+          <p:cNvPr id="6" name="Image 0" descr="preencoded.png"/>
+          <p:cNvPicPr>
+            <a:picLocks noChangeAspect="1"/>
+          </p:cNvPicPr>
+          <p:nvPr/>
+        </p:nvPicPr>
+        <p:blipFill>
+          <a:blip r:embed="rId3"/>
+          <a:stretch>
+            <a:fillRect/>
+          </a:stretch>
+        </p:blipFill>
+        <p:spPr>
+          <a:xfrm>
+            <a:off x="868680" y="1691640"/>
+            <a:ext cx="502920" cy="502920"/>
+          </a:xfrm>
+          <a:prstGeom prst="rect">
+            <a:avLst/>
+          </a:prstGeom>
+        </p:spPr>
+      </p:pic>
+      <p:sp>
+        <p:nvSpPr>
+          <p:cNvPr id="7" name="Text 4"/>
+          <p:cNvSpPr/>
+          <p:nvPr/>
+        </p:nvSpPr>
+        <p:spPr>
+          <a:xfrm>
+            <a:off x="1508760" y="1664208"/>
+            <a:ext cx="4297680" cy="320040"/>
+          </a:xfrm>
+          <a:prstGeom prst="rect">
+            <a:avLst/>
+          </a:prstGeom>
+          <a:noFill/>
+          <a:ln/>
+        </p:spPr>
+        <p:txBody>
+          <a:bodyPr wrap="square" lIns="0" tIns="0" rIns="0" bIns="0" rtlCol="0" anchor="ctr"/>
+          <a:lstStyle/>
+          <a:p>
+            <a:pPr marL="0" indent="0">
+              <a:buNone/>
+            </a:pPr>
+            <a:r>
+              <a:rPr lang="en-US" sz="1400" b="1" kern="0" spc="100" dirty="0">
+                <a:solidFill>
+                  <a:srgbClr val="FFFFFF"/>
+                </a:solidFill>
+                <a:latin typeface="Calibri" pitchFamily="34" charset="0"/>
+                <a:ea typeface="Calibri" pitchFamily="34" charset="-122"/>
+                <a:cs typeface="Calibri" pitchFamily="34" charset="-120"/>
+              </a:rPr>
+              <a:t>PoC FONCTIONNEL</a:t>
+            </a:r>
+            <a:endParaRPr lang="en-US" sz="1400" dirty="0"/>
+          </a:p>
+        </p:txBody>
+      </p:sp>
+      <p:sp>
+        <p:nvSpPr>
+          <p:cNvPr id="8" name="Text 5"/>
+          <p:cNvSpPr/>
+          <p:nvPr/>
+        </p:nvSpPr>
+        <p:spPr>
+          <a:xfrm>
+            <a:off x="1508760" y="2006600"/>
+            <a:ext cx="4297680" cy="320040"/>
+          </a:xfrm>
+          <a:prstGeom prst="rect">
+            <a:avLst/>
+          </a:prstGeom>
+          <a:noFill/>
+          <a:ln/>
+        </p:spPr>
+        <p:txBody>
+          <a:bodyPr wrap="square" lIns="0" tIns="0" rIns="0" bIns="0" rtlCol="0" anchor="ctr"/>
+          <a:lstStyle/>
+          <a:p>
+            <a:pPr marL="0" indent="0">
+              <a:buNone/>
+            </a:pPr>
+            <a:r>
+              <a:rPr lang="en-US" sz="1200" dirty="0">
+                <a:solidFill>
+                  <a:srgbClr val="EAF0FA"/>
+                </a:solidFill>
+                <a:latin typeface="Calibri" pitchFamily="34" charset="0"/>
+                <a:ea typeface="Calibri" pitchFamily="34" charset="-122"/>
+                <a:cs typeface="Calibri" pitchFamily="34" charset="-120"/>
+              </a:rPr>
+              <a:t>Machine personnelle · Docker Compose</a:t>
+            </a:r>
+            <a:endParaRPr lang="en-US" sz="1200" dirty="0"/>
+          </a:p>
+        </p:txBody>
+      </p:sp>
+      <p:sp>
+        <p:nvSpPr>
+          <p:cNvPr id="9" name="Text 6"/>
+          <p:cNvSpPr/>
+          <p:nvPr/>
+        </p:nvSpPr>
+        <p:spPr>
+          <a:xfrm>
+            <a:off x="914400" y="2697480"/>
+            <a:ext cx="4709160" cy="2743200"/>
+          </a:xfrm>
+          <a:prstGeom prst="rect">
+            <a:avLst/>
+          </a:prstGeom>
+          <a:noFill/>
+          <a:ln/>
+        </p:spPr>
+        <p:txBody>
+          <a:bodyPr wrap="square" lIns="0" tIns="0" rIns="0" bIns="0" rtlCol="0" anchor="t"/>
+          <a:lstStyle/>
+          <a:p>
+            <a:pPr marL="342900" indent="-342900">
+              <a:spcAft>
+                <a:spcPts val="4100"/>
+              </a:spcAft>
+              <a:buSzPct val="100000"/>
+              <a:buChar char="•"/>
+            </a:pPr>
+            <a:r>
+              <a:rPr lang="en-US" sz="1500" dirty="0">
+                <a:solidFill>
+                  <a:srgbClr val="1A1F36"/>
+                </a:solidFill>
+                <a:latin typeface="Calibri" pitchFamily="34" charset="0"/>
+                <a:ea typeface="Calibri" pitchFamily="34" charset="-122"/>
+                <a:cs typeface="Calibri" pitchFamily="34" charset="-120"/>
+              </a:rPr>
+              <a:t>Chaîne complète réelle, testée en CI (GitHub Actions)</a:t>
+            </a:r>
+            <a:endParaRPr lang="en-US" sz="1500" dirty="0"/>
+          </a:p>
+          <a:p>
+            <a:pPr marL="342900" indent="-342900">
+              <a:spcAft>
+                <a:spcPts val="4100"/>
+              </a:spcAft>
+              <a:buSzPct val="100000"/>
+              <a:buChar char="•"/>
+            </a:pPr>
+            <a:r>
+              <a:rPr lang="en-US" sz="1500" dirty="0">
+                <a:solidFill>
+                  <a:srgbClr val="1A1F36"/>
+                </a:solidFill>
+                <a:latin typeface="Calibri" pitchFamily="34" charset="0"/>
+                <a:ea typeface="Calibri" pitchFamily="34" charset="-122"/>
+                <a:cs typeface="Calibri" pitchFamily="34" charset="-120"/>
+              </a:rPr>
+              <a:t>Postgres · Kafka · Debezium · Redis · Mongo · Airflow</a:t>
+            </a:r>
+            <a:endParaRPr lang="en-US" sz="1500" dirty="0"/>
+          </a:p>
+          <a:p>
+            <a:pPr marL="342900" indent="-342900">
+              <a:spcAft>
+                <a:spcPts val="4100"/>
+              </a:spcAft>
+              <a:buSzPct val="100000"/>
+              <a:buChar char="•"/>
+            </a:pPr>
+            <a:r>
+              <a:rPr lang="en-US" sz="1500" dirty="0">
+                <a:solidFill>
+                  <a:srgbClr val="1A1F36"/>
+                </a:solidFill>
+                <a:latin typeface="Calibri" pitchFamily="34" charset="0"/>
+                <a:ea typeface="Calibri" pitchFamily="34" charset="-122"/>
+                <a:cs typeface="Calibri" pitchFamily="34" charset="-120"/>
+              </a:rPr>
+              <a:t>XGBoost · MLflow · Evidently · Streamlit sécurisé</a:t>
+            </a:r>
+            <a:endParaRPr lang="en-US" sz="1500" dirty="0"/>
+          </a:p>
+          <a:p>
+            <a:pPr marL="342900" indent="-342900">
+              <a:spcAft>
+                <a:spcPts val="4100"/>
+              </a:spcAft>
+              <a:buSzPct val="100000"/>
+              <a:buChar char="•"/>
+            </a:pPr>
+            <a:r>
+              <a:rPr lang="en-US" sz="1500" dirty="0">
+                <a:solidFill>
+                  <a:srgbClr val="1A1F36"/>
+                </a:solidFill>
+                <a:latin typeface="Calibri" pitchFamily="34" charset="0"/>
+                <a:ea typeface="Calibri" pitchFamily="34" charset="-122"/>
+                <a:cs typeface="Calibri" pitchFamily="34" charset="-120"/>
+              </a:rPr>
+              <a:t>Coût quasi nul — contrainte budget assumée</a:t>
+            </a:r>
+            <a:endParaRPr lang="en-US" sz="1500" dirty="0"/>
+          </a:p>
+        </p:txBody>
+      </p:sp>
+      <p:sp>
+        <p:nvSpPr>
+          <p:cNvPr id="10" name="Shape 7"/>
+          <p:cNvSpPr/>
+          <p:nvPr/>
+        </p:nvSpPr>
+        <p:spPr>
+          <a:xfrm>
+            <a:off x="6172200" y="1508760"/>
+            <a:ext cx="5394960" cy="4064000"/>
+          </a:xfrm>
+          <a:prstGeom prst="rect">
+            <a:avLst/>
+          </a:prstGeom>
+          <a:solidFill>
+            <a:srgbClr val="FFFFFF"/>
+          </a:solidFill>
+          <a:ln w="12700">
+            <a:solidFill>
+              <a:srgbClr val="E3E5F0"/>
+            </a:solidFill>
+            <a:prstDash val="solid"/>
+          </a:ln>
+          <a:effectLst>
+            <a:outerShdw blurRad="114300" dist="38100" dir="8100000" algn="bl" rotWithShape="0">
+              <a:srgbClr val="000000">
+                <a:alpha val="16000"/>
+              </a:srgbClr>
+            </a:outerShdw>
+          </a:effectLst>
+        </p:spPr>
+        <p:txBody>
+          <a:bodyPr/>
+          <a:lstStyle/>
+          <a:p>
+            <a:endParaRPr lang="fr-FR"/>
+          </a:p>
+        </p:txBody>
+      </p:sp>
+      <p:sp>
+        <p:nvSpPr>
+          <p:cNvPr id="11" name="Shape 8"/>
+          <p:cNvSpPr/>
+          <p:nvPr/>
+        </p:nvSpPr>
+        <p:spPr>
+          <a:xfrm>
+            <a:off x="6172200" y="1508760"/>
+            <a:ext cx="5394960" cy="868680"/>
+          </a:xfrm>
+          <a:prstGeom prst="rect">
+            <a:avLst/>
+          </a:prstGeom>
+          <a:solidFill>
+            <a:srgbClr val="2F7BD6"/>
+          </a:solidFill>
+          <a:ln/>
+        </p:spPr>
+        <p:txBody>
+          <a:bodyPr/>
+          <a:lstStyle/>
+          <a:p>
+            <a:endParaRPr lang="fr-FR"/>
+          </a:p>
+        </p:txBody>
+      </p:sp>
+      <p:pic>
+        <p:nvPicPr>
+          <p:cNvPr id="12" name="Image 1" descr="preencoded.png"/>
+          <p:cNvPicPr>
+            <a:picLocks noChangeAspect="1"/>
+          </p:cNvPicPr>
+          <p:nvPr/>
+        </p:nvPicPr>
+        <p:blipFill>
+          <a:blip r:embed="rId4"/>
+          <a:stretch>
+            <a:fillRect/>
+          </a:stretch>
+        </p:blipFill>
+        <p:spPr>
+          <a:xfrm>
+            <a:off x="6492240" y="1691640"/>
+            <a:ext cx="502920" cy="502920"/>
+          </a:xfrm>
+          <a:prstGeom prst="rect">
+            <a:avLst/>
+          </a:prstGeom>
+        </p:spPr>
+      </p:pic>
+      <p:sp>
+        <p:nvSpPr>
+          <p:cNvPr id="13" name="Text 9"/>
+          <p:cNvSpPr/>
+          <p:nvPr/>
+        </p:nvSpPr>
+        <p:spPr>
+          <a:xfrm>
+            <a:off x="7132320" y="1664208"/>
+            <a:ext cx="4297680" cy="320040"/>
+          </a:xfrm>
+          <a:prstGeom prst="rect">
+            <a:avLst/>
+          </a:prstGeom>
+          <a:noFill/>
+          <a:ln/>
+        </p:spPr>
+        <p:txBody>
+          <a:bodyPr wrap="square" lIns="0" tIns="0" rIns="0" bIns="0" rtlCol="0" anchor="ctr"/>
+          <a:lstStyle/>
+          <a:p>
+            <a:pPr marL="0" indent="0">
+              <a:buNone/>
+            </a:pPr>
+            <a:r>
+              <a:rPr lang="en-US" sz="1400" b="1" kern="0" spc="100" dirty="0">
+                <a:solidFill>
+                  <a:srgbClr val="FFFFFF"/>
+                </a:solidFill>
+                <a:latin typeface="Calibri" pitchFamily="34" charset="0"/>
+                <a:ea typeface="Calibri" pitchFamily="34" charset="-122"/>
+                <a:cs typeface="Calibri" pitchFamily="34" charset="-120"/>
+              </a:rPr>
+              <a:t>CIBLE INDUSTRIALISÉE</a:t>
+            </a:r>
+            <a:endParaRPr lang="en-US" sz="1400" dirty="0"/>
+          </a:p>
+        </p:txBody>
+      </p:sp>
+      <p:sp>
+        <p:nvSpPr>
+          <p:cNvPr id="14" name="Text 10"/>
+          <p:cNvSpPr/>
+          <p:nvPr/>
+        </p:nvSpPr>
+        <p:spPr>
+          <a:xfrm>
+            <a:off x="7132320" y="2006600"/>
+            <a:ext cx="4297680" cy="320040"/>
+          </a:xfrm>
+          <a:prstGeom prst="rect">
+            <a:avLst/>
+          </a:prstGeom>
+          <a:noFill/>
+          <a:ln/>
+        </p:spPr>
+        <p:txBody>
+          <a:bodyPr wrap="square" lIns="0" tIns="0" rIns="0" bIns="0" rtlCol="0" anchor="ctr"/>
+          <a:lstStyle/>
+          <a:p>
+            <a:pPr marL="0" indent="0">
+              <a:buNone/>
+            </a:pPr>
+            <a:r>
+              <a:rPr lang="en-US" sz="1200" dirty="0">
+                <a:solidFill>
+                  <a:srgbClr val="EAF0FA"/>
+                </a:solidFill>
+                <a:latin typeface="Calibri" pitchFamily="34" charset="0"/>
+                <a:ea typeface="Calibri" pitchFamily="34" charset="-122"/>
+                <a:cs typeface="Calibri" pitchFamily="34" charset="-120"/>
+              </a:rPr>
+              <a:t>AWS managé · IaC Terraform (cible)</a:t>
+            </a:r>
+            <a:endParaRPr lang="en-US" sz="1200" dirty="0"/>
+          </a:p>
+        </p:txBody>
+      </p:sp>
+      <p:sp>
+        <p:nvSpPr>
+          <p:cNvPr id="15" name="Text 11"/>
+          <p:cNvSpPr/>
+          <p:nvPr/>
+        </p:nvSpPr>
+        <p:spPr>
+          <a:xfrm>
+            <a:off x="6537960" y="2697480"/>
+            <a:ext cx="4709160" cy="2743200"/>
+          </a:xfrm>
+          <a:prstGeom prst="rect">
+            <a:avLst/>
+          </a:prstGeom>
+          <a:noFill/>
+          <a:ln/>
+        </p:spPr>
+        <p:txBody>
+          <a:bodyPr wrap="square" lIns="0" tIns="0" rIns="0" bIns="0" rtlCol="0" anchor="t"/>
+          <a:lstStyle/>
+          <a:p>
+            <a:pPr marL="342900" indent="-342900">
+              <a:spcAft>
+                <a:spcPts val="4100"/>
+              </a:spcAft>
+              <a:buSzPct val="100000"/>
+              <a:buChar char="•"/>
+            </a:pPr>
+            <a:r>
+              <a:rPr lang="en-US" sz="1500" dirty="0">
+                <a:solidFill>
+                  <a:srgbClr val="1A1F36"/>
+                </a:solidFill>
+                <a:latin typeface="Calibri" pitchFamily="34" charset="0"/>
+                <a:ea typeface="Calibri" pitchFamily="34" charset="-122"/>
+                <a:cs typeface="Calibri" pitchFamily="34" charset="-120"/>
+              </a:rPr>
+              <a:t>RDS Multi-AZ · MSK · ElastiCache · Atlas</a:t>
+            </a:r>
+            <a:endParaRPr lang="en-US" sz="1500" dirty="0"/>
+          </a:p>
+          <a:p>
+            <a:pPr marL="342900" indent="-342900">
+              <a:spcAft>
+                <a:spcPts val="4100"/>
+              </a:spcAft>
+              <a:buSzPct val="100000"/>
+              <a:buChar char="•"/>
+            </a:pPr>
+            <a:r>
+              <a:rPr lang="en-US" sz="1500" dirty="0">
+                <a:solidFill>
+                  <a:srgbClr val="1A1F36"/>
+                </a:solidFill>
+                <a:latin typeface="Calibri" pitchFamily="34" charset="0"/>
+                <a:ea typeface="Calibri" pitchFamily="34" charset="-122"/>
+                <a:cs typeface="Calibri" pitchFamily="34" charset="-120"/>
+              </a:rPr>
+              <a:t>Managed Flink · MWAA · Snowflake · SageMaker</a:t>
+            </a:r>
+            <a:endParaRPr lang="en-US" sz="1500" dirty="0"/>
+          </a:p>
+          <a:p>
+            <a:pPr marL="342900" indent="-342900">
+              <a:spcAft>
+                <a:spcPts val="4100"/>
+              </a:spcAft>
+              <a:buSzPct val="100000"/>
+              <a:buChar char="•"/>
+            </a:pPr>
+            <a:r>
+              <a:rPr lang="en-US" sz="1500" dirty="0">
+                <a:solidFill>
+                  <a:srgbClr val="1A1F36"/>
+                </a:solidFill>
+                <a:latin typeface="Calibri" pitchFamily="34" charset="0"/>
+                <a:ea typeface="Calibri" pitchFamily="34" charset="-122"/>
+                <a:cs typeface="Calibri" pitchFamily="34" charset="-120"/>
+              </a:rPr>
+              <a:t>Sécurité KMS/IAM/Secrets · PCI-DSS / RGPD</a:t>
+            </a:r>
+            <a:endParaRPr lang="en-US" sz="1500" dirty="0"/>
+          </a:p>
+          <a:p>
+            <a:pPr marL="342900" indent="-342900">
+              <a:spcAft>
+                <a:spcPts val="4100"/>
+              </a:spcAft>
+              <a:buSzPct val="100000"/>
+              <a:buChar char="•"/>
+            </a:pPr>
+            <a:r>
+              <a:rPr lang="en-US" sz="1500" dirty="0">
+                <a:solidFill>
+                  <a:srgbClr val="1A1F36"/>
+                </a:solidFill>
+                <a:latin typeface="Calibri" pitchFamily="34" charset="0"/>
+                <a:ea typeface="Calibri" pitchFamily="34" charset="-122"/>
+                <a:cs typeface="Calibri" pitchFamily="34" charset="-120"/>
+              </a:rPr>
+              <a:t>Résilience multi-AZ · FinOps / GreenOps</a:t>
+            </a:r>
+            <a:endParaRPr lang="en-US" sz="1500" dirty="0"/>
+          </a:p>
+        </p:txBody>
+      </p:sp>
+      <p:sp>
+        <p:nvSpPr>
+          <p:cNvPr id="16" name="Text 12"/>
+          <p:cNvSpPr/>
+          <p:nvPr/>
+        </p:nvSpPr>
+        <p:spPr>
+          <a:xfrm>
+            <a:off x="548640" y="5740400"/>
+            <a:ext cx="11064240" cy="365760"/>
+          </a:xfrm>
+          <a:prstGeom prst="rect">
+            <a:avLst/>
+          </a:prstGeom>
+          <a:noFill/>
+          <a:ln/>
+        </p:spPr>
+        <p:txBody>
+          <a:bodyPr wrap="square" lIns="0" tIns="0" rIns="0" bIns="0" rtlCol="0" anchor="ctr"/>
+          <a:lstStyle/>
+          <a:p>
+            <a:pPr marL="0" indent="0" algn="ctr">
+              <a:buNone/>
+            </a:pPr>
+            <a:r>
+              <a:rPr lang="en-US" sz="1300" i="1" dirty="0">
+                <a:solidFill>
+                  <a:srgbClr val="6B7280"/>
+                </a:solidFill>
+                <a:latin typeface="Calibri" pitchFamily="34" charset="0"/>
+                <a:ea typeface="Calibri" pitchFamily="34" charset="-122"/>
+                <a:cs typeface="Calibri" pitchFamily="34" charset="-120"/>
+              </a:rPr>
+              <a:t>Même architecture logique — on substitue les composants, la logique ne change pas.</a:t>
+            </a:r>
+            <a:endParaRPr lang="en-US" sz="1300" dirty="0"/>
+          </a:p>
+        </p:txBody>
+      </p:sp>
+      <p:sp>
+        <p:nvSpPr>
+          <p:cNvPr id="17" name="Text 13"/>
+          <p:cNvSpPr/>
+          <p:nvPr/>
+        </p:nvSpPr>
+        <p:spPr>
+          <a:xfrm>
+            <a:off x="11430000" y="6355080"/>
+            <a:ext cx="548640" cy="274320"/>
+          </a:xfrm>
+          <a:prstGeom prst="rect">
+            <a:avLst/>
+          </a:prstGeom>
+          <a:noFill/>
+          <a:ln/>
+        </p:spPr>
+        <p:txBody>
+          <a:bodyPr wrap="square" lIns="0" tIns="0" rIns="0" bIns="0" rtlCol="0" anchor="ctr"/>
+          <a:lstStyle/>
+          <a:p>
+            <a:pPr marL="0" indent="0" algn="r">
+              <a:buNone/>
+            </a:pPr>
+            <a:r>
+              <a:rPr lang="en-US" sz="1100" dirty="0">
+                <a:solidFill>
+                  <a:srgbClr val="6B7280"/>
+                </a:solidFill>
+                <a:latin typeface="Calibri" pitchFamily="34" charset="0"/>
+                <a:ea typeface="Calibri" pitchFamily="34" charset="-122"/>
+                <a:cs typeface="Calibri" pitchFamily="34" charset="-120"/>
+              </a:rPr>
+              <a:t>09</a:t>
+            </a:r>
+            <a:endParaRPr lang="en-US" sz="1100" dirty="0"/>
+          </a:p>
+        </p:txBody>
+      </p:sp>
+    </p:spTree>
+    <p:extLst>
+      <p:ext uri="{BB962C8B-B14F-4D97-AF65-F5344CB8AC3E}">
+        <p14:creationId xmlns:p14="http://schemas.microsoft.com/office/powerpoint/2010/main" val="3302546916"/>
+      </p:ext>
+    </p:extLst>
+  </p:cSld>
+  <p:clrMapOvr>
+    <a:masterClrMapping/>
+  </p:clrMapOvr>
+</p:sld>
+</file>
+
+<file path=ppt/slides/slide12.xml><?xml version="1.0" encoding="utf-8"?>
 <p:sld xmlns:a="http://schemas.openxmlformats.org/drawingml/2006/main" xmlns:r="http://schemas.openxmlformats.org/officeDocument/2006/relationships" xmlns:p="http://schemas.openxmlformats.org/presentationml/2006/main">
   <p:cSld name="Slide 10">
     <p:bg>
@@ -1710,6 +3284,13 @@
           </a:solidFill>
           <a:ln/>
         </p:spPr>
+        <p:txBody>
+          <a:bodyPr/>
+          <a:lstStyle/>
+          <a:p>
+            <a:endParaRPr lang="fr-FR"/>
+          </a:p>
+        </p:txBody>
       </p:sp>
       <p:sp>
         <p:nvSpPr>
@@ -1719,7 +3300,7 @@
         </p:nvSpPr>
         <p:spPr>
           <a:xfrm>
-            <a:off x="822960" y="1371600"/>
+            <a:off x="822960" y="1270000"/>
             <a:ext cx="10058400" cy="548640"/>
           </a:xfrm>
           <a:prstGeom prst="rect">
@@ -1758,7 +3339,7 @@
         </p:nvSpPr>
         <p:spPr>
           <a:xfrm>
-            <a:off x="822960" y="1828800"/>
+            <a:off x="822960" y="1854200"/>
             <a:ext cx="10515600" cy="1280160"/>
           </a:xfrm>
           <a:prstGeom prst="rect">
@@ -1972,7 +3553,7 @@
                 <a:ea typeface="Calibri" pitchFamily="34" charset="-122"/>
                 <a:cs typeface="Calibri" pitchFamily="34" charset="-120"/>
               </a:rPr>
-              <a:t>Fraude scorée en temps réel (&lt; 100 ms), boucle fermée sur PostgreSQL</a:t>
+              <a:t>Fraude scorée par XGBoost en temps réel, boucle fermée sur PostgreSQL</a:t>
             </a:r>
             <a:endParaRPr lang="en-US" sz="1650" dirty="0"/>
           </a:p>
@@ -2035,7 +3616,7 @@
                 <a:ea typeface="Calibri" pitchFamily="34" charset="-122"/>
                 <a:cs typeface="Calibri" pitchFamily="34" charset="-120"/>
               </a:rPr>
-              <a:t>PoC local fonctionnel → cible cloud par Terraform</a:t>
+              <a:t>PoC local testé en CI → cible cloud AWS managée</a:t>
             </a:r>
             <a:endParaRPr lang="en-US" sz="1650" dirty="0"/>
           </a:p>
@@ -2088,8 +3669,8 @@
 </p:sld>
 </file>
 
-<file path=ppt/slides/slide11.xml><?xml version="1.0" encoding="utf-8"?>
-<p:sld xmlns:a="http://schemas.openxmlformats.org/drawingml/2006/main" xmlns:p="http://schemas.openxmlformats.org/presentationml/2006/main" xmlns:r="http://schemas.openxmlformats.org/officeDocument/2006/relationships">
+<file path=ppt/slides/slide13.xml><?xml version="1.0" encoding="utf-8"?>
+<p:sld xmlns:a="http://schemas.openxmlformats.org/drawingml/2006/main" xmlns:r="http://schemas.openxmlformats.org/officeDocument/2006/relationships" xmlns:p="http://schemas.openxmlformats.org/presentationml/2006/main">
   <p:cSld>
     <p:spTree>
       <p:nvGrpSpPr>
@@ -2097,7 +3678,14 @@
         <p:cNvGrpSpPr/>
         <p:nvPr/>
       </p:nvGrpSpPr>
-      <p:grpSpPr/>
+      <p:grpSpPr>
+        <a:xfrm>
+          <a:off x="0" y="0"/>
+          <a:ext cx="0" cy="0"/>
+          <a:chOff x="0" y="0"/>
+          <a:chExt cx="0" cy="0"/>
+        </a:xfrm>
+      </p:grpSpPr>
       <p:sp>
         <p:nvSpPr>
           <p:cNvPr id="2" name="Rectangle 1"/>
@@ -2139,12 +3727,13 @@
           <a:lstStyle/>
           <a:p>
             <a:pPr algn="ctr"/>
+            <a:endParaRPr/>
           </a:p>
         </p:txBody>
       </p:sp>
       <p:pic>
         <p:nvPicPr>
-          <p:cNvPr id="3" name="Picture 2" descr="architecture.png"/>
+          <p:cNvPr id="3" name="Picture 2" descr="stripe_mongodb_structure.png"/>
           <p:cNvPicPr>
             <a:picLocks noChangeAspect="1"/>
           </p:cNvPicPr>
@@ -2158,8 +3747,8 @@
         </p:blipFill>
         <p:spPr>
           <a:xfrm>
-            <a:off x="878703" y="320040"/>
-            <a:ext cx="10434593" cy="6217920"/>
+            <a:off x="380000" y="851780"/>
+            <a:ext cx="11432000" cy="5154439"/>
           </a:xfrm>
           <a:prstGeom prst="rect">
             <a:avLst/>
@@ -2174,8 +3763,8 @@
 </p:sld>
 </file>
 
-<file path=ppt/slides/slide12.xml><?xml version="1.0" encoding="utf-8"?>
-<p:sld xmlns:a="http://schemas.openxmlformats.org/drawingml/2006/main" xmlns:p="http://schemas.openxmlformats.org/presentationml/2006/main" xmlns:r="http://schemas.openxmlformats.org/officeDocument/2006/relationships">
+<file path=ppt/slides/slide14.xml><?xml version="1.0" encoding="utf-8"?>
+<p:sld xmlns:a="http://schemas.openxmlformats.org/drawingml/2006/main" xmlns:r="http://schemas.openxmlformats.org/officeDocument/2006/relationships" xmlns:p="http://schemas.openxmlformats.org/presentationml/2006/main">
   <p:cSld>
     <p:spTree>
       <p:nvGrpSpPr>
@@ -2183,7 +3772,14 @@
         <p:cNvGrpSpPr/>
         <p:nvPr/>
       </p:nvGrpSpPr>
-      <p:grpSpPr/>
+      <p:grpSpPr>
+        <a:xfrm>
+          <a:off x="0" y="0"/>
+          <a:ext cx="0" cy="0"/>
+          <a:chOff x="0" y="0"/>
+          <a:chExt cx="0" cy="0"/>
+        </a:xfrm>
+      </p:grpSpPr>
       <p:sp>
         <p:nvSpPr>
           <p:cNvPr id="2" name="Rectangle 1"/>
@@ -2225,12 +3821,13 @@
           <a:lstStyle/>
           <a:p>
             <a:pPr algn="ctr"/>
+            <a:endParaRPr/>
           </a:p>
         </p:txBody>
       </p:sp>
       <p:pic>
         <p:nvPicPr>
-          <p:cNvPr id="3" name="Picture 2" descr="erd_oltp.png"/>
+          <p:cNvPr id="3" name="Picture 2" descr="stripe_code_structure.png"/>
           <p:cNvPicPr>
             <a:picLocks noChangeAspect="1"/>
           </p:cNvPicPr>
@@ -2244,8 +3841,8 @@
         </p:blipFill>
         <p:spPr>
           <a:xfrm>
-            <a:off x="365760" y="575754"/>
-            <a:ext cx="11460480" cy="5706491"/>
+            <a:off x="461353" y="380000"/>
+            <a:ext cx="11269293" cy="6098000"/>
           </a:xfrm>
           <a:prstGeom prst="rect">
             <a:avLst/>
@@ -2293,7 +3890,7 @@
         </p:nvSpPr>
         <p:spPr>
           <a:xfrm>
-            <a:off x="548640" y="384048"/>
+            <a:off x="548640" y="330200"/>
             <a:ext cx="10972800" cy="274320"/>
           </a:xfrm>
           <a:prstGeom prst="rect">
@@ -2410,8 +4007,8 @@
         </p:nvSpPr>
         <p:spPr>
           <a:xfrm>
-            <a:off x="548640" y="2286000"/>
-            <a:ext cx="3520440" cy="3291840"/>
+            <a:off x="548640" y="2413000"/>
+            <a:ext cx="3520440" cy="2946400"/>
           </a:xfrm>
           <a:prstGeom prst="rect">
             <a:avLst/>
@@ -2433,6 +4030,13 @@
             </a:outerShdw>
           </a:effectLst>
         </p:spPr>
+        <p:txBody>
+          <a:bodyPr/>
+          <a:lstStyle/>
+          <a:p>
+            <a:endParaRPr lang="fr-FR"/>
+          </a:p>
+        </p:txBody>
       </p:sp>
       <p:sp>
         <p:nvSpPr>
@@ -2442,17 +4046,24 @@
         </p:nvSpPr>
         <p:spPr>
           <a:xfrm>
-            <a:off x="548640" y="2286000"/>
+            <a:off x="548640" y="2413000"/>
             <a:ext cx="3520440" cy="109728"/>
           </a:xfrm>
           <a:prstGeom prst="rect">
             <a:avLst/>
           </a:prstGeom>
           <a:solidFill>
-            <a:srgbClr val="1D9E75"/>
+            <a:srgbClr val="635BFF"/>
           </a:solidFill>
           <a:ln/>
         </p:spPr>
+        <p:txBody>
+          <a:bodyPr/>
+          <a:lstStyle/>
+          <a:p>
+            <a:endParaRPr lang="fr-FR"/>
+          </a:p>
+        </p:txBody>
       </p:sp>
       <p:pic>
         <p:nvPicPr>
@@ -2470,7 +4081,7 @@
         </p:blipFill>
         <p:spPr>
           <a:xfrm>
-            <a:off x="868680" y="2697480"/>
+            <a:off x="868680" y="2819400"/>
             <a:ext cx="777240" cy="777240"/>
           </a:xfrm>
           <a:prstGeom prst="rect">
@@ -2486,7 +4097,7 @@
         </p:nvSpPr>
         <p:spPr>
           <a:xfrm>
-            <a:off x="868680" y="3611880"/>
+            <a:off x="868680" y="3733800"/>
             <a:ext cx="2926080" cy="457200"/>
           </a:xfrm>
           <a:prstGeom prst="rect">
@@ -2525,8 +4136,8 @@
         </p:nvSpPr>
         <p:spPr>
           <a:xfrm>
-            <a:off x="868680" y="4114800"/>
-            <a:ext cx="2971800" cy="1280160"/>
+            <a:off x="868680" y="4216400"/>
+            <a:ext cx="2971800" cy="914400"/>
           </a:xfrm>
           <a:prstGeom prst="rect">
             <a:avLst/>
@@ -2564,8 +4175,8 @@
         </p:nvSpPr>
         <p:spPr>
           <a:xfrm>
-            <a:off x="4315968" y="2286000"/>
-            <a:ext cx="3520440" cy="3291840"/>
+            <a:off x="4315968" y="2413000"/>
+            <a:ext cx="3520440" cy="2946400"/>
           </a:xfrm>
           <a:prstGeom prst="rect">
             <a:avLst/>
@@ -2587,6 +4198,13 @@
             </a:outerShdw>
           </a:effectLst>
         </p:spPr>
+        <p:txBody>
+          <a:bodyPr/>
+          <a:lstStyle/>
+          <a:p>
+            <a:endParaRPr lang="fr-FR"/>
+          </a:p>
+        </p:txBody>
       </p:sp>
       <p:sp>
         <p:nvSpPr>
@@ -2596,7 +4214,7 @@
         </p:nvSpPr>
         <p:spPr>
           <a:xfrm>
-            <a:off x="4315968" y="2286000"/>
+            <a:off x="4315968" y="2413000"/>
             <a:ext cx="3520440" cy="109728"/>
           </a:xfrm>
           <a:prstGeom prst="rect">
@@ -2607,6 +4225,13 @@
           </a:solidFill>
           <a:ln/>
         </p:spPr>
+        <p:txBody>
+          <a:bodyPr/>
+          <a:lstStyle/>
+          <a:p>
+            <a:endParaRPr lang="fr-FR"/>
+          </a:p>
+        </p:txBody>
       </p:sp>
       <p:pic>
         <p:nvPicPr>
@@ -2624,7 +4249,7 @@
         </p:blipFill>
         <p:spPr>
           <a:xfrm>
-            <a:off x="4636008" y="2697480"/>
+            <a:off x="4636008" y="2819400"/>
             <a:ext cx="777240" cy="777240"/>
           </a:xfrm>
           <a:prstGeom prst="rect">
@@ -2640,7 +4265,7 @@
         </p:nvSpPr>
         <p:spPr>
           <a:xfrm>
-            <a:off x="4636008" y="3611880"/>
+            <a:off x="4636008" y="3733800"/>
             <a:ext cx="2926080" cy="457200"/>
           </a:xfrm>
           <a:prstGeom prst="rect">
@@ -2679,8 +4304,8 @@
         </p:nvSpPr>
         <p:spPr>
           <a:xfrm>
-            <a:off x="4636008" y="4114800"/>
-            <a:ext cx="2971800" cy="1280160"/>
+            <a:off x="4636008" y="4216400"/>
+            <a:ext cx="2971800" cy="914400"/>
           </a:xfrm>
           <a:prstGeom prst="rect">
             <a:avLst/>
@@ -2718,8 +4343,8 @@
         </p:nvSpPr>
         <p:spPr>
           <a:xfrm>
-            <a:off x="8083296" y="2286000"/>
-            <a:ext cx="3520440" cy="3291840"/>
+            <a:off x="8083296" y="2413000"/>
+            <a:ext cx="3520440" cy="2946400"/>
           </a:xfrm>
           <a:prstGeom prst="rect">
             <a:avLst/>
@@ -2741,6 +4366,13 @@
             </a:outerShdw>
           </a:effectLst>
         </p:spPr>
+        <p:txBody>
+          <a:bodyPr/>
+          <a:lstStyle/>
+          <a:p>
+            <a:endParaRPr lang="fr-FR"/>
+          </a:p>
+        </p:txBody>
       </p:sp>
       <p:sp>
         <p:nvSpPr>
@@ -2750,7 +4382,7 @@
         </p:nvSpPr>
         <p:spPr>
           <a:xfrm>
-            <a:off x="8083296" y="2286000"/>
+            <a:off x="8083296" y="2413000"/>
             <a:ext cx="3520440" cy="109728"/>
           </a:xfrm>
           <a:prstGeom prst="rect">
@@ -2761,6 +4393,13 @@
           </a:solidFill>
           <a:ln/>
         </p:spPr>
+        <p:txBody>
+          <a:bodyPr/>
+          <a:lstStyle/>
+          <a:p>
+            <a:endParaRPr lang="fr-FR"/>
+          </a:p>
+        </p:txBody>
       </p:sp>
       <p:pic>
         <p:nvPicPr>
@@ -2778,7 +4417,7 @@
         </p:blipFill>
         <p:spPr>
           <a:xfrm>
-            <a:off x="8403336" y="2697480"/>
+            <a:off x="8403336" y="2819400"/>
             <a:ext cx="777240" cy="777240"/>
           </a:xfrm>
           <a:prstGeom prst="rect">
@@ -2794,7 +4433,7 @@
         </p:nvSpPr>
         <p:spPr>
           <a:xfrm>
-            <a:off x="8403336" y="3611880"/>
+            <a:off x="8403336" y="3733800"/>
             <a:ext cx="2926080" cy="457200"/>
           </a:xfrm>
           <a:prstGeom prst="rect">
@@ -2833,8 +4472,8 @@
         </p:nvSpPr>
         <p:spPr>
           <a:xfrm>
-            <a:off x="8403336" y="4114800"/>
-            <a:ext cx="2971800" cy="1280160"/>
+            <a:off x="8403336" y="4216400"/>
+            <a:ext cx="2971800" cy="914400"/>
           </a:xfrm>
           <a:prstGeom prst="rect">
             <a:avLst/>
@@ -2944,7 +4583,7 @@
         </p:nvSpPr>
         <p:spPr>
           <a:xfrm>
-            <a:off x="548640" y="384048"/>
+            <a:off x="548640" y="330200"/>
             <a:ext cx="10972800" cy="274320"/>
           </a:xfrm>
           <a:prstGeom prst="rect">
@@ -3045,6 +4684,13 @@
             </a:outerShdw>
           </a:effectLst>
         </p:spPr>
+        <p:txBody>
+          <a:bodyPr/>
+          <a:lstStyle/>
+          <a:p>
+            <a:endParaRPr lang="fr-FR"/>
+          </a:p>
+        </p:txBody>
       </p:sp>
       <p:sp>
         <p:nvSpPr>
@@ -3065,6 +4711,13 @@
           </a:solidFill>
           <a:ln/>
         </p:spPr>
+        <p:txBody>
+          <a:bodyPr/>
+          <a:lstStyle/>
+          <a:p>
+            <a:endParaRPr lang="fr-FR"/>
+          </a:p>
+        </p:txBody>
       </p:sp>
       <p:pic>
         <p:nvPicPr>
@@ -3137,7 +4790,7 @@
         </p:nvSpPr>
         <p:spPr>
           <a:xfrm>
-            <a:off x="2103120" y="2039112"/>
+            <a:off x="2103120" y="2057400"/>
             <a:ext cx="3703320" cy="502920"/>
           </a:xfrm>
           <a:prstGeom prst="rect">
@@ -3238,6 +4891,13 @@
             </a:outerShdw>
           </a:effectLst>
         </p:spPr>
+        <p:txBody>
+          <a:bodyPr/>
+          <a:lstStyle/>
+          <a:p>
+            <a:endParaRPr lang="fr-FR"/>
+          </a:p>
+        </p:txBody>
       </p:sp>
       <p:sp>
         <p:nvSpPr>
@@ -3258,6 +4918,13 @@
           </a:solidFill>
           <a:ln/>
         </p:spPr>
+        <p:txBody>
+          <a:bodyPr/>
+          <a:lstStyle/>
+          <a:p>
+            <a:endParaRPr lang="fr-FR"/>
+          </a:p>
+        </p:txBody>
       </p:sp>
       <p:pic>
         <p:nvPicPr>
@@ -3330,7 +4997,7 @@
         </p:nvSpPr>
         <p:spPr>
           <a:xfrm>
-            <a:off x="7726680" y="2039112"/>
+            <a:off x="7726680" y="2057400"/>
             <a:ext cx="3703320" cy="502920"/>
           </a:xfrm>
           <a:prstGeom prst="rect">
@@ -3394,7 +5061,7 @@
                 <a:ea typeface="Calibri" pitchFamily="34" charset="-122"/>
                 <a:cs typeface="Calibri" pitchFamily="34" charset="-120"/>
               </a:rPr>
-              <a:t>Schéma en étoile, analytique, vues matérialisées</a:t>
+              <a:t>Schéma en étoile · dry-run, hors pipeline live</a:t>
             </a:r>
             <a:endParaRPr lang="en-US" sz="1350" dirty="0"/>
           </a:p>
@@ -3431,6 +5098,13 @@
             </a:outerShdw>
           </a:effectLst>
         </p:spPr>
+        <p:txBody>
+          <a:bodyPr/>
+          <a:lstStyle/>
+          <a:p>
+            <a:endParaRPr lang="fr-FR"/>
+          </a:p>
+        </p:txBody>
       </p:sp>
       <p:sp>
         <p:nvSpPr>
@@ -3451,6 +5125,13 @@
           </a:solidFill>
           <a:ln/>
         </p:spPr>
+        <p:txBody>
+          <a:bodyPr/>
+          <a:lstStyle/>
+          <a:p>
+            <a:endParaRPr lang="fr-FR"/>
+          </a:p>
+        </p:txBody>
       </p:sp>
       <p:pic>
         <p:nvPicPr>
@@ -3523,7 +5204,7 @@
         </p:nvSpPr>
         <p:spPr>
           <a:xfrm>
-            <a:off x="2103120" y="4279392"/>
+            <a:off x="2103120" y="4298950"/>
             <a:ext cx="3703320" cy="502920"/>
           </a:xfrm>
           <a:prstGeom prst="rect">
@@ -3587,7 +5268,7 @@
                 <a:ea typeface="Calibri" pitchFamily="34" charset="-122"/>
                 <a:cs typeface="Calibri" pitchFamily="34" charset="-120"/>
               </a:rPr>
-              <a:t>Logs, sessions, features ML — schéma flexible</a:t>
+              <a:t>Logs, alertes, features &amp; monitoring ML</a:t>
             </a:r>
             <a:endParaRPr lang="en-US" sz="1350" dirty="0"/>
           </a:p>
@@ -3624,6 +5305,13 @@
             </a:outerShdw>
           </a:effectLst>
         </p:spPr>
+        <p:txBody>
+          <a:bodyPr/>
+          <a:lstStyle/>
+          <a:p>
+            <a:endParaRPr lang="fr-FR"/>
+          </a:p>
+        </p:txBody>
       </p:sp>
       <p:sp>
         <p:nvSpPr>
@@ -3644,6 +5332,13 @@
           </a:solidFill>
           <a:ln/>
         </p:spPr>
+        <p:txBody>
+          <a:bodyPr/>
+          <a:lstStyle/>
+          <a:p>
+            <a:endParaRPr lang="fr-FR"/>
+          </a:p>
+        </p:txBody>
       </p:sp>
       <p:pic>
         <p:nvPicPr>
@@ -3716,7 +5411,7 @@
         </p:nvSpPr>
         <p:spPr>
           <a:xfrm>
-            <a:off x="7726680" y="4279392"/>
+            <a:off x="7726680" y="4298950"/>
             <a:ext cx="3703320" cy="502920"/>
           </a:xfrm>
           <a:prstGeom prst="rect">
@@ -3834,6 +5529,100 @@
 </file>
 
 <file path=ppt/slides/slide4.xml><?xml version="1.0" encoding="utf-8"?>
+<p:sld xmlns:a="http://schemas.openxmlformats.org/drawingml/2006/main" xmlns:r="http://schemas.openxmlformats.org/officeDocument/2006/relationships" xmlns:p="http://schemas.openxmlformats.org/presentationml/2006/main">
+  <p:cSld>
+    <p:spTree>
+      <p:nvGrpSpPr>
+        <p:cNvPr id="1" name=""/>
+        <p:cNvGrpSpPr/>
+        <p:nvPr/>
+      </p:nvGrpSpPr>
+      <p:grpSpPr>
+        <a:xfrm>
+          <a:off x="0" y="0"/>
+          <a:ext cx="0" cy="0"/>
+          <a:chOff x="0" y="0"/>
+          <a:chExt cx="0" cy="0"/>
+        </a:xfrm>
+      </p:grpSpPr>
+      <p:sp>
+        <p:nvSpPr>
+          <p:cNvPr id="2" name="Rectangle 1"/>
+          <p:cNvSpPr/>
+          <p:nvPr/>
+        </p:nvSpPr>
+        <p:spPr>
+          <a:xfrm>
+            <a:off x="0" y="0"/>
+            <a:ext cx="12192000" cy="6858000"/>
+          </a:xfrm>
+          <a:prstGeom prst="rect">
+            <a:avLst/>
+          </a:prstGeom>
+          <a:solidFill>
+            <a:srgbClr val="FFFFFF"/>
+          </a:solidFill>
+          <a:ln>
+            <a:noFill/>
+          </a:ln>
+          <a:effectLst/>
+        </p:spPr>
+        <p:style>
+          <a:lnRef idx="1">
+            <a:schemeClr val="accent1"/>
+          </a:lnRef>
+          <a:fillRef idx="3">
+            <a:schemeClr val="accent1"/>
+          </a:fillRef>
+          <a:effectRef idx="2">
+            <a:schemeClr val="accent1"/>
+          </a:effectRef>
+          <a:fontRef idx="minor">
+            <a:schemeClr val="lt1"/>
+          </a:fontRef>
+        </p:style>
+        <p:txBody>
+          <a:bodyPr rtlCol="0" anchor="ctr"/>
+          <a:lstStyle/>
+          <a:p>
+            <a:pPr algn="ctr"/>
+            <a:endParaRPr/>
+          </a:p>
+        </p:txBody>
+      </p:sp>
+      <p:pic>
+        <p:nvPicPr>
+          <p:cNvPr id="3" name="Picture 2" descr="stripe_architecture_globale.png"/>
+          <p:cNvPicPr>
+            <a:picLocks noChangeAspect="1"/>
+          </p:cNvPicPr>
+          <p:nvPr/>
+        </p:nvPicPr>
+        <p:blipFill>
+          <a:blip r:embed="rId2"/>
+          <a:stretch>
+            <a:fillRect/>
+          </a:stretch>
+        </p:blipFill>
+        <p:spPr>
+          <a:xfrm>
+            <a:off x="1597883" y="380000"/>
+            <a:ext cx="8996233" cy="6098000"/>
+          </a:xfrm>
+          <a:prstGeom prst="rect">
+            <a:avLst/>
+          </a:prstGeom>
+        </p:spPr>
+      </p:pic>
+    </p:spTree>
+  </p:cSld>
+  <p:clrMapOvr>
+    <a:masterClrMapping/>
+  </p:clrMapOvr>
+</p:sld>
+</file>
+
+<file path=ppt/slides/slide5.xml><?xml version="1.0" encoding="utf-8"?>
 <p:sld xmlns:a="http://schemas.openxmlformats.org/drawingml/2006/main" xmlns:r="http://schemas.openxmlformats.org/officeDocument/2006/relationships" xmlns:p="http://schemas.openxmlformats.org/presentationml/2006/main">
   <p:cSld name="Slide 4">
     <p:bg>
@@ -3866,7 +5655,7 @@
         </p:nvSpPr>
         <p:spPr>
           <a:xfrm>
-            <a:off x="548640" y="384048"/>
+            <a:off x="548640" y="330200"/>
             <a:ext cx="10972800" cy="274320"/>
           </a:xfrm>
           <a:prstGeom prst="rect">
@@ -3962,6 +5751,13 @@
             <a:prstDash val="solid"/>
           </a:ln>
         </p:spPr>
+        <p:txBody>
+          <a:bodyPr/>
+          <a:lstStyle/>
+          <a:p>
+            <a:endParaRPr lang="fr-FR"/>
+          </a:p>
+        </p:txBody>
       </p:sp>
       <p:sp>
         <p:nvSpPr>
@@ -4033,6 +5829,13 @@
             </a:outerShdw>
           </a:effectLst>
         </p:spPr>
+        <p:txBody>
+          <a:bodyPr/>
+          <a:lstStyle/>
+          <a:p>
+            <a:endParaRPr lang="fr-FR"/>
+          </a:p>
+        </p:txBody>
       </p:sp>
       <p:sp>
         <p:nvSpPr>
@@ -4053,6 +5856,13 @@
           </a:solidFill>
           <a:ln/>
         </p:spPr>
+        <p:txBody>
+          <a:bodyPr/>
+          <a:lstStyle/>
+          <a:p>
+            <a:endParaRPr lang="fr-FR"/>
+          </a:p>
+        </p:txBody>
       </p:sp>
       <p:sp>
         <p:nvSpPr>
@@ -4155,6 +5965,13 @@
             <a:tailEnd type="triangle"/>
           </a:ln>
         </p:spPr>
+        <p:txBody>
+          <a:bodyPr/>
+          <a:lstStyle/>
+          <a:p>
+            <a:endParaRPr lang="fr-FR"/>
+          </a:p>
+        </p:txBody>
       </p:sp>
       <p:sp>
         <p:nvSpPr>
@@ -4187,6 +6004,13 @@
             </a:outerShdw>
           </a:effectLst>
         </p:spPr>
+        <p:txBody>
+          <a:bodyPr/>
+          <a:lstStyle/>
+          <a:p>
+            <a:endParaRPr lang="fr-FR"/>
+          </a:p>
+        </p:txBody>
       </p:sp>
       <p:sp>
         <p:nvSpPr>
@@ -4207,6 +6031,13 @@
           </a:solidFill>
           <a:ln/>
         </p:spPr>
+        <p:txBody>
+          <a:bodyPr/>
+          <a:lstStyle/>
+          <a:p>
+            <a:endParaRPr lang="fr-FR"/>
+          </a:p>
+        </p:txBody>
       </p:sp>
       <p:sp>
         <p:nvSpPr>
@@ -4309,6 +6140,13 @@
             <a:tailEnd type="triangle"/>
           </a:ln>
         </p:spPr>
+        <p:txBody>
+          <a:bodyPr/>
+          <a:lstStyle/>
+          <a:p>
+            <a:endParaRPr lang="fr-FR"/>
+          </a:p>
+        </p:txBody>
       </p:sp>
       <p:sp>
         <p:nvSpPr>
@@ -4341,6 +6179,13 @@
             </a:outerShdw>
           </a:effectLst>
         </p:spPr>
+        <p:txBody>
+          <a:bodyPr/>
+          <a:lstStyle/>
+          <a:p>
+            <a:endParaRPr lang="fr-FR"/>
+          </a:p>
+        </p:txBody>
       </p:sp>
       <p:sp>
         <p:nvSpPr>
@@ -4361,6 +6206,13 @@
           </a:solidFill>
           <a:ln/>
         </p:spPr>
+        <p:txBody>
+          <a:bodyPr/>
+          <a:lstStyle/>
+          <a:p>
+            <a:endParaRPr lang="fr-FR"/>
+          </a:p>
+        </p:txBody>
       </p:sp>
       <p:sp>
         <p:nvSpPr>
@@ -4463,6 +6315,13 @@
             <a:tailEnd type="triangle"/>
           </a:ln>
         </p:spPr>
+        <p:txBody>
+          <a:bodyPr/>
+          <a:lstStyle/>
+          <a:p>
+            <a:endParaRPr lang="fr-FR"/>
+          </a:p>
+        </p:txBody>
       </p:sp>
       <p:sp>
         <p:nvSpPr>
@@ -4495,6 +6354,13 @@
             </a:outerShdw>
           </a:effectLst>
         </p:spPr>
+        <p:txBody>
+          <a:bodyPr/>
+          <a:lstStyle/>
+          <a:p>
+            <a:endParaRPr lang="fr-FR"/>
+          </a:p>
+        </p:txBody>
       </p:sp>
       <p:sp>
         <p:nvSpPr>
@@ -4515,6 +6381,13 @@
           </a:solidFill>
           <a:ln/>
         </p:spPr>
+        <p:txBody>
+          <a:bodyPr/>
+          <a:lstStyle/>
+          <a:p>
+            <a:endParaRPr lang="fr-FR"/>
+          </a:p>
+        </p:txBody>
       </p:sp>
       <p:sp>
         <p:nvSpPr>
@@ -4617,6 +6490,13 @@
             <a:tailEnd type="triangle"/>
           </a:ln>
         </p:spPr>
+        <p:txBody>
+          <a:bodyPr/>
+          <a:lstStyle/>
+          <a:p>
+            <a:endParaRPr lang="fr-FR"/>
+          </a:p>
+        </p:txBody>
       </p:sp>
       <p:sp>
         <p:nvSpPr>
@@ -4649,6 +6529,13 @@
             </a:outerShdw>
           </a:effectLst>
         </p:spPr>
+        <p:txBody>
+          <a:bodyPr/>
+          <a:lstStyle/>
+          <a:p>
+            <a:endParaRPr lang="fr-FR"/>
+          </a:p>
+        </p:txBody>
       </p:sp>
       <p:sp>
         <p:nvSpPr>
@@ -4669,6 +6556,13 @@
           </a:solidFill>
           <a:ln/>
         </p:spPr>
+        <p:txBody>
+          <a:bodyPr/>
+          <a:lstStyle/>
+          <a:p>
+            <a:endParaRPr lang="fr-FR"/>
+          </a:p>
+        </p:txBody>
       </p:sp>
       <p:sp>
         <p:nvSpPr>
@@ -4742,7 +6636,7 @@
                 <a:ea typeface="Calibri" pitchFamily="34" charset="-122"/>
                 <a:cs typeface="Calibri" pitchFamily="34" charset="-120"/>
               </a:rPr>
-              <a:t>scoring</a:t>
+              <a:t>XGBoost · règles</a:t>
             </a:r>
             <a:endParaRPr lang="en-US" sz="1100" dirty="0"/>
           </a:p>
@@ -4771,6 +6665,13 @@
             <a:tailEnd type="triangle"/>
           </a:ln>
         </p:spPr>
+        <p:txBody>
+          <a:bodyPr/>
+          <a:lstStyle/>
+          <a:p>
+            <a:endParaRPr lang="fr-FR"/>
+          </a:p>
+        </p:txBody>
       </p:sp>
       <p:sp>
         <p:nvSpPr>
@@ -4803,6 +6704,13 @@
             </a:outerShdw>
           </a:effectLst>
         </p:spPr>
+        <p:txBody>
+          <a:bodyPr/>
+          <a:lstStyle/>
+          <a:p>
+            <a:endParaRPr lang="fr-FR"/>
+          </a:p>
+        </p:txBody>
       </p:sp>
       <p:sp>
         <p:nvSpPr>
@@ -4823,6 +6731,13 @@
           </a:solidFill>
           <a:ln/>
         </p:spPr>
+        <p:txBody>
+          <a:bodyPr/>
+          <a:lstStyle/>
+          <a:p>
+            <a:endParaRPr lang="fr-FR"/>
+          </a:p>
+        </p:txBody>
       </p:sp>
       <p:sp>
         <p:nvSpPr>
@@ -4967,6 +6882,13 @@
             <a:prstDash val="solid"/>
           </a:ln>
         </p:spPr>
+        <p:txBody>
+          <a:bodyPr/>
+          <a:lstStyle/>
+          <a:p>
+            <a:endParaRPr lang="fr-FR"/>
+          </a:p>
+        </p:txBody>
       </p:sp>
       <p:sp>
         <p:nvSpPr>
@@ -5001,7 +6923,7 @@
                 <a:ea typeface="Calibri" pitchFamily="34" charset="-122"/>
                 <a:cs typeface="Calibri" pitchFamily="34" charset="-120"/>
               </a:rPr>
-              <a:t>CANAL BATCH — nuit · Apache Airflow</a:t>
+              <a:t>CANAL BATCH — nuit · Apache Airflow · Snowflake en dry-run (pas dans la démo live)</a:t>
             </a:r>
             <a:endParaRPr lang="en-US" sz="1200" dirty="0"/>
           </a:p>
@@ -5038,6 +6960,13 @@
             </a:outerShdw>
           </a:effectLst>
         </p:spPr>
+        <p:txBody>
+          <a:bodyPr/>
+          <a:lstStyle/>
+          <a:p>
+            <a:endParaRPr lang="fr-FR"/>
+          </a:p>
+        </p:txBody>
       </p:sp>
       <p:sp>
         <p:nvSpPr>
@@ -5058,6 +6987,13 @@
           </a:solidFill>
           <a:ln/>
         </p:spPr>
+        <p:txBody>
+          <a:bodyPr/>
+          <a:lstStyle/>
+          <a:p>
+            <a:endParaRPr lang="fr-FR"/>
+          </a:p>
+        </p:txBody>
       </p:sp>
       <p:sp>
         <p:nvSpPr>
@@ -5160,6 +7096,13 @@
             <a:tailEnd type="triangle"/>
           </a:ln>
         </p:spPr>
+        <p:txBody>
+          <a:bodyPr/>
+          <a:lstStyle/>
+          <a:p>
+            <a:endParaRPr lang="fr-FR"/>
+          </a:p>
+        </p:txBody>
       </p:sp>
       <p:sp>
         <p:nvSpPr>
@@ -5192,6 +7135,13 @@
             </a:outerShdw>
           </a:effectLst>
         </p:spPr>
+        <p:txBody>
+          <a:bodyPr/>
+          <a:lstStyle/>
+          <a:p>
+            <a:endParaRPr lang="fr-FR"/>
+          </a:p>
+        </p:txBody>
       </p:sp>
       <p:sp>
         <p:nvSpPr>
@@ -5212,6 +7162,13 @@
           </a:solidFill>
           <a:ln/>
         </p:spPr>
+        <p:txBody>
+          <a:bodyPr/>
+          <a:lstStyle/>
+          <a:p>
+            <a:endParaRPr lang="fr-FR"/>
+          </a:p>
+        </p:txBody>
       </p:sp>
       <p:sp>
         <p:nvSpPr>
@@ -5314,6 +7271,13 @@
             <a:tailEnd type="triangle"/>
           </a:ln>
         </p:spPr>
+        <p:txBody>
+          <a:bodyPr/>
+          <a:lstStyle/>
+          <a:p>
+            <a:endParaRPr lang="fr-FR"/>
+          </a:p>
+        </p:txBody>
       </p:sp>
       <p:sp>
         <p:nvSpPr>
@@ -5346,6 +7310,13 @@
             </a:outerShdw>
           </a:effectLst>
         </p:spPr>
+        <p:txBody>
+          <a:bodyPr/>
+          <a:lstStyle/>
+          <a:p>
+            <a:endParaRPr lang="fr-FR"/>
+          </a:p>
+        </p:txBody>
       </p:sp>
       <p:sp>
         <p:nvSpPr>
@@ -5366,6 +7337,13 @@
           </a:solidFill>
           <a:ln/>
         </p:spPr>
+        <p:txBody>
+          <a:bodyPr/>
+          <a:lstStyle/>
+          <a:p>
+            <a:endParaRPr lang="fr-FR"/>
+          </a:p>
+        </p:txBody>
       </p:sp>
       <p:sp>
         <p:nvSpPr>
@@ -5439,7 +7417,7 @@
                 <a:ea typeface="Calibri" pitchFamily="34" charset="-122"/>
                 <a:cs typeface="Calibri" pitchFamily="34" charset="-120"/>
               </a:rPr>
-              <a:t>fact + dims</a:t>
+              <a:t>dry-run</a:t>
             </a:r>
             <a:endParaRPr lang="en-US" sz="1100" dirty="0"/>
           </a:p>
@@ -5468,6 +7446,13 @@
             <a:tailEnd type="triangle"/>
           </a:ln>
         </p:spPr>
+        <p:txBody>
+          <a:bodyPr/>
+          <a:lstStyle/>
+          <a:p>
+            <a:endParaRPr lang="fr-FR"/>
+          </a:p>
+        </p:txBody>
       </p:sp>
       <p:sp>
         <p:nvSpPr>
@@ -5500,6 +7485,13 @@
             </a:outerShdw>
           </a:effectLst>
         </p:spPr>
+        <p:txBody>
+          <a:bodyPr/>
+          <a:lstStyle/>
+          <a:p>
+            <a:endParaRPr lang="fr-FR"/>
+          </a:p>
+        </p:txBody>
       </p:sp>
       <p:sp>
         <p:nvSpPr>
@@ -5520,6 +7512,13 @@
           </a:solidFill>
           <a:ln/>
         </p:spPr>
+        <p:txBody>
+          <a:bodyPr/>
+          <a:lstStyle/>
+          <a:p>
+            <a:endParaRPr lang="fr-FR"/>
+          </a:p>
+        </p:txBody>
       </p:sp>
       <p:sp>
         <p:nvSpPr>
@@ -5646,7 +7645,7 @@
 </p:sld>
 </file>
 
-<file path=ppt/slides/slide5.xml><?xml version="1.0" encoding="utf-8"?>
+<file path=ppt/slides/slide6.xml><?xml version="1.0" encoding="utf-8"?>
 <p:sld xmlns:a="http://schemas.openxmlformats.org/drawingml/2006/main" xmlns:r="http://schemas.openxmlformats.org/officeDocument/2006/relationships" xmlns:p="http://schemas.openxmlformats.org/presentationml/2006/main">
   <p:cSld name="Slide 5">
     <p:bg>
@@ -5679,7 +7678,7 @@
         </p:nvSpPr>
         <p:spPr>
           <a:xfrm>
-            <a:off x="548640" y="384048"/>
+            <a:off x="548640" y="330200"/>
             <a:ext cx="10972800" cy="274320"/>
           </a:xfrm>
           <a:prstGeom prst="rect">
@@ -5806,7 +7805,7 @@
                 <a:ea typeface="Calibri" pitchFamily="34" charset="-122"/>
                 <a:cs typeface="Calibri" pitchFamily="34" charset="-120"/>
               </a:rPr>
-              <a:t>Schéma normalisé 3NF  </a:t>
+              <a:t xml:space="preserve">Schéma normalisé 3NF  </a:t>
             </a:r>
             <a:endParaRPr lang="en-US" sz="1600" dirty="0"/>
           </a:p>
@@ -5866,7 +7865,7 @@
                 <a:ea typeface="Calibri" pitchFamily="34" charset="-122"/>
                 <a:cs typeface="Calibri" pitchFamily="34" charset="-120"/>
               </a:rPr>
-              <a:t>ACID strict : un paiement et son indicateur de fraude écrits atomiquement</a:t>
+              <a:t>ACID strict : write-back idempotent de fraud_score (UPDATE atomique)</a:t>
             </a:r>
             <a:endParaRPr lang="en-US" sz="1600" dirty="0"/>
           </a:p>
@@ -5929,7 +7928,7 @@
                 <a:ea typeface="Calibri" pitchFamily="34" charset="-122"/>
                 <a:cs typeface="Calibri" pitchFamily="34" charset="-120"/>
               </a:rPr>
-              <a:t>Haute dispo : Multi-AZ, réplication synchrone, failover &lt; 30 s, read replicas</a:t>
+              <a:t>Haute dispo (cible AWS) : Multi-AZ, failover &lt; 30 s, read replicas</a:t>
             </a:r>
             <a:endParaRPr lang="en-US" sz="1600" dirty="0"/>
           </a:p>
@@ -6003,7 +8002,101 @@
 </p:sld>
 </file>
 
-<file path=ppt/slides/slide6.xml><?xml version="1.0" encoding="utf-8"?>
+<file path=ppt/slides/slide7.xml><?xml version="1.0" encoding="utf-8"?>
+<p:sld xmlns:a="http://schemas.openxmlformats.org/drawingml/2006/main" xmlns:r="http://schemas.openxmlformats.org/officeDocument/2006/relationships" xmlns:p="http://schemas.openxmlformats.org/presentationml/2006/main">
+  <p:cSld>
+    <p:spTree>
+      <p:nvGrpSpPr>
+        <p:cNvPr id="1" name=""/>
+        <p:cNvGrpSpPr/>
+        <p:nvPr/>
+      </p:nvGrpSpPr>
+      <p:grpSpPr>
+        <a:xfrm>
+          <a:off x="0" y="0"/>
+          <a:ext cx="0" cy="0"/>
+          <a:chOff x="0" y="0"/>
+          <a:chExt cx="0" cy="0"/>
+        </a:xfrm>
+      </p:grpSpPr>
+      <p:sp>
+        <p:nvSpPr>
+          <p:cNvPr id="2" name="Rectangle 1"/>
+          <p:cNvSpPr/>
+          <p:nvPr/>
+        </p:nvSpPr>
+        <p:spPr>
+          <a:xfrm>
+            <a:off x="0" y="0"/>
+            <a:ext cx="12192000" cy="6858000"/>
+          </a:xfrm>
+          <a:prstGeom prst="rect">
+            <a:avLst/>
+          </a:prstGeom>
+          <a:solidFill>
+            <a:srgbClr val="FFFFFF"/>
+          </a:solidFill>
+          <a:ln>
+            <a:noFill/>
+          </a:ln>
+          <a:effectLst/>
+        </p:spPr>
+        <p:style>
+          <a:lnRef idx="1">
+            <a:schemeClr val="accent1"/>
+          </a:lnRef>
+          <a:fillRef idx="3">
+            <a:schemeClr val="accent1"/>
+          </a:fillRef>
+          <a:effectRef idx="2">
+            <a:schemeClr val="accent1"/>
+          </a:effectRef>
+          <a:fontRef idx="minor">
+            <a:schemeClr val="lt1"/>
+          </a:fontRef>
+        </p:style>
+        <p:txBody>
+          <a:bodyPr rtlCol="0" anchor="ctr"/>
+          <a:lstStyle/>
+          <a:p>
+            <a:pPr algn="ctr"/>
+            <a:endParaRPr/>
+          </a:p>
+        </p:txBody>
+      </p:sp>
+      <p:pic>
+        <p:nvPicPr>
+          <p:cNvPr id="3" name="Picture 2" descr="stripe_erd_oltp.png"/>
+          <p:cNvPicPr>
+            <a:picLocks noChangeAspect="1"/>
+          </p:cNvPicPr>
+          <p:nvPr/>
+        </p:nvPicPr>
+        <p:blipFill>
+          <a:blip r:embed="rId2"/>
+          <a:stretch>
+            <a:fillRect/>
+          </a:stretch>
+        </p:blipFill>
+        <p:spPr>
+          <a:xfrm>
+            <a:off x="380000" y="669312"/>
+            <a:ext cx="11432000" cy="5519376"/>
+          </a:xfrm>
+          <a:prstGeom prst="rect">
+            <a:avLst/>
+          </a:prstGeom>
+        </p:spPr>
+      </p:pic>
+    </p:spTree>
+  </p:cSld>
+  <p:clrMapOvr>
+    <a:masterClrMapping/>
+  </p:clrMapOvr>
+</p:sld>
+</file>
+
+<file path=ppt/slides/slide8.xml><?xml version="1.0" encoding="utf-8"?>
 <p:sld xmlns:a="http://schemas.openxmlformats.org/drawingml/2006/main" xmlns:r="http://schemas.openxmlformats.org/officeDocument/2006/relationships" xmlns:p="http://schemas.openxmlformats.org/presentationml/2006/main">
   <p:cSld name="Slide 6">
     <p:bg>
@@ -6030,13 +8123,153 @@
       </p:grpSpPr>
       <p:sp>
         <p:nvSpPr>
+          <p:cNvPr id="300" name="Link 1"/>
+          <p:cNvSpPr/>
+          <p:nvPr/>
+        </p:nvSpPr>
+        <p:spPr>
+          <a:xfrm>
+            <a:off x="7620000" y="2349500"/>
+            <a:ext cx="1333500" cy="1460500"/>
+          </a:xfrm>
+          <a:prstGeom prst="line">
+            <a:avLst/>
+          </a:prstGeom>
+          <a:ln w="15875">
+            <a:solidFill>
+              <a:srgbClr val="8593B5"/>
+            </a:solidFill>
+          </a:ln>
+        </p:spPr>
+        <p:txBody>
+          <a:bodyPr/>
+          <a:lstStyle/>
+          <a:p>
+            <a:endParaRPr/>
+          </a:p>
+        </p:txBody>
+      </p:sp>
+      <p:sp>
+        <p:nvSpPr>
+          <p:cNvPr id="301" name="Link 2"/>
+          <p:cNvSpPr/>
+          <p:nvPr/>
+        </p:nvSpPr>
+        <p:spPr>
+          <a:xfrm flipV="1">
+            <a:off x="8953500" y="2349500"/>
+            <a:ext cx="1333500" cy="1460500"/>
+          </a:xfrm>
+          <a:prstGeom prst="line">
+            <a:avLst/>
+          </a:prstGeom>
+          <a:ln w="15875">
+            <a:solidFill>
+              <a:srgbClr val="8593B5"/>
+            </a:solidFill>
+          </a:ln>
+        </p:spPr>
+        <p:txBody>
+          <a:bodyPr/>
+          <a:lstStyle/>
+          <a:p>
+            <a:endParaRPr/>
+          </a:p>
+        </p:txBody>
+      </p:sp>
+      <p:sp>
+        <p:nvSpPr>
+          <p:cNvPr id="302" name="Link 3"/>
+          <p:cNvSpPr/>
+          <p:nvPr/>
+        </p:nvSpPr>
+        <p:spPr>
+          <a:xfrm>
+            <a:off x="7708900" y="3810000"/>
+            <a:ext cx="419100" cy="0"/>
+          </a:xfrm>
+          <a:prstGeom prst="line">
+            <a:avLst/>
+          </a:prstGeom>
+          <a:ln w="15875">
+            <a:solidFill>
+              <a:srgbClr val="8593B5"/>
+            </a:solidFill>
+          </a:ln>
+        </p:spPr>
+        <p:txBody>
+          <a:bodyPr/>
+          <a:lstStyle/>
+          <a:p>
+            <a:endParaRPr/>
+          </a:p>
+        </p:txBody>
+      </p:sp>
+      <p:sp>
+        <p:nvSpPr>
+          <p:cNvPr id="303" name="Link 4"/>
+          <p:cNvSpPr/>
+          <p:nvPr/>
+        </p:nvSpPr>
+        <p:spPr>
+          <a:xfrm>
+            <a:off x="9779000" y="3810000"/>
+            <a:ext cx="419100" cy="0"/>
+          </a:xfrm>
+          <a:prstGeom prst="line">
+            <a:avLst/>
+          </a:prstGeom>
+          <a:ln w="15875">
+            <a:solidFill>
+              <a:srgbClr val="8593B5"/>
+            </a:solidFill>
+          </a:ln>
+        </p:spPr>
+        <p:txBody>
+          <a:bodyPr/>
+          <a:lstStyle/>
+          <a:p>
+            <a:endParaRPr/>
+          </a:p>
+        </p:txBody>
+      </p:sp>
+      <p:sp>
+        <p:nvSpPr>
+          <p:cNvPr id="304" name="Link 5"/>
+          <p:cNvSpPr/>
+          <p:nvPr/>
+        </p:nvSpPr>
+        <p:spPr>
+          <a:xfrm>
+            <a:off x="8953500" y="4221480"/>
+            <a:ext cx="0" cy="838200"/>
+          </a:xfrm>
+          <a:prstGeom prst="line">
+            <a:avLst/>
+          </a:prstGeom>
+          <a:ln w="15875">
+            <a:solidFill>
+              <a:srgbClr val="8593B5"/>
+            </a:solidFill>
+          </a:ln>
+        </p:spPr>
+        <p:txBody>
+          <a:bodyPr/>
+          <a:lstStyle/>
+          <a:p>
+            <a:endParaRPr/>
+          </a:p>
+        </p:txBody>
+      </p:sp>
+      <p:sp>
+        <p:nvSpPr>
           <p:cNvPr id="2" name="Text 0"/>
           <p:cNvSpPr/>
           <p:nvPr/>
         </p:nvSpPr>
         <p:spPr>
           <a:xfrm>
-            <a:off x="548640" y="384048"/>
+            <a:off x="548640" y="330200"/>
             <a:ext cx="10972800" cy="274320"/>
           </a:xfrm>
           <a:prstGeom prst="rect">
@@ -6162,7 +8395,7 @@
                 <a:ea typeface="Calibri" pitchFamily="34" charset="-122"/>
                 <a:cs typeface="Calibri" pitchFamily="34" charset="-120"/>
               </a:rPr>
-              <a:t>fact_transactions au centre, 5 dimensions autour : date, marchand, client, moyen de paiement, devise.</a:t>
+              <a:t>fact_transactions au centre, 5 dimensions autour : date, marchand, client, moyen de paiement, géographie.</a:t>
             </a:r>
             <a:endParaRPr lang="en-US" sz="1600" dirty="0"/>
           </a:p>
@@ -6176,22 +8409,22 @@
         </p:nvSpPr>
         <p:spPr>
           <a:xfrm>
-            <a:off x="640080" y="2926080"/>
-            <a:ext cx="5486400" cy="2560320"/>
-          </a:xfrm>
-          <a:prstGeom prst="rect">
-            <a:avLst/>
-          </a:prstGeom>
-          <a:noFill/>
-          <a:ln/>
-        </p:spPr>
-        <p:txBody>
-          <a:bodyPr wrap="square" lIns="0" tIns="0" rIns="0" bIns="0" rtlCol="0" anchor="ctr"/>
+            <a:off x="640080" y="2857500"/>
+            <a:ext cx="5486400" cy="2540000"/>
+          </a:xfrm>
+          <a:prstGeom prst="rect">
+            <a:avLst/>
+          </a:prstGeom>
+          <a:noFill/>
+          <a:ln/>
+        </p:spPr>
+        <p:txBody>
+          <a:bodyPr wrap="square" lIns="0" tIns="0" rIns="0" bIns="0" rtlCol="0" anchor="t"/>
           <a:lstStyle/>
           <a:p>
             <a:pPr marL="342900" indent="-342900">
               <a:spcAft>
-                <a:spcPts val="1000"/>
+                <a:spcPts val="2600"/>
               </a:spcAft>
               <a:buSzPct val="100000"/>
               <a:buChar char="•"/>
@@ -6205,14 +8438,14 @@
                 <a:ea typeface="Calibri" pitchFamily="34" charset="-122"/>
                 <a:cs typeface="Calibri" pitchFamily="34" charset="-120"/>
               </a:rPr>
-              <a:t>Partitionnement par mois → pruning des requêtes</a:t>
+              <a:t>CLUSTER BY (date_key, merchant_key) → pruning</a:t>
             </a:r>
             <a:endParaRPr lang="en-US" sz="1500" dirty="0"/>
           </a:p>
           <a:p>
             <a:pPr marL="342900" indent="-342900">
               <a:spcAft>
-                <a:spcPts val="1000"/>
+                <a:spcPts val="2600"/>
               </a:spcAft>
               <a:buSzPct val="100000"/>
               <a:buChar char="•"/>
@@ -6226,14 +8459,14 @@
                 <a:ea typeface="Calibri" pitchFamily="34" charset="-122"/>
                 <a:cs typeface="Calibri" pitchFamily="34" charset="-120"/>
               </a:rPr>
-              <a:t>Vue matérialisée mv_daily_revenue (revenu/jour)</a:t>
+              <a:t>Pré-agrégats : Dynamic Tables (cible) · mv_daily_revenue côté PostgreSQL</a:t>
             </a:r>
             <a:endParaRPr lang="en-US" sz="1500" dirty="0"/>
           </a:p>
           <a:p>
             <a:pPr marL="342900" indent="-342900">
               <a:spcAft>
-                <a:spcPts val="1000"/>
+                <a:spcPts val="2600"/>
               </a:spcAft>
               <a:buSzPct val="100000"/>
               <a:buChar char="•"/>
@@ -6255,129 +8488,14 @@
       </p:sp>
       <p:sp>
         <p:nvSpPr>
-          <p:cNvPr id="6" name="Shape 4"/>
-          <p:cNvSpPr/>
-          <p:nvPr/>
-        </p:nvSpPr>
-        <p:spPr>
-          <a:xfrm>
-            <a:off x="9144000" y="3749040"/>
-            <a:ext cx="0" cy="0"/>
-          </a:xfrm>
-          <a:prstGeom prst="line">
-            <a:avLst/>
-          </a:prstGeom>
-          <a:noFill/>
-          <a:ln w="15875">
-            <a:solidFill>
-              <a:srgbClr val="C7CBE0"/>
-            </a:solidFill>
-            <a:prstDash val="solid"/>
-          </a:ln>
-        </p:spPr>
-      </p:sp>
-      <p:sp>
-        <p:nvSpPr>
-          <p:cNvPr id="7" name="Shape 5"/>
-          <p:cNvSpPr/>
-          <p:nvPr/>
-        </p:nvSpPr>
-        <p:spPr>
-          <a:xfrm>
-            <a:off x="9144000" y="3749040"/>
-            <a:ext cx="1737360" cy="0"/>
-          </a:xfrm>
-          <a:prstGeom prst="line">
-            <a:avLst/>
-          </a:prstGeom>
-          <a:noFill/>
-          <a:ln w="15875">
-            <a:solidFill>
-              <a:srgbClr val="C7CBE0"/>
-            </a:solidFill>
-            <a:prstDash val="solid"/>
-          </a:ln>
-        </p:spPr>
-      </p:sp>
-      <p:sp>
-        <p:nvSpPr>
-          <p:cNvPr id="8" name="Shape 6"/>
-          <p:cNvSpPr/>
-          <p:nvPr/>
-        </p:nvSpPr>
-        <p:spPr>
-          <a:xfrm>
-            <a:off x="9144000" y="3749040"/>
-            <a:ext cx="0" cy="182880"/>
-          </a:xfrm>
-          <a:prstGeom prst="line">
-            <a:avLst/>
-          </a:prstGeom>
-          <a:noFill/>
-          <a:ln w="15875">
-            <a:solidFill>
-              <a:srgbClr val="C7CBE0"/>
-            </a:solidFill>
-            <a:prstDash val="solid"/>
-          </a:ln>
-        </p:spPr>
-      </p:sp>
-      <p:sp>
-        <p:nvSpPr>
-          <p:cNvPr id="9" name="Shape 7"/>
-          <p:cNvSpPr/>
-          <p:nvPr/>
-        </p:nvSpPr>
-        <p:spPr>
-          <a:xfrm>
-            <a:off x="9144000" y="3749040"/>
-            <a:ext cx="2103120" cy="182880"/>
-          </a:xfrm>
-          <a:prstGeom prst="line">
-            <a:avLst/>
-          </a:prstGeom>
-          <a:noFill/>
-          <a:ln w="15875">
-            <a:solidFill>
-              <a:srgbClr val="C7CBE0"/>
-            </a:solidFill>
-            <a:prstDash val="solid"/>
-          </a:ln>
-        </p:spPr>
-      </p:sp>
-      <p:sp>
-        <p:nvSpPr>
-          <p:cNvPr id="10" name="Shape 8"/>
-          <p:cNvSpPr/>
-          <p:nvPr/>
-        </p:nvSpPr>
-        <p:spPr>
-          <a:xfrm>
-            <a:off x="9144000" y="3749040"/>
-            <a:ext cx="0" cy="1645920"/>
-          </a:xfrm>
-          <a:prstGeom prst="line">
-            <a:avLst/>
-          </a:prstGeom>
-          <a:noFill/>
-          <a:ln w="15875">
-            <a:solidFill>
-              <a:srgbClr val="C7CBE0"/>
-            </a:solidFill>
-            <a:prstDash val="solid"/>
-          </a:ln>
-        </p:spPr>
-      </p:sp>
-      <p:sp>
-        <p:nvSpPr>
           <p:cNvPr id="11" name="Shape 9"/>
           <p:cNvSpPr/>
           <p:nvPr/>
         </p:nvSpPr>
         <p:spPr>
           <a:xfrm>
-            <a:off x="6537960" y="2103120"/>
-            <a:ext cx="1737360" cy="548640"/>
+            <a:off x="6858000" y="2075180"/>
+            <a:ext cx="1524000" cy="548640"/>
           </a:xfrm>
           <a:prstGeom prst="rect">
             <a:avLst/>
@@ -6399,6 +8517,13 @@
             </a:outerShdw>
           </a:effectLst>
         </p:spPr>
+        <p:txBody>
+          <a:bodyPr/>
+          <a:lstStyle/>
+          <a:p>
+            <a:endParaRPr lang="fr-FR"/>
+          </a:p>
+        </p:txBody>
       </p:sp>
       <p:sp>
         <p:nvSpPr>
@@ -6408,8 +8533,8 @@
         </p:nvSpPr>
         <p:spPr>
           <a:xfrm>
-            <a:off x="6537960" y="2103120"/>
-            <a:ext cx="1737360" cy="548640"/>
+            <a:off x="6858000" y="2075180"/>
+            <a:ext cx="1524000" cy="548640"/>
           </a:xfrm>
           <a:prstGeom prst="rect">
             <a:avLst/>
@@ -6447,8 +8572,8 @@
         </p:nvSpPr>
         <p:spPr>
           <a:xfrm>
-            <a:off x="10012680" y="2103120"/>
-            <a:ext cx="1737360" cy="548640"/>
+            <a:off x="9525000" y="2075180"/>
+            <a:ext cx="1524000" cy="548640"/>
           </a:xfrm>
           <a:prstGeom prst="rect">
             <a:avLst/>
@@ -6470,6 +8595,13 @@
             </a:outerShdw>
           </a:effectLst>
         </p:spPr>
+        <p:txBody>
+          <a:bodyPr/>
+          <a:lstStyle/>
+          <a:p>
+            <a:endParaRPr lang="fr-FR"/>
+          </a:p>
+        </p:txBody>
       </p:sp>
       <p:sp>
         <p:nvSpPr>
@@ -6479,8 +8611,8 @@
         </p:nvSpPr>
         <p:spPr>
           <a:xfrm>
-            <a:off x="10012680" y="2103120"/>
-            <a:ext cx="1737360" cy="548640"/>
+            <a:off x="9525000" y="2075180"/>
+            <a:ext cx="1524000" cy="548640"/>
           </a:xfrm>
           <a:prstGeom prst="rect">
             <a:avLst/>
@@ -6518,8 +8650,8 @@
         </p:nvSpPr>
         <p:spPr>
           <a:xfrm>
-            <a:off x="6172200" y="3657600"/>
-            <a:ext cx="1737360" cy="548640"/>
+            <a:off x="6184900" y="3535680"/>
+            <a:ext cx="1524000" cy="548640"/>
           </a:xfrm>
           <a:prstGeom prst="rect">
             <a:avLst/>
@@ -6541,6 +8673,13 @@
             </a:outerShdw>
           </a:effectLst>
         </p:spPr>
+        <p:txBody>
+          <a:bodyPr/>
+          <a:lstStyle/>
+          <a:p>
+            <a:endParaRPr lang="fr-FR"/>
+          </a:p>
+        </p:txBody>
       </p:sp>
       <p:sp>
         <p:nvSpPr>
@@ -6550,8 +8689,8 @@
         </p:nvSpPr>
         <p:spPr>
           <a:xfrm>
-            <a:off x="6172200" y="3657600"/>
-            <a:ext cx="1737360" cy="548640"/>
+            <a:off x="6184900" y="3535680"/>
+            <a:ext cx="1524000" cy="548640"/>
           </a:xfrm>
           <a:prstGeom prst="rect">
             <a:avLst/>
@@ -6589,8 +8728,8 @@
         </p:nvSpPr>
         <p:spPr>
           <a:xfrm>
-            <a:off x="10378440" y="3657600"/>
-            <a:ext cx="1737360" cy="548640"/>
+            <a:off x="10198100" y="3535680"/>
+            <a:ext cx="1524000" cy="548640"/>
           </a:xfrm>
           <a:prstGeom prst="rect">
             <a:avLst/>
@@ -6612,6 +8751,13 @@
             </a:outerShdw>
           </a:effectLst>
         </p:spPr>
+        <p:txBody>
+          <a:bodyPr/>
+          <a:lstStyle/>
+          <a:p>
+            <a:endParaRPr lang="fr-FR"/>
+          </a:p>
+        </p:txBody>
       </p:sp>
       <p:sp>
         <p:nvSpPr>
@@ -6621,8 +8767,8 @@
         </p:nvSpPr>
         <p:spPr>
           <a:xfrm>
-            <a:off x="10378440" y="3657600"/>
-            <a:ext cx="1737360" cy="548640"/>
+            <a:off x="10198100" y="3535680"/>
+            <a:ext cx="1524000" cy="548640"/>
           </a:xfrm>
           <a:prstGeom prst="rect">
             <a:avLst/>
@@ -6646,7 +8792,7 @@
                 <a:ea typeface="Calibri" pitchFamily="34" charset="-122"/>
                 <a:cs typeface="Calibri" pitchFamily="34" charset="-120"/>
               </a:rPr>
-              <a:t>dim_payment</a:t>
+              <a:t>dim_payment_method</a:t>
             </a:r>
             <a:endParaRPr lang="en-US" sz="1150" dirty="0"/>
           </a:p>
@@ -6660,8 +8806,8 @@
         </p:nvSpPr>
         <p:spPr>
           <a:xfrm>
-            <a:off x="8275320" y="5120640"/>
-            <a:ext cx="1737360" cy="548640"/>
+            <a:off x="8191500" y="5059680"/>
+            <a:ext cx="1524000" cy="548640"/>
           </a:xfrm>
           <a:prstGeom prst="rect">
             <a:avLst/>
@@ -6683,6 +8829,13 @@
             </a:outerShdw>
           </a:effectLst>
         </p:spPr>
+        <p:txBody>
+          <a:bodyPr/>
+          <a:lstStyle/>
+          <a:p>
+            <a:endParaRPr lang="fr-FR"/>
+          </a:p>
+        </p:txBody>
       </p:sp>
       <p:sp>
         <p:nvSpPr>
@@ -6692,8 +8845,8 @@
         </p:nvSpPr>
         <p:spPr>
           <a:xfrm>
-            <a:off x="8275320" y="5120640"/>
-            <a:ext cx="1737360" cy="548640"/>
+            <a:off x="8191500" y="5059680"/>
+            <a:ext cx="1524000" cy="548640"/>
           </a:xfrm>
           <a:prstGeom prst="rect">
             <a:avLst/>
@@ -6717,7 +8870,7 @@
                 <a:ea typeface="Calibri" pitchFamily="34" charset="-122"/>
                 <a:cs typeface="Calibri" pitchFamily="34" charset="-120"/>
               </a:rPr>
-              <a:t>dim_currency</a:t>
+              <a:t>dim_geography</a:t>
             </a:r>
             <a:endParaRPr lang="en-US" sz="1150" dirty="0"/>
           </a:p>
@@ -6731,8 +8884,8 @@
         </p:nvSpPr>
         <p:spPr>
           <a:xfrm>
-            <a:off x="8138160" y="3337560"/>
-            <a:ext cx="2011680" cy="822960"/>
+            <a:off x="8128000" y="3398520"/>
+            <a:ext cx="1651000" cy="822960"/>
           </a:xfrm>
           <a:prstGeom prst="rect">
             <a:avLst/>
@@ -6749,6 +8902,13 @@
             </a:outerShdw>
           </a:effectLst>
         </p:spPr>
+        <p:txBody>
+          <a:bodyPr/>
+          <a:lstStyle/>
+          <a:p>
+            <a:endParaRPr lang="fr-FR"/>
+          </a:p>
+        </p:txBody>
       </p:sp>
       <p:sp>
         <p:nvSpPr>
@@ -6758,8 +8918,8 @@
         </p:nvSpPr>
         <p:spPr>
           <a:xfrm>
-            <a:off x="8138160" y="3337560"/>
-            <a:ext cx="2011680" cy="822960"/>
+            <a:off x="8128000" y="3398520"/>
+            <a:ext cx="1651000" cy="822960"/>
           </a:xfrm>
           <a:prstGeom prst="rect">
             <a:avLst/>
@@ -6829,6 +8989,11 @@
         </p:txBody>
       </p:sp>
     </p:spTree>
+    <p:extLst>
+      <p:ext uri="{BB962C8B-B14F-4D97-AF65-F5344CB8AC3E}">
+        <p14:creationId xmlns:p14="http://schemas.microsoft.com/office/powerpoint/2010/main" val="2628681231"/>
+      </p:ext>
+    </p:extLst>
   </p:cSld>
   <p:clrMapOvr>
     <a:masterClrMapping/>
@@ -6836,7 +9001,7 @@
 </p:sld>
 </file>
 
-<file path=ppt/slides/slide7.xml><?xml version="1.0" encoding="utf-8"?>
+<file path=ppt/slides/slide9.xml><?xml version="1.0" encoding="utf-8"?>
 <p:sld xmlns:a="http://schemas.openxmlformats.org/drawingml/2006/main" xmlns:r="http://schemas.openxmlformats.org/officeDocument/2006/relationships" xmlns:p="http://schemas.openxmlformats.org/presentationml/2006/main">
   <p:cSld name="Slide 7">
     <p:bg>
@@ -6869,7 +9034,7 @@
         </p:nvSpPr>
         <p:spPr>
           <a:xfrm>
-            <a:off x="548640" y="384048"/>
+            <a:off x="548640" y="330200"/>
             <a:ext cx="10972800" cy="274320"/>
           </a:xfrm>
           <a:prstGeom prst="rect">
@@ -6970,6 +9135,13 @@
             </a:outerShdw>
           </a:effectLst>
         </p:spPr>
+        <p:txBody>
+          <a:bodyPr/>
+          <a:lstStyle/>
+          <a:p>
+            <a:endParaRPr lang="fr-FR"/>
+          </a:p>
+        </p:txBody>
       </p:sp>
       <p:sp>
         <p:nvSpPr>
@@ -6990,6 +9162,13 @@
           </a:solidFill>
           <a:ln/>
         </p:spPr>
+        <p:txBody>
+          <a:bodyPr/>
+          <a:lstStyle/>
+          <a:p>
+            <a:endParaRPr lang="fr-FR"/>
+          </a:p>
+        </p:txBody>
       </p:sp>
       <p:pic>
         <p:nvPicPr>
@@ -7048,7 +9227,7 @@
                 <a:ea typeface="Consolas" pitchFamily="34" charset="-122"/>
                 <a:cs typeface="Consolas" pitchFamily="34" charset="-120"/>
               </a:rPr>
-              <a:t>logs</a:t>
+              <a:t>transaction_logs</a:t>
             </a:r>
             <a:endParaRPr lang="en-US" sz="1700" dirty="0"/>
           </a:p>
@@ -7087,7 +9266,7 @@
                 <a:ea typeface="Calibri" pitchFamily="34" charset="-122"/>
                 <a:cs typeface="Calibri" pitchFamily="34" charset="-120"/>
               </a:rPr>
-              <a:t>Erreurs &amp; accès par service. TTL 90 j (purge RGPD automatique).</a:t>
+              <a:t>Journal brut de chaque événement transaction (payload complet). TTL 90 j : purge RGPD automatique.</a:t>
             </a:r>
             <a:endParaRPr lang="en-US" sz="1400" dirty="0"/>
           </a:p>
@@ -7124,6 +9303,13 @@
             </a:outerShdw>
           </a:effectLst>
         </p:spPr>
+        <p:txBody>
+          <a:bodyPr/>
+          <a:lstStyle/>
+          <a:p>
+            <a:endParaRPr lang="fr-FR"/>
+          </a:p>
+        </p:txBody>
       </p:sp>
       <p:sp>
         <p:nvSpPr>
@@ -7144,6 +9330,13 @@
           </a:solidFill>
           <a:ln/>
         </p:spPr>
+        <p:txBody>
+          <a:bodyPr/>
+          <a:lstStyle/>
+          <a:p>
+            <a:endParaRPr lang="fr-FR"/>
+          </a:p>
+        </p:txBody>
       </p:sp>
       <p:pic>
         <p:nvPicPr>
@@ -7202,7 +9395,7 @@
                 <a:ea typeface="Consolas" pitchFamily="34" charset="-122"/>
                 <a:cs typeface="Consolas" pitchFamily="34" charset="-120"/>
               </a:rPr>
-              <a:t>user_interactions</a:t>
+              <a:t>fraud_alerts</a:t>
             </a:r>
             <a:endParaRPr lang="en-US" sz="1700" dirty="0"/>
           </a:p>
@@ -7241,7 +9434,7 @@
                 <a:ea typeface="Calibri" pitchFamily="34" charset="-122"/>
                 <a:cs typeface="Calibri" pitchFamily="34" charset="-120"/>
               </a:rPr>
-              <a:t>Clickstream &amp; funnel de checkout imbriqués (embedding).</a:t>
+              <a:t>Transactions en review / block : score, règles déclenchées, model_version. Dénormalisé, lu sans JOIN.</a:t>
             </a:r>
             <a:endParaRPr lang="en-US" sz="1400" dirty="0"/>
           </a:p>
@@ -7278,6 +9471,13 @@
             </a:outerShdw>
           </a:effectLst>
         </p:spPr>
+        <p:txBody>
+          <a:bodyPr/>
+          <a:lstStyle/>
+          <a:p>
+            <a:endParaRPr lang="fr-FR"/>
+          </a:p>
+        </p:txBody>
       </p:sp>
       <p:sp>
         <p:nvSpPr>
@@ -7298,6 +9498,13 @@
           </a:solidFill>
           <a:ln/>
         </p:spPr>
+        <p:txBody>
+          <a:bodyPr/>
+          <a:lstStyle/>
+          <a:p>
+            <a:endParaRPr lang="fr-FR"/>
+          </a:p>
+        </p:txBody>
       </p:sp>
       <p:pic>
         <p:nvPicPr>
@@ -7395,7 +9602,7 @@
                 <a:ea typeface="Calibri" pitchFamily="34" charset="-122"/>
                 <a:cs typeface="Calibri" pitchFamily="34" charset="-120"/>
               </a:rPr>
-              <a:t>Vecteur de features + score + décision par transaction.</a:t>
+              <a:t>Snapshot de features par client (upsert sur customer_id). ml_monitoring : dérive et précision servie (Evidently).</a:t>
             </a:r>
             <a:endParaRPr lang="en-US" sz="1400" dirty="0"/>
           </a:p>
@@ -7434,7 +9641,7 @@
                 <a:ea typeface="Calibri" pitchFamily="34" charset="-122"/>
                 <a:cs typeface="Calibri" pitchFamily="34" charset="-120"/>
               </a:rPr>
-              <a:t>Embedding quand lu ensemble · Referencing (UUID) vers les données maîtres PostgreSQL</a:t>
+              <a:t>Aussi user_interactions et customer_feedback : schémas prêts, non alimentés · Referencing (UUID) vers PostgreSQL</a:t>
             </a:r>
             <a:endParaRPr lang="en-US" sz="1350" dirty="0"/>
           </a:p>
@@ -7474,1482 +9681,6 @@
                 <a:cs typeface="Calibri" pitchFamily="34" charset="-120"/>
               </a:rPr>
               <a:t>07</a:t>
-            </a:r>
-            <a:endParaRPr lang="en-US" sz="1100" dirty="0"/>
-          </a:p>
-        </p:txBody>
-      </p:sp>
-    </p:spTree>
-  </p:cSld>
-  <p:clrMapOvr>
-    <a:masterClrMapping/>
-  </p:clrMapOvr>
-</p:sld>
-</file>
-
-<file path=ppt/slides/slide8.xml><?xml version="1.0" encoding="utf-8"?>
-<p:sld xmlns:a="http://schemas.openxmlformats.org/drawingml/2006/main" xmlns:r="http://schemas.openxmlformats.org/officeDocument/2006/relationships" xmlns:p="http://schemas.openxmlformats.org/presentationml/2006/main">
-  <p:cSld name="Slide 8">
-    <p:bg>
-      <p:bgPr>
-        <a:solidFill>
-          <a:srgbClr val="0E1330"/>
-        </a:solidFill>
-        <a:effectLst/>
-      </p:bgPr>
-    </p:bg>
-    <p:spTree>
-      <p:nvGrpSpPr>
-        <p:cNvPr id="1" name=""/>
-        <p:cNvGrpSpPr/>
-        <p:nvPr/>
-      </p:nvGrpSpPr>
-      <p:grpSpPr>
-        <a:xfrm>
-          <a:off x="0" y="0"/>
-          <a:ext cx="0" cy="0"/>
-          <a:chOff x="0" y="0"/>
-          <a:chExt cx="0" cy="0"/>
-        </a:xfrm>
-      </p:grpSpPr>
-      <p:sp>
-        <p:nvSpPr>
-          <p:cNvPr id="2" name="Text 0"/>
-          <p:cNvSpPr/>
-          <p:nvPr/>
-        </p:nvSpPr>
-        <p:spPr>
-          <a:xfrm>
-            <a:off x="548640" y="457200"/>
-            <a:ext cx="10972800" cy="274320"/>
-          </a:xfrm>
-          <a:prstGeom prst="rect">
-            <a:avLst/>
-          </a:prstGeom>
-          <a:noFill/>
-          <a:ln/>
-        </p:spPr>
-        <p:txBody>
-          <a:bodyPr wrap="square" lIns="0" tIns="0" rIns="0" bIns="0" rtlCol="0" anchor="ctr"/>
-          <a:lstStyle/>
-          <a:p>
-            <a:pPr marL="0" indent="0">
-              <a:buNone/>
-            </a:pPr>
-            <a:r>
-              <a:rPr lang="en-US" sz="1200" b="1" kern="0" spc="300" dirty="0">
-                <a:solidFill>
-                  <a:srgbClr val="6C63FF"/>
-                </a:solidFill>
-                <a:latin typeface="Calibri" pitchFamily="34" charset="0"/>
-                <a:ea typeface="Calibri" pitchFamily="34" charset="-122"/>
-                <a:cs typeface="Calibri" pitchFamily="34" charset="-120"/>
-              </a:rPr>
-              <a:t>DIFFÉRENCIATEUR</a:t>
-            </a:r>
-            <a:endParaRPr lang="en-US" sz="1200" dirty="0"/>
-          </a:p>
-        </p:txBody>
-      </p:sp>
-      <p:sp>
-        <p:nvSpPr>
-          <p:cNvPr id="3" name="Text 1"/>
-          <p:cNvSpPr/>
-          <p:nvPr/>
-        </p:nvSpPr>
-        <p:spPr>
-          <a:xfrm>
-            <a:off x="548640" y="749808"/>
-            <a:ext cx="10972800" cy="640080"/>
-          </a:xfrm>
-          <a:prstGeom prst="rect">
-            <a:avLst/>
-          </a:prstGeom>
-          <a:noFill/>
-          <a:ln/>
-        </p:spPr>
-        <p:txBody>
-          <a:bodyPr wrap="square" lIns="0" tIns="0" rIns="0" bIns="0" rtlCol="0" anchor="ctr"/>
-          <a:lstStyle/>
-          <a:p>
-            <a:pPr marL="0" indent="0">
-              <a:buNone/>
-            </a:pPr>
-            <a:r>
-              <a:rPr lang="en-US" sz="3000" b="1" dirty="0">
-                <a:solidFill>
-                  <a:srgbClr val="FFFFFF"/>
-                </a:solidFill>
-                <a:latin typeface="Georgia" pitchFamily="34" charset="0"/>
-                <a:ea typeface="Georgia" pitchFamily="34" charset="-122"/>
-                <a:cs typeface="Georgia" pitchFamily="34" charset="-120"/>
-              </a:rPr>
-              <a:t>Détection de fraude en temps réel</a:t>
-            </a:r>
-            <a:endParaRPr lang="en-US" sz="3000" dirty="0"/>
-          </a:p>
-        </p:txBody>
-      </p:sp>
-      <p:sp>
-        <p:nvSpPr>
-          <p:cNvPr id="4" name="Shape 2"/>
-          <p:cNvSpPr/>
-          <p:nvPr/>
-        </p:nvSpPr>
-        <p:spPr>
-          <a:xfrm>
-            <a:off x="548640" y="1783080"/>
-            <a:ext cx="3200400" cy="4023360"/>
-          </a:xfrm>
-          <a:prstGeom prst="rect">
-            <a:avLst/>
-          </a:prstGeom>
-          <a:solidFill>
-            <a:srgbClr val="16204A"/>
-          </a:solidFill>
-          <a:ln w="12700">
-            <a:solidFill>
-              <a:srgbClr val="2A356B"/>
-            </a:solidFill>
-            <a:prstDash val="solid"/>
-          </a:ln>
-        </p:spPr>
-      </p:sp>
-      <p:pic>
-        <p:nvPicPr>
-          <p:cNvPr id="5" name="Image 0" descr="preencoded.png"/>
-          <p:cNvPicPr>
-            <a:picLocks noChangeAspect="1"/>
-          </p:cNvPicPr>
-          <p:nvPr/>
-        </p:nvPicPr>
-        <p:blipFill>
-          <a:blip r:embed="rId3"/>
-          <a:stretch>
-            <a:fillRect/>
-          </a:stretch>
-        </p:blipFill>
-        <p:spPr>
-          <a:xfrm>
-            <a:off x="960120" y="2148840"/>
-            <a:ext cx="822960" cy="822960"/>
-          </a:xfrm>
-          <a:prstGeom prst="rect">
-            <a:avLst/>
-          </a:prstGeom>
-        </p:spPr>
-      </p:pic>
-      <p:sp>
-        <p:nvSpPr>
-          <p:cNvPr id="6" name="Text 3"/>
-          <p:cNvSpPr/>
-          <p:nvPr/>
-        </p:nvSpPr>
-        <p:spPr>
-          <a:xfrm>
-            <a:off x="548640" y="3108960"/>
-            <a:ext cx="3200400" cy="822960"/>
-          </a:xfrm>
-          <a:prstGeom prst="rect">
-            <a:avLst/>
-          </a:prstGeom>
-          <a:noFill/>
-          <a:ln/>
-        </p:spPr>
-        <p:txBody>
-          <a:bodyPr wrap="square" lIns="0" tIns="0" rIns="0" bIns="0" rtlCol="0" anchor="ctr"/>
-          <a:lstStyle/>
-          <a:p>
-            <a:pPr marL="0" indent="0" algn="ctr">
-              <a:buNone/>
-            </a:pPr>
-            <a:r>
-              <a:rPr lang="en-US" sz="4400" b="1" dirty="0">
-                <a:solidFill>
-                  <a:srgbClr val="D85A30"/>
-                </a:solidFill>
-                <a:latin typeface="Georgia" pitchFamily="34" charset="0"/>
-                <a:ea typeface="Georgia" pitchFamily="34" charset="-122"/>
-                <a:cs typeface="Georgia" pitchFamily="34" charset="-120"/>
-              </a:rPr>
-              <a:t>&lt; 100 ms</a:t>
-            </a:r>
-            <a:endParaRPr lang="en-US" sz="4400" dirty="0"/>
-          </a:p>
-        </p:txBody>
-      </p:sp>
-      <p:sp>
-        <p:nvSpPr>
-          <p:cNvPr id="7" name="Text 4"/>
-          <p:cNvSpPr/>
-          <p:nvPr/>
-        </p:nvSpPr>
-        <p:spPr>
-          <a:xfrm>
-            <a:off x="685800" y="4023360"/>
-            <a:ext cx="2926080" cy="1097280"/>
-          </a:xfrm>
-          <a:prstGeom prst="rect">
-            <a:avLst/>
-          </a:prstGeom>
-          <a:noFill/>
-          <a:ln/>
-        </p:spPr>
-        <p:txBody>
-          <a:bodyPr wrap="square" lIns="0" tIns="0" rIns="0" bIns="0" rtlCol="0" anchor="ctr"/>
-          <a:lstStyle/>
-          <a:p>
-            <a:pPr marL="0" indent="0" algn="ctr">
-              <a:buNone/>
-            </a:pPr>
-            <a:r>
-              <a:rPr lang="en-US" sz="1400" dirty="0">
-                <a:solidFill>
-                  <a:srgbClr val="C8CCE6"/>
-                </a:solidFill>
-                <a:latin typeface="Calibri" pitchFamily="34" charset="0"/>
-                <a:ea typeface="Calibri" pitchFamily="34" charset="-122"/>
-                <a:cs typeface="Calibri" pitchFamily="34" charset="-120"/>
-              </a:rPr>
-              <a:t>scoring pendant que la transaction est en attente</a:t>
-            </a:r>
-            <a:endParaRPr lang="en-US" sz="1400" dirty="0"/>
-          </a:p>
-        </p:txBody>
-      </p:sp>
-      <p:sp>
-        <p:nvSpPr>
-          <p:cNvPr id="8" name="Shape 5"/>
-          <p:cNvSpPr/>
-          <p:nvPr/>
-        </p:nvSpPr>
-        <p:spPr>
-          <a:xfrm>
-            <a:off x="4160520" y="1874520"/>
-            <a:ext cx="457200" cy="457200"/>
-          </a:xfrm>
-          <a:prstGeom prst="ellipse">
-            <a:avLst/>
-          </a:prstGeom>
-          <a:solidFill>
-            <a:srgbClr val="6C63FF"/>
-          </a:solidFill>
-          <a:ln/>
-        </p:spPr>
-      </p:sp>
-      <p:sp>
-        <p:nvSpPr>
-          <p:cNvPr id="9" name="Text 6"/>
-          <p:cNvSpPr/>
-          <p:nvPr/>
-        </p:nvSpPr>
-        <p:spPr>
-          <a:xfrm>
-            <a:off x="4160520" y="1874520"/>
-            <a:ext cx="457200" cy="457200"/>
-          </a:xfrm>
-          <a:prstGeom prst="rect">
-            <a:avLst/>
-          </a:prstGeom>
-          <a:noFill/>
-          <a:ln/>
-        </p:spPr>
-        <p:txBody>
-          <a:bodyPr wrap="square" lIns="0" tIns="0" rIns="0" bIns="0" rtlCol="0" anchor="ctr"/>
-          <a:lstStyle/>
-          <a:p>
-            <a:pPr marL="0" indent="0" algn="ctr">
-              <a:buNone/>
-            </a:pPr>
-            <a:r>
-              <a:rPr lang="en-US" sz="1600" b="1" dirty="0">
-                <a:solidFill>
-                  <a:srgbClr val="FFFFFF"/>
-                </a:solidFill>
-                <a:latin typeface="Calibri" pitchFamily="34" charset="0"/>
-                <a:ea typeface="Calibri" pitchFamily="34" charset="-122"/>
-                <a:cs typeface="Calibri" pitchFamily="34" charset="-120"/>
-              </a:rPr>
-              <a:t>1</a:t>
-            </a:r>
-            <a:endParaRPr lang="en-US" sz="1600" dirty="0"/>
-          </a:p>
-        </p:txBody>
-      </p:sp>
-      <p:sp>
-        <p:nvSpPr>
-          <p:cNvPr id="10" name="Text 7"/>
-          <p:cNvSpPr/>
-          <p:nvPr/>
-        </p:nvSpPr>
-        <p:spPr>
-          <a:xfrm>
-            <a:off x="4800600" y="1828800"/>
-            <a:ext cx="7040880" cy="548640"/>
-          </a:xfrm>
-          <a:prstGeom prst="rect">
-            <a:avLst/>
-          </a:prstGeom>
-          <a:noFill/>
-          <a:ln/>
-        </p:spPr>
-        <p:txBody>
-          <a:bodyPr wrap="square" lIns="0" tIns="0" rIns="0" bIns="0" rtlCol="0" anchor="ctr"/>
-          <a:lstStyle/>
-          <a:p>
-            <a:pPr marL="0" indent="0">
-              <a:buNone/>
-            </a:pPr>
-            <a:r>
-              <a:rPr lang="en-US" sz="1500" dirty="0">
-                <a:solidFill>
-                  <a:srgbClr val="EAECF7"/>
-                </a:solidFill>
-                <a:latin typeface="Calibri" pitchFamily="34" charset="0"/>
-                <a:ea typeface="Calibri" pitchFamily="34" charset="-122"/>
-                <a:cs typeface="Calibri" pitchFamily="34" charset="-120"/>
-              </a:rPr>
-              <a:t>Événement CDC consommé par Flink depuis Kafka</a:t>
-            </a:r>
-            <a:endParaRPr lang="en-US" sz="1500" dirty="0"/>
-          </a:p>
-        </p:txBody>
-      </p:sp>
-      <p:sp>
-        <p:nvSpPr>
-          <p:cNvPr id="11" name="Shape 8"/>
-          <p:cNvSpPr/>
-          <p:nvPr/>
-        </p:nvSpPr>
-        <p:spPr>
-          <a:xfrm>
-            <a:off x="4160520" y="2679192"/>
-            <a:ext cx="457200" cy="457200"/>
-          </a:xfrm>
-          <a:prstGeom prst="ellipse">
-            <a:avLst/>
-          </a:prstGeom>
-          <a:solidFill>
-            <a:srgbClr val="6C63FF"/>
-          </a:solidFill>
-          <a:ln/>
-        </p:spPr>
-      </p:sp>
-      <p:sp>
-        <p:nvSpPr>
-          <p:cNvPr id="12" name="Text 9"/>
-          <p:cNvSpPr/>
-          <p:nvPr/>
-        </p:nvSpPr>
-        <p:spPr>
-          <a:xfrm>
-            <a:off x="4160520" y="2679192"/>
-            <a:ext cx="457200" cy="457200"/>
-          </a:xfrm>
-          <a:prstGeom prst="rect">
-            <a:avLst/>
-          </a:prstGeom>
-          <a:noFill/>
-          <a:ln/>
-        </p:spPr>
-        <p:txBody>
-          <a:bodyPr wrap="square" lIns="0" tIns="0" rIns="0" bIns="0" rtlCol="0" anchor="ctr"/>
-          <a:lstStyle/>
-          <a:p>
-            <a:pPr marL="0" indent="0" algn="ctr">
-              <a:buNone/>
-            </a:pPr>
-            <a:r>
-              <a:rPr lang="en-US" sz="1600" b="1" dirty="0">
-                <a:solidFill>
-                  <a:srgbClr val="FFFFFF"/>
-                </a:solidFill>
-                <a:latin typeface="Calibri" pitchFamily="34" charset="0"/>
-                <a:ea typeface="Calibri" pitchFamily="34" charset="-122"/>
-                <a:cs typeface="Calibri" pitchFamily="34" charset="-120"/>
-              </a:rPr>
-              <a:t>2</a:t>
-            </a:r>
-            <a:endParaRPr lang="en-US" sz="1600" dirty="0"/>
-          </a:p>
-        </p:txBody>
-      </p:sp>
-      <p:sp>
-        <p:nvSpPr>
-          <p:cNvPr id="13" name="Text 10"/>
-          <p:cNvSpPr/>
-          <p:nvPr/>
-        </p:nvSpPr>
-        <p:spPr>
-          <a:xfrm>
-            <a:off x="4800600" y="2633472"/>
-            <a:ext cx="7040880" cy="548640"/>
-          </a:xfrm>
-          <a:prstGeom prst="rect">
-            <a:avLst/>
-          </a:prstGeom>
-          <a:noFill/>
-          <a:ln/>
-        </p:spPr>
-        <p:txBody>
-          <a:bodyPr wrap="square" lIns="0" tIns="0" rIns="0" bIns="0" rtlCol="0" anchor="ctr"/>
-          <a:lstStyle/>
-          <a:p>
-            <a:pPr marL="0" indent="0">
-              <a:buNone/>
-            </a:pPr>
-            <a:r>
-              <a:rPr lang="en-US" sz="1500" dirty="0">
-                <a:solidFill>
-                  <a:srgbClr val="EAECF7"/>
-                </a:solidFill>
-                <a:latin typeface="Calibri" pitchFamily="34" charset="0"/>
-                <a:ea typeface="Calibri" pitchFamily="34" charset="-122"/>
-                <a:cs typeface="Calibri" pitchFamily="34" charset="-120"/>
-              </a:rPr>
-              <a:t>Vélocité 1 h / 24 h lue dans Redis (&lt; 1 ms)</a:t>
-            </a:r>
-            <a:endParaRPr lang="en-US" sz="1500" dirty="0"/>
-          </a:p>
-        </p:txBody>
-      </p:sp>
-      <p:sp>
-        <p:nvSpPr>
-          <p:cNvPr id="14" name="Shape 11"/>
-          <p:cNvSpPr/>
-          <p:nvPr/>
-        </p:nvSpPr>
-        <p:spPr>
-          <a:xfrm>
-            <a:off x="4160520" y="3483864"/>
-            <a:ext cx="457200" cy="457200"/>
-          </a:xfrm>
-          <a:prstGeom prst="ellipse">
-            <a:avLst/>
-          </a:prstGeom>
-          <a:solidFill>
-            <a:srgbClr val="6C63FF"/>
-          </a:solidFill>
-          <a:ln/>
-        </p:spPr>
-      </p:sp>
-      <p:sp>
-        <p:nvSpPr>
-          <p:cNvPr id="15" name="Text 12"/>
-          <p:cNvSpPr/>
-          <p:nvPr/>
-        </p:nvSpPr>
-        <p:spPr>
-          <a:xfrm>
-            <a:off x="4160520" y="3483864"/>
-            <a:ext cx="457200" cy="457200"/>
-          </a:xfrm>
-          <a:prstGeom prst="rect">
-            <a:avLst/>
-          </a:prstGeom>
-          <a:noFill/>
-          <a:ln/>
-        </p:spPr>
-        <p:txBody>
-          <a:bodyPr wrap="square" lIns="0" tIns="0" rIns="0" bIns="0" rtlCol="0" anchor="ctr"/>
-          <a:lstStyle/>
-          <a:p>
-            <a:pPr marL="0" indent="0" algn="ctr">
-              <a:buNone/>
-            </a:pPr>
-            <a:r>
-              <a:rPr lang="en-US" sz="1600" b="1" dirty="0">
-                <a:solidFill>
-                  <a:srgbClr val="FFFFFF"/>
-                </a:solidFill>
-                <a:latin typeface="Calibri" pitchFamily="34" charset="0"/>
-                <a:ea typeface="Calibri" pitchFamily="34" charset="-122"/>
-                <a:cs typeface="Calibri" pitchFamily="34" charset="-120"/>
-              </a:rPr>
-              <a:t>3</a:t>
-            </a:r>
-            <a:endParaRPr lang="en-US" sz="1600" dirty="0"/>
-          </a:p>
-        </p:txBody>
-      </p:sp>
-      <p:sp>
-        <p:nvSpPr>
-          <p:cNvPr id="16" name="Text 13"/>
-          <p:cNvSpPr/>
-          <p:nvPr/>
-        </p:nvSpPr>
-        <p:spPr>
-          <a:xfrm>
-            <a:off x="4800600" y="3438144"/>
-            <a:ext cx="7040880" cy="548640"/>
-          </a:xfrm>
-          <a:prstGeom prst="rect">
-            <a:avLst/>
-          </a:prstGeom>
-          <a:noFill/>
-          <a:ln/>
-        </p:spPr>
-        <p:txBody>
-          <a:bodyPr wrap="square" lIns="0" tIns="0" rIns="0" bIns="0" rtlCol="0" anchor="ctr"/>
-          <a:lstStyle/>
-          <a:p>
-            <a:pPr marL="0" indent="0">
-              <a:buNone/>
-            </a:pPr>
-            <a:r>
-              <a:rPr lang="en-US" sz="1500" dirty="0">
-                <a:solidFill>
-                  <a:srgbClr val="EAECF7"/>
-                </a:solidFill>
-                <a:latin typeface="Calibri" pitchFamily="34" charset="0"/>
-                <a:ea typeface="Calibri" pitchFamily="34" charset="-122"/>
-                <a:cs typeface="Calibri" pitchFamily="34" charset="-120"/>
-              </a:rPr>
-              <a:t>5 règles → score ; seuils 0.60 (review) / 0.85 (block)</a:t>
-            </a:r>
-            <a:endParaRPr lang="en-US" sz="1500" dirty="0"/>
-          </a:p>
-        </p:txBody>
-      </p:sp>
-      <p:sp>
-        <p:nvSpPr>
-          <p:cNvPr id="17" name="Shape 14"/>
-          <p:cNvSpPr/>
-          <p:nvPr/>
-        </p:nvSpPr>
-        <p:spPr>
-          <a:xfrm>
-            <a:off x="4160520" y="4288536"/>
-            <a:ext cx="457200" cy="457200"/>
-          </a:xfrm>
-          <a:prstGeom prst="ellipse">
-            <a:avLst/>
-          </a:prstGeom>
-          <a:solidFill>
-            <a:srgbClr val="6C63FF"/>
-          </a:solidFill>
-          <a:ln/>
-        </p:spPr>
-      </p:sp>
-      <p:sp>
-        <p:nvSpPr>
-          <p:cNvPr id="18" name="Text 15"/>
-          <p:cNvSpPr/>
-          <p:nvPr/>
-        </p:nvSpPr>
-        <p:spPr>
-          <a:xfrm>
-            <a:off x="4160520" y="4288536"/>
-            <a:ext cx="457200" cy="457200"/>
-          </a:xfrm>
-          <a:prstGeom prst="rect">
-            <a:avLst/>
-          </a:prstGeom>
-          <a:noFill/>
-          <a:ln/>
-        </p:spPr>
-        <p:txBody>
-          <a:bodyPr wrap="square" lIns="0" tIns="0" rIns="0" bIns="0" rtlCol="0" anchor="ctr"/>
-          <a:lstStyle/>
-          <a:p>
-            <a:pPr marL="0" indent="0" algn="ctr">
-              <a:buNone/>
-            </a:pPr>
-            <a:r>
-              <a:rPr lang="en-US" sz="1600" b="1" dirty="0">
-                <a:solidFill>
-                  <a:srgbClr val="FFFFFF"/>
-                </a:solidFill>
-                <a:latin typeface="Calibri" pitchFamily="34" charset="0"/>
-                <a:ea typeface="Calibri" pitchFamily="34" charset="-122"/>
-                <a:cs typeface="Calibri" pitchFamily="34" charset="-120"/>
-              </a:rPr>
-              <a:t>4</a:t>
-            </a:r>
-            <a:endParaRPr lang="en-US" sz="1600" dirty="0"/>
-          </a:p>
-        </p:txBody>
-      </p:sp>
-      <p:sp>
-        <p:nvSpPr>
-          <p:cNvPr id="19" name="Text 16"/>
-          <p:cNvSpPr/>
-          <p:nvPr/>
-        </p:nvSpPr>
-        <p:spPr>
-          <a:xfrm>
-            <a:off x="4800600" y="4242816"/>
-            <a:ext cx="7040880" cy="548640"/>
-          </a:xfrm>
-          <a:prstGeom prst="rect">
-            <a:avLst/>
-          </a:prstGeom>
-          <a:noFill/>
-          <a:ln/>
-        </p:spPr>
-        <p:txBody>
-          <a:bodyPr wrap="square" lIns="0" tIns="0" rIns="0" bIns="0" rtlCol="0" anchor="ctr"/>
-          <a:lstStyle/>
-          <a:p>
-            <a:pPr marL="0" indent="0">
-              <a:buNone/>
-            </a:pPr>
-            <a:r>
-              <a:rPr lang="en-US" sz="1500" dirty="0">
-                <a:solidFill>
-                  <a:srgbClr val="EAECF7"/>
-                </a:solidFill>
-                <a:latin typeface="Calibri" pitchFamily="34" charset="0"/>
-                <a:ea typeface="Calibri" pitchFamily="34" charset="-122"/>
-                <a:cs typeface="Calibri" pitchFamily="34" charset="-120"/>
-              </a:rPr>
-              <a:t>Décision écrite dans PostgreSQL + MongoDB</a:t>
-            </a:r>
-            <a:endParaRPr lang="en-US" sz="1500" dirty="0"/>
-          </a:p>
-        </p:txBody>
-      </p:sp>
-      <p:sp>
-        <p:nvSpPr>
-          <p:cNvPr id="20" name="Shape 17"/>
-          <p:cNvSpPr/>
-          <p:nvPr/>
-        </p:nvSpPr>
-        <p:spPr>
-          <a:xfrm>
-            <a:off x="4160520" y="5093208"/>
-            <a:ext cx="457200" cy="457200"/>
-          </a:xfrm>
-          <a:prstGeom prst="ellipse">
-            <a:avLst/>
-          </a:prstGeom>
-          <a:solidFill>
-            <a:srgbClr val="6C63FF"/>
-          </a:solidFill>
-          <a:ln/>
-        </p:spPr>
-      </p:sp>
-      <p:sp>
-        <p:nvSpPr>
-          <p:cNvPr id="21" name="Text 18"/>
-          <p:cNvSpPr/>
-          <p:nvPr/>
-        </p:nvSpPr>
-        <p:spPr>
-          <a:xfrm>
-            <a:off x="4160520" y="5093208"/>
-            <a:ext cx="457200" cy="457200"/>
-          </a:xfrm>
-          <a:prstGeom prst="rect">
-            <a:avLst/>
-          </a:prstGeom>
-          <a:noFill/>
-          <a:ln/>
-        </p:spPr>
-        <p:txBody>
-          <a:bodyPr wrap="square" lIns="0" tIns="0" rIns="0" bIns="0" rtlCol="0" anchor="ctr"/>
-          <a:lstStyle/>
-          <a:p>
-            <a:pPr marL="0" indent="0" algn="ctr">
-              <a:buNone/>
-            </a:pPr>
-            <a:r>
-              <a:rPr lang="en-US" sz="1600" b="1" dirty="0">
-                <a:solidFill>
-                  <a:srgbClr val="FFFFFF"/>
-                </a:solidFill>
-                <a:latin typeface="Calibri" pitchFamily="34" charset="0"/>
-                <a:ea typeface="Calibri" pitchFamily="34" charset="-122"/>
-                <a:cs typeface="Calibri" pitchFamily="34" charset="-120"/>
-              </a:rPr>
-              <a:t>5</a:t>
-            </a:r>
-            <a:endParaRPr lang="en-US" sz="1600" dirty="0"/>
-          </a:p>
-        </p:txBody>
-      </p:sp>
-      <p:sp>
-        <p:nvSpPr>
-          <p:cNvPr id="22" name="Text 19"/>
-          <p:cNvSpPr/>
-          <p:nvPr/>
-        </p:nvSpPr>
-        <p:spPr>
-          <a:xfrm>
-            <a:off x="4800600" y="5047488"/>
-            <a:ext cx="7040880" cy="548640"/>
-          </a:xfrm>
-          <a:prstGeom prst="rect">
-            <a:avLst/>
-          </a:prstGeom>
-          <a:noFill/>
-          <a:ln/>
-        </p:spPr>
-        <p:txBody>
-          <a:bodyPr wrap="square" lIns="0" tIns="0" rIns="0" bIns="0" rtlCol="0" anchor="ctr"/>
-          <a:lstStyle/>
-          <a:p>
-            <a:pPr marL="0" indent="0">
-              <a:buNone/>
-            </a:pPr>
-            <a:r>
-              <a:rPr lang="en-US" sz="1500" dirty="0">
-                <a:solidFill>
-                  <a:srgbClr val="EAECF7"/>
-                </a:solidFill>
-                <a:latin typeface="Calibri" pitchFamily="34" charset="0"/>
-                <a:ea typeface="Calibri" pitchFamily="34" charset="-122"/>
-                <a:cs typeface="Calibri" pitchFamily="34" charset="-120"/>
-              </a:rPr>
-              <a:t>Cible : modèle SageMaker (XGBoost/LSTM), déploiement blue/green</a:t>
-            </a:r>
-            <a:endParaRPr lang="en-US" sz="1500" dirty="0"/>
-          </a:p>
-        </p:txBody>
-      </p:sp>
-      <p:sp>
-        <p:nvSpPr>
-          <p:cNvPr id="23" name="Text 20"/>
-          <p:cNvSpPr/>
-          <p:nvPr/>
-        </p:nvSpPr>
-        <p:spPr>
-          <a:xfrm>
-            <a:off x="11430000" y="6355080"/>
-            <a:ext cx="548640" cy="274320"/>
-          </a:xfrm>
-          <a:prstGeom prst="rect">
-            <a:avLst/>
-          </a:prstGeom>
-          <a:noFill/>
-          <a:ln/>
-        </p:spPr>
-        <p:txBody>
-          <a:bodyPr wrap="square" lIns="0" tIns="0" rIns="0" bIns="0" rtlCol="0" anchor="ctr"/>
-          <a:lstStyle/>
-          <a:p>
-            <a:pPr marL="0" indent="0" algn="r">
-              <a:buNone/>
-            </a:pPr>
-            <a:r>
-              <a:rPr lang="en-US" sz="1100" dirty="0">
-                <a:solidFill>
-                  <a:srgbClr val="6B7280"/>
-                </a:solidFill>
-                <a:latin typeface="Calibri" pitchFamily="34" charset="0"/>
-                <a:ea typeface="Calibri" pitchFamily="34" charset="-122"/>
-                <a:cs typeface="Calibri" pitchFamily="34" charset="-120"/>
-              </a:rPr>
-              <a:t>08</a:t>
-            </a:r>
-            <a:endParaRPr lang="en-US" sz="1100" dirty="0"/>
-          </a:p>
-        </p:txBody>
-      </p:sp>
-    </p:spTree>
-  </p:cSld>
-  <p:clrMapOvr>
-    <a:masterClrMapping/>
-  </p:clrMapOvr>
-</p:sld>
-</file>
-
-<file path=ppt/slides/slide9.xml><?xml version="1.0" encoding="utf-8"?>
-<p:sld xmlns:a="http://schemas.openxmlformats.org/drawingml/2006/main" xmlns:r="http://schemas.openxmlformats.org/officeDocument/2006/relationships" xmlns:p="http://schemas.openxmlformats.org/presentationml/2006/main">
-  <p:cSld name="Slide 9">
-    <p:bg>
-      <p:bgPr>
-        <a:solidFill>
-          <a:srgbClr val="F4F5FB"/>
-        </a:solidFill>
-        <a:effectLst/>
-      </p:bgPr>
-    </p:bg>
-    <p:spTree>
-      <p:nvGrpSpPr>
-        <p:cNvPr id="1" name=""/>
-        <p:cNvGrpSpPr/>
-        <p:nvPr/>
-      </p:nvGrpSpPr>
-      <p:grpSpPr>
-        <a:xfrm>
-          <a:off x="0" y="0"/>
-          <a:ext cx="0" cy="0"/>
-          <a:chOff x="0" y="0"/>
-          <a:chExt cx="0" cy="0"/>
-        </a:xfrm>
-      </p:grpSpPr>
-      <p:sp>
-        <p:nvSpPr>
-          <p:cNvPr id="2" name="Text 0"/>
-          <p:cNvSpPr/>
-          <p:nvPr/>
-        </p:nvSpPr>
-        <p:spPr>
-          <a:xfrm>
-            <a:off x="548640" y="384048"/>
-            <a:ext cx="10972800" cy="274320"/>
-          </a:xfrm>
-          <a:prstGeom prst="rect">
-            <a:avLst/>
-          </a:prstGeom>
-          <a:noFill/>
-          <a:ln/>
-        </p:spPr>
-        <p:txBody>
-          <a:bodyPr wrap="square" lIns="0" tIns="0" rIns="0" bIns="0" rtlCol="0" anchor="ctr"/>
-          <a:lstStyle/>
-          <a:p>
-            <a:pPr marL="0" indent="0">
-              <a:buNone/>
-            </a:pPr>
-            <a:r>
-              <a:rPr lang="en-US" sz="1200" b="1" kern="0" spc="300" dirty="0">
-                <a:solidFill>
-                  <a:srgbClr val="6C63FF"/>
-                </a:solidFill>
-                <a:latin typeface="Calibri" pitchFamily="34" charset="0"/>
-                <a:ea typeface="Calibri" pitchFamily="34" charset="-122"/>
-                <a:cs typeface="Calibri" pitchFamily="34" charset="-120"/>
-              </a:rPr>
-              <a:t>INDUSTRIALISATION</a:t>
-            </a:r>
-            <a:endParaRPr lang="en-US" sz="1200" dirty="0"/>
-          </a:p>
-        </p:txBody>
-      </p:sp>
-      <p:sp>
-        <p:nvSpPr>
-          <p:cNvPr id="3" name="Text 1"/>
-          <p:cNvSpPr/>
-          <p:nvPr/>
-        </p:nvSpPr>
-        <p:spPr>
-          <a:xfrm>
-            <a:off x="548640" y="640080"/>
-            <a:ext cx="11064240" cy="640080"/>
-          </a:xfrm>
-          <a:prstGeom prst="rect">
-            <a:avLst/>
-          </a:prstGeom>
-          <a:noFill/>
-          <a:ln/>
-        </p:spPr>
-        <p:txBody>
-          <a:bodyPr wrap="square" lIns="0" tIns="0" rIns="0" bIns="0" rtlCol="0" anchor="ctr"/>
-          <a:lstStyle/>
-          <a:p>
-            <a:pPr marL="0" indent="0">
-              <a:buNone/>
-            </a:pPr>
-            <a:r>
-              <a:rPr lang="en-US" sz="3000" b="1" dirty="0">
-                <a:solidFill>
-                  <a:srgbClr val="1A1F36"/>
-                </a:solidFill>
-                <a:latin typeface="Georgia" pitchFamily="34" charset="0"/>
-                <a:ea typeface="Georgia" pitchFamily="34" charset="-122"/>
-                <a:cs typeface="Georgia" pitchFamily="34" charset="-120"/>
-              </a:rPr>
-              <a:t>Du PoC local à la cible cloud</a:t>
-            </a:r>
-            <a:endParaRPr lang="en-US" sz="3000" dirty="0"/>
-          </a:p>
-        </p:txBody>
-      </p:sp>
-      <p:sp>
-        <p:nvSpPr>
-          <p:cNvPr id="4" name="Shape 2"/>
-          <p:cNvSpPr/>
-          <p:nvPr/>
-        </p:nvSpPr>
-        <p:spPr>
-          <a:xfrm>
-            <a:off x="548640" y="1508760"/>
-            <a:ext cx="5394960" cy="4526280"/>
-          </a:xfrm>
-          <a:prstGeom prst="rect">
-            <a:avLst/>
-          </a:prstGeom>
-          <a:solidFill>
-            <a:srgbClr val="FFFFFF"/>
-          </a:solidFill>
-          <a:ln w="12700">
-            <a:solidFill>
-              <a:srgbClr val="E3E5F0"/>
-            </a:solidFill>
-            <a:prstDash val="solid"/>
-          </a:ln>
-          <a:effectLst>
-            <a:outerShdw blurRad="114300" dist="38100" dir="8100000" algn="bl" rotWithShape="0">
-              <a:srgbClr val="000000">
-                <a:alpha val="16000"/>
-              </a:srgbClr>
-            </a:outerShdw>
-          </a:effectLst>
-        </p:spPr>
-      </p:sp>
-      <p:sp>
-        <p:nvSpPr>
-          <p:cNvPr id="5" name="Shape 3"/>
-          <p:cNvSpPr/>
-          <p:nvPr/>
-        </p:nvSpPr>
-        <p:spPr>
-          <a:xfrm>
-            <a:off x="548640" y="1508760"/>
-            <a:ext cx="5394960" cy="868680"/>
-          </a:xfrm>
-          <a:prstGeom prst="rect">
-            <a:avLst/>
-          </a:prstGeom>
-          <a:solidFill>
-            <a:srgbClr val="1D9E75"/>
-          </a:solidFill>
-          <a:ln/>
-        </p:spPr>
-      </p:sp>
-      <p:pic>
-        <p:nvPicPr>
-          <p:cNvPr id="6" name="Image 0" descr="preencoded.png"/>
-          <p:cNvPicPr>
-            <a:picLocks noChangeAspect="1"/>
-          </p:cNvPicPr>
-          <p:nvPr/>
-        </p:nvPicPr>
-        <p:blipFill>
-          <a:blip r:embed="rId3"/>
-          <a:stretch>
-            <a:fillRect/>
-          </a:stretch>
-        </p:blipFill>
-        <p:spPr>
-          <a:xfrm>
-            <a:off x="868680" y="1691640"/>
-            <a:ext cx="502920" cy="502920"/>
-          </a:xfrm>
-          <a:prstGeom prst="rect">
-            <a:avLst/>
-          </a:prstGeom>
-        </p:spPr>
-      </p:pic>
-      <p:sp>
-        <p:nvSpPr>
-          <p:cNvPr id="7" name="Text 4"/>
-          <p:cNvSpPr/>
-          <p:nvPr/>
-        </p:nvSpPr>
-        <p:spPr>
-          <a:xfrm>
-            <a:off x="1508760" y="1664208"/>
-            <a:ext cx="4297680" cy="320040"/>
-          </a:xfrm>
-          <a:prstGeom prst="rect">
-            <a:avLst/>
-          </a:prstGeom>
-          <a:noFill/>
-          <a:ln/>
-        </p:spPr>
-        <p:txBody>
-          <a:bodyPr wrap="square" lIns="0" tIns="0" rIns="0" bIns="0" rtlCol="0" anchor="ctr"/>
-          <a:lstStyle/>
-          <a:p>
-            <a:pPr marL="0" indent="0">
-              <a:buNone/>
-            </a:pPr>
-            <a:r>
-              <a:rPr lang="en-US" sz="1400" b="1" kern="0" spc="100" dirty="0">
-                <a:solidFill>
-                  <a:srgbClr val="FFFFFF"/>
-                </a:solidFill>
-                <a:latin typeface="Calibri" pitchFamily="34" charset="0"/>
-                <a:ea typeface="Calibri" pitchFamily="34" charset="-122"/>
-                <a:cs typeface="Calibri" pitchFamily="34" charset="-120"/>
-              </a:rPr>
-              <a:t>PoC FONCTIONNEL</a:t>
-            </a:r>
-            <a:endParaRPr lang="en-US" sz="1400" dirty="0"/>
-          </a:p>
-        </p:txBody>
-      </p:sp>
-      <p:sp>
-        <p:nvSpPr>
-          <p:cNvPr id="8" name="Text 5"/>
-          <p:cNvSpPr/>
-          <p:nvPr/>
-        </p:nvSpPr>
-        <p:spPr>
-          <a:xfrm>
-            <a:off x="1508760" y="1965960"/>
-            <a:ext cx="4297680" cy="320040"/>
-          </a:xfrm>
-          <a:prstGeom prst="rect">
-            <a:avLst/>
-          </a:prstGeom>
-          <a:noFill/>
-          <a:ln/>
-        </p:spPr>
-        <p:txBody>
-          <a:bodyPr wrap="square" lIns="0" tIns="0" rIns="0" bIns="0" rtlCol="0" anchor="ctr"/>
-          <a:lstStyle/>
-          <a:p>
-            <a:pPr marL="0" indent="0">
-              <a:buNone/>
-            </a:pPr>
-            <a:r>
-              <a:rPr lang="en-US" sz="1200" dirty="0">
-                <a:solidFill>
-                  <a:srgbClr val="EAF0FA"/>
-                </a:solidFill>
-                <a:latin typeface="Calibri" pitchFamily="34" charset="0"/>
-                <a:ea typeface="Calibri" pitchFamily="34" charset="-122"/>
-                <a:cs typeface="Calibri" pitchFamily="34" charset="-120"/>
-              </a:rPr>
-              <a:t>Machine personnelle · Docker Compose</a:t>
-            </a:r>
-            <a:endParaRPr lang="en-US" sz="1200" dirty="0"/>
-          </a:p>
-        </p:txBody>
-      </p:sp>
-      <p:sp>
-        <p:nvSpPr>
-          <p:cNvPr id="9" name="Text 6"/>
-          <p:cNvSpPr/>
-          <p:nvPr/>
-        </p:nvSpPr>
-        <p:spPr>
-          <a:xfrm>
-            <a:off x="914400" y="2697480"/>
-            <a:ext cx="4709160" cy="3154680"/>
-          </a:xfrm>
-          <a:prstGeom prst="rect">
-            <a:avLst/>
-          </a:prstGeom>
-          <a:noFill/>
-          <a:ln/>
-        </p:spPr>
-        <p:txBody>
-          <a:bodyPr wrap="square" lIns="0" tIns="0" rIns="0" bIns="0" rtlCol="0" anchor="t"/>
-          <a:lstStyle/>
-          <a:p>
-            <a:pPr marL="342900" indent="-342900">
-              <a:spcAft>
-                <a:spcPts val="1600"/>
-              </a:spcAft>
-              <a:buSzPct val="100000"/>
-              <a:buChar char="•"/>
-            </a:pPr>
-            <a:r>
-              <a:rPr lang="en-US" sz="1500" dirty="0">
-                <a:solidFill>
-                  <a:srgbClr val="1A1F36"/>
-                </a:solidFill>
-                <a:latin typeface="Calibri" pitchFamily="34" charset="0"/>
-                <a:ea typeface="Calibri" pitchFamily="34" charset="-122"/>
-                <a:cs typeface="Calibri" pitchFamily="34" charset="-120"/>
-              </a:rPr>
-              <a:t>Chaîne complète qui tourne réellement</a:t>
-            </a:r>
-            <a:endParaRPr lang="en-US" sz="1500" dirty="0"/>
-          </a:p>
-          <a:p>
-            <a:pPr marL="342900" indent="-342900">
-              <a:spcAft>
-                <a:spcPts val="1600"/>
-              </a:spcAft>
-              <a:buSzPct val="100000"/>
-              <a:buChar char="•"/>
-            </a:pPr>
-            <a:r>
-              <a:rPr lang="en-US" sz="1500" dirty="0">
-                <a:solidFill>
-                  <a:srgbClr val="1A1F36"/>
-                </a:solidFill>
-                <a:latin typeface="Calibri" pitchFamily="34" charset="0"/>
-                <a:ea typeface="Calibri" pitchFamily="34" charset="-122"/>
-                <a:cs typeface="Calibri" pitchFamily="34" charset="-120"/>
-              </a:rPr>
-              <a:t>PostgreSQL · Kafka · Debezium · Flink · Redis · MongoDB</a:t>
-            </a:r>
-            <a:endParaRPr lang="en-US" sz="1500" dirty="0"/>
-          </a:p>
-          <a:p>
-            <a:pPr marL="342900" indent="-342900">
-              <a:spcAft>
-                <a:spcPts val="1600"/>
-              </a:spcAft>
-              <a:buSzPct val="100000"/>
-              <a:buChar char="•"/>
-            </a:pPr>
-            <a:r>
-              <a:rPr lang="en-US" sz="1500" dirty="0">
-                <a:solidFill>
-                  <a:srgbClr val="1A1F36"/>
-                </a:solidFill>
-                <a:latin typeface="Calibri" pitchFamily="34" charset="0"/>
-                <a:ea typeface="Calibri" pitchFamily="34" charset="-122"/>
-                <a:cs typeface="Calibri" pitchFamily="34" charset="-120"/>
-              </a:rPr>
-              <a:t>Producteur ~5 tx/s, dashboard Streamlit</a:t>
-            </a:r>
-            <a:endParaRPr lang="en-US" sz="1500" dirty="0"/>
-          </a:p>
-          <a:p>
-            <a:pPr marL="342900" indent="-342900">
-              <a:spcAft>
-                <a:spcPts val="1600"/>
-              </a:spcAft>
-              <a:buSzPct val="100000"/>
-              <a:buChar char="•"/>
-            </a:pPr>
-            <a:r>
-              <a:rPr lang="en-US" sz="1500" dirty="0">
-                <a:solidFill>
-                  <a:srgbClr val="1A1F36"/>
-                </a:solidFill>
-                <a:latin typeface="Calibri" pitchFamily="34" charset="0"/>
-                <a:ea typeface="Calibri" pitchFamily="34" charset="-122"/>
-                <a:cs typeface="Calibri" pitchFamily="34" charset="-120"/>
-              </a:rPr>
-              <a:t>Coût quasi nul — contrainte budget assumée</a:t>
-            </a:r>
-            <a:endParaRPr lang="en-US" sz="1500" dirty="0"/>
-          </a:p>
-        </p:txBody>
-      </p:sp>
-      <p:sp>
-        <p:nvSpPr>
-          <p:cNvPr id="10" name="Shape 7"/>
-          <p:cNvSpPr/>
-          <p:nvPr/>
-        </p:nvSpPr>
-        <p:spPr>
-          <a:xfrm>
-            <a:off x="6172200" y="1508760"/>
-            <a:ext cx="5394960" cy="4526280"/>
-          </a:xfrm>
-          <a:prstGeom prst="rect">
-            <a:avLst/>
-          </a:prstGeom>
-          <a:solidFill>
-            <a:srgbClr val="FFFFFF"/>
-          </a:solidFill>
-          <a:ln w="12700">
-            <a:solidFill>
-              <a:srgbClr val="E3E5F0"/>
-            </a:solidFill>
-            <a:prstDash val="solid"/>
-          </a:ln>
-          <a:effectLst>
-            <a:outerShdw blurRad="114300" dist="38100" dir="8100000" algn="bl" rotWithShape="0">
-              <a:srgbClr val="000000">
-                <a:alpha val="16000"/>
-              </a:srgbClr>
-            </a:outerShdw>
-          </a:effectLst>
-        </p:spPr>
-      </p:sp>
-      <p:sp>
-        <p:nvSpPr>
-          <p:cNvPr id="11" name="Shape 8"/>
-          <p:cNvSpPr/>
-          <p:nvPr/>
-        </p:nvSpPr>
-        <p:spPr>
-          <a:xfrm>
-            <a:off x="6172200" y="1508760"/>
-            <a:ext cx="5394960" cy="868680"/>
-          </a:xfrm>
-          <a:prstGeom prst="rect">
-            <a:avLst/>
-          </a:prstGeom>
-          <a:solidFill>
-            <a:srgbClr val="2F7BD6"/>
-          </a:solidFill>
-          <a:ln/>
-        </p:spPr>
-      </p:sp>
-      <p:pic>
-        <p:nvPicPr>
-          <p:cNvPr id="12" name="Image 1" descr="preencoded.png"/>
-          <p:cNvPicPr>
-            <a:picLocks noChangeAspect="1"/>
-          </p:cNvPicPr>
-          <p:nvPr/>
-        </p:nvPicPr>
-        <p:blipFill>
-          <a:blip r:embed="rId4"/>
-          <a:stretch>
-            <a:fillRect/>
-          </a:stretch>
-        </p:blipFill>
-        <p:spPr>
-          <a:xfrm>
-            <a:off x="6492240" y="1691640"/>
-            <a:ext cx="502920" cy="502920"/>
-          </a:xfrm>
-          <a:prstGeom prst="rect">
-            <a:avLst/>
-          </a:prstGeom>
-        </p:spPr>
-      </p:pic>
-      <p:sp>
-        <p:nvSpPr>
-          <p:cNvPr id="13" name="Text 9"/>
-          <p:cNvSpPr/>
-          <p:nvPr/>
-        </p:nvSpPr>
-        <p:spPr>
-          <a:xfrm>
-            <a:off x="7132320" y="1664208"/>
-            <a:ext cx="4297680" cy="320040"/>
-          </a:xfrm>
-          <a:prstGeom prst="rect">
-            <a:avLst/>
-          </a:prstGeom>
-          <a:noFill/>
-          <a:ln/>
-        </p:spPr>
-        <p:txBody>
-          <a:bodyPr wrap="square" lIns="0" tIns="0" rIns="0" bIns="0" rtlCol="0" anchor="ctr"/>
-          <a:lstStyle/>
-          <a:p>
-            <a:pPr marL="0" indent="0">
-              <a:buNone/>
-            </a:pPr>
-            <a:r>
-              <a:rPr lang="en-US" sz="1400" b="1" kern="0" spc="100" dirty="0">
-                <a:solidFill>
-                  <a:srgbClr val="FFFFFF"/>
-                </a:solidFill>
-                <a:latin typeface="Calibri" pitchFamily="34" charset="0"/>
-                <a:ea typeface="Calibri" pitchFamily="34" charset="-122"/>
-                <a:cs typeface="Calibri" pitchFamily="34" charset="-120"/>
-              </a:rPr>
-              <a:t>CIBLE INDUSTRIALISÉE</a:t>
-            </a:r>
-            <a:endParaRPr lang="en-US" sz="1400" dirty="0"/>
-          </a:p>
-        </p:txBody>
-      </p:sp>
-      <p:sp>
-        <p:nvSpPr>
-          <p:cNvPr id="14" name="Text 10"/>
-          <p:cNvSpPr/>
-          <p:nvPr/>
-        </p:nvSpPr>
-        <p:spPr>
-          <a:xfrm>
-            <a:off x="7132320" y="1965960"/>
-            <a:ext cx="4297680" cy="320040"/>
-          </a:xfrm>
-          <a:prstGeom prst="rect">
-            <a:avLst/>
-          </a:prstGeom>
-          <a:noFill/>
-          <a:ln/>
-        </p:spPr>
-        <p:txBody>
-          <a:bodyPr wrap="square" lIns="0" tIns="0" rIns="0" bIns="0" rtlCol="0" anchor="ctr"/>
-          <a:lstStyle/>
-          <a:p>
-            <a:pPr marL="0" indent="0">
-              <a:buNone/>
-            </a:pPr>
-            <a:r>
-              <a:rPr lang="en-US" sz="1200" dirty="0">
-                <a:solidFill>
-                  <a:srgbClr val="EAF0FA"/>
-                </a:solidFill>
-                <a:latin typeface="Calibri" pitchFamily="34" charset="0"/>
-                <a:ea typeface="Calibri" pitchFamily="34" charset="-122"/>
-                <a:cs typeface="Calibri" pitchFamily="34" charset="-120"/>
-              </a:rPr>
-              <a:t>AWS managé · Terraform (IaC)</a:t>
-            </a:r>
-            <a:endParaRPr lang="en-US" sz="1200" dirty="0"/>
-          </a:p>
-        </p:txBody>
-      </p:sp>
-      <p:sp>
-        <p:nvSpPr>
-          <p:cNvPr id="15" name="Text 11"/>
-          <p:cNvSpPr/>
-          <p:nvPr/>
-        </p:nvSpPr>
-        <p:spPr>
-          <a:xfrm>
-            <a:off x="6537960" y="2697480"/>
-            <a:ext cx="4709160" cy="3154680"/>
-          </a:xfrm>
-          <a:prstGeom prst="rect">
-            <a:avLst/>
-          </a:prstGeom>
-          <a:noFill/>
-          <a:ln/>
-        </p:spPr>
-        <p:txBody>
-          <a:bodyPr wrap="square" lIns="0" tIns="0" rIns="0" bIns="0" rtlCol="0" anchor="t"/>
-          <a:lstStyle/>
-          <a:p>
-            <a:pPr marL="342900" indent="-342900">
-              <a:spcAft>
-                <a:spcPts val="1600"/>
-              </a:spcAft>
-              <a:buSzPct val="100000"/>
-              <a:buChar char="•"/>
-            </a:pPr>
-            <a:r>
-              <a:rPr lang="en-US" sz="1500" dirty="0">
-                <a:solidFill>
-                  <a:srgbClr val="1A1F36"/>
-                </a:solidFill>
-                <a:latin typeface="Calibri" pitchFamily="34" charset="0"/>
-                <a:ea typeface="Calibri" pitchFamily="34" charset="-122"/>
-                <a:cs typeface="Calibri" pitchFamily="34" charset="-120"/>
-              </a:rPr>
-              <a:t>RDS Multi-AZ · MSK · ElastiCache · Atlas</a:t>
-            </a:r>
-            <a:endParaRPr lang="en-US" sz="1500" dirty="0"/>
-          </a:p>
-          <a:p>
-            <a:pPr marL="342900" indent="-342900">
-              <a:spcAft>
-                <a:spcPts val="1600"/>
-              </a:spcAft>
-              <a:buSzPct val="100000"/>
-              <a:buChar char="•"/>
-            </a:pPr>
-            <a:r>
-              <a:rPr lang="en-US" sz="1500" dirty="0">
-                <a:solidFill>
-                  <a:srgbClr val="1A1F36"/>
-                </a:solidFill>
-                <a:latin typeface="Calibri" pitchFamily="34" charset="0"/>
-                <a:ea typeface="Calibri" pitchFamily="34" charset="-122"/>
-                <a:cs typeface="Calibri" pitchFamily="34" charset="-120"/>
-              </a:rPr>
-              <a:t>Managed Flink · MWAA · Snowflake · SageMaker</a:t>
-            </a:r>
-            <a:endParaRPr lang="en-US" sz="1500" dirty="0"/>
-          </a:p>
-          <a:p>
-            <a:pPr marL="342900" indent="-342900">
-              <a:spcAft>
-                <a:spcPts val="1600"/>
-              </a:spcAft>
-              <a:buSzPct val="100000"/>
-              <a:buChar char="•"/>
-            </a:pPr>
-            <a:r>
-              <a:rPr lang="en-US" sz="1500" dirty="0">
-                <a:solidFill>
-                  <a:srgbClr val="1A1F36"/>
-                </a:solidFill>
-                <a:latin typeface="Calibri" pitchFamily="34" charset="0"/>
-                <a:ea typeface="Calibri" pitchFamily="34" charset="-122"/>
-                <a:cs typeface="Calibri" pitchFamily="34" charset="-120"/>
-              </a:rPr>
-              <a:t>Sécurité KMS/IAM/Secrets · PCI-DSS / RGPD</a:t>
-            </a:r>
-            <a:endParaRPr lang="en-US" sz="1500" dirty="0"/>
-          </a:p>
-          <a:p>
-            <a:pPr marL="342900" indent="-342900">
-              <a:spcAft>
-                <a:spcPts val="1600"/>
-              </a:spcAft>
-              <a:buSzPct val="100000"/>
-              <a:buChar char="•"/>
-            </a:pPr>
-            <a:r>
-              <a:rPr lang="en-US" sz="1500" dirty="0">
-                <a:solidFill>
-                  <a:srgbClr val="1A1F36"/>
-                </a:solidFill>
-                <a:latin typeface="Calibri" pitchFamily="34" charset="0"/>
-                <a:ea typeface="Calibri" pitchFamily="34" charset="-122"/>
-                <a:cs typeface="Calibri" pitchFamily="34" charset="-120"/>
-              </a:rPr>
-              <a:t>Résilience multi-AZ · FinOps / GreenOps</a:t>
-            </a:r>
-            <a:endParaRPr lang="en-US" sz="1500" dirty="0"/>
-          </a:p>
-        </p:txBody>
-      </p:sp>
-      <p:sp>
-        <p:nvSpPr>
-          <p:cNvPr id="16" name="Text 12"/>
-          <p:cNvSpPr/>
-          <p:nvPr/>
-        </p:nvSpPr>
-        <p:spPr>
-          <a:xfrm>
-            <a:off x="548640" y="6172200"/>
-            <a:ext cx="11064240" cy="365760"/>
-          </a:xfrm>
-          <a:prstGeom prst="rect">
-            <a:avLst/>
-          </a:prstGeom>
-          <a:noFill/>
-          <a:ln/>
-        </p:spPr>
-        <p:txBody>
-          <a:bodyPr wrap="square" lIns="0" tIns="0" rIns="0" bIns="0" rtlCol="0" anchor="ctr"/>
-          <a:lstStyle/>
-          <a:p>
-            <a:pPr marL="0" indent="0" algn="ctr">
-              <a:buNone/>
-            </a:pPr>
-            <a:r>
-              <a:rPr lang="en-US" sz="1300" i="1" dirty="0">
-                <a:solidFill>
-                  <a:srgbClr val="6B7280"/>
-                </a:solidFill>
-                <a:latin typeface="Calibri" pitchFamily="34" charset="0"/>
-                <a:ea typeface="Calibri" pitchFamily="34" charset="-122"/>
-                <a:cs typeface="Calibri" pitchFamily="34" charset="-120"/>
-              </a:rPr>
-              <a:t>Même architecture logique — on substitue les composants, la logique ne change pas.</a:t>
-            </a:r>
-            <a:endParaRPr lang="en-US" sz="1300" dirty="0"/>
-          </a:p>
-        </p:txBody>
-      </p:sp>
-      <p:sp>
-        <p:nvSpPr>
-          <p:cNvPr id="17" name="Text 13"/>
-          <p:cNvSpPr/>
-          <p:nvPr/>
-        </p:nvSpPr>
-        <p:spPr>
-          <a:xfrm>
-            <a:off x="11430000" y="6355080"/>
-            <a:ext cx="548640" cy="274320"/>
-          </a:xfrm>
-          <a:prstGeom prst="rect">
-            <a:avLst/>
-          </a:prstGeom>
-          <a:noFill/>
-          <a:ln/>
-        </p:spPr>
-        <p:txBody>
-          <a:bodyPr wrap="square" lIns="0" tIns="0" rIns="0" bIns="0" rtlCol="0" anchor="ctr"/>
-          <a:lstStyle/>
-          <a:p>
-            <a:pPr marL="0" indent="0" algn="r">
-              <a:buNone/>
-            </a:pPr>
-            <a:r>
-              <a:rPr lang="en-US" sz="1100" dirty="0">
-                <a:solidFill>
-                  <a:srgbClr val="6B7280"/>
-                </a:solidFill>
-                <a:latin typeface="Calibri" pitchFamily="34" charset="0"/>
-                <a:ea typeface="Calibri" pitchFamily="34" charset="-122"/>
-                <a:cs typeface="Calibri" pitchFamily="34" charset="-120"/>
-              </a:rPr>
-              <a:t>09</a:t>
             </a:r>
             <a:endParaRPr lang="en-US" sz="1100" dirty="0"/>
           </a:p>
@@ -9571,4 +10302,26 @@
     </a:ext>
   </a:extLst>
 </a:theme>
+</file>
+
+<file path=ppt/webextensions/taskpanes.xml><?xml version="1.0" encoding="utf-8"?>
+<wetp:taskpanes xmlns:wetp="http://schemas.microsoft.com/office/webextensions/taskpanes/2010/11">
+  <wetp:taskpane dockstate="right" visibility="0" width="350" row="0">
+    <wetp:webextensionref xmlns:r="http://schemas.openxmlformats.org/officeDocument/2006/relationships" r:id="rId1"/>
+  </wetp:taskpane>
+</wetp:taskpanes>
+</file>
+
+<file path=ppt/webextensions/webextension1.xml><?xml version="1.0" encoding="utf-8"?>
+<we:webextension xmlns:we="http://schemas.microsoft.com/office/webextensions/webextension/2010/11" id="{F1C46026-3C79-5949-8581-8142011F10E5}">
+  <we:reference id="wa200010001" version="1.0.0.1" store="fr-FR" storeType="OMEX"/>
+  <we:alternateReferences>
+    <we:reference id="wa200010001" version="1.0.0.1" store="wa200010001" storeType="OMEX"/>
+  </we:alternateReferences>
+  <we:properties>
+    <we:property name="claude.fileId" value="&quot;bce9307d-2c5d-4c8e-92d3-f1b803c28956&quot;"/>
+  </we:properties>
+  <we:bindings/>
+  <we:snapshot xmlns:r="http://schemas.openxmlformats.org/officeDocument/2006/relationships"/>
+</we:webextension>
 </file>
--- a/presentation/stripe_presentation_bloc2.pptx
+++ b/presentation/stripe_presentation_bloc2.pptx
@@ -20,6 +20,7 @@
     <p:sldId id="274" r:id="rId19"/>
     <p:sldId id="263" r:id="rId11"/>
     <p:sldId id="271" r:id="rId12"/>
+    <p:sldId id="276" r:id="rId21"/>
     <p:sldId id="265" r:id="rId13"/>
     <p:sldId id="275" r:id="rId20"/>
   </p:sldIdLst>
@@ -2445,7 +2446,7 @@
                 <a:ea typeface="Calibri" pitchFamily="34" charset="-122"/>
                 <a:cs typeface="Calibri" pitchFamily="34" charset="-120"/>
               </a:rPr>
-              <a:t>Evidently suit la dérive · test offline : précision 0,95 · rappel 0,97</a:t>
+              <a:t>Evidently suit la dérive · servi : précision 0,93 · rappel 0,96</a:t>
             </a:r>
             <a:endParaRPr lang="en-US" sz="1500" dirty="0"/>
           </a:p>
@@ -3037,7 +3038,7 @@
                 <a:ea typeface="Calibri" pitchFamily="34" charset="-122"/>
                 <a:cs typeface="Calibri" pitchFamily="34" charset="-120"/>
               </a:rPr>
-              <a:t>AWS managé · IaC Terraform (cible)</a:t>
+              <a:t>AWS managé · Terraform validé en CI</a:t>
             </a:r>
             <a:endParaRPr lang="en-US" sz="1200" dirty="0"/>
           </a:p>
@@ -3101,7 +3102,7 @@
                 <a:ea typeface="Calibri" pitchFamily="34" charset="-122"/>
                 <a:cs typeface="Calibri" pitchFamily="34" charset="-120"/>
               </a:rPr>
-              <a:t>Managed Flink · MWAA · Snowflake · SageMaker</a:t>
+              <a:t>ECS Fargate · MWAA · S3 · Snowflake</a:t>
             </a:r>
             <a:endParaRPr lang="en-US" sz="1500" dirty="0"/>
           </a:p>
@@ -3143,7 +3144,7 @@
                 <a:ea typeface="Calibri" pitchFamily="34" charset="-122"/>
                 <a:cs typeface="Calibri" pitchFamily="34" charset="-120"/>
               </a:rPr>
-              <a:t>Résilience multi-AZ · FinOps / GreenOps</a:t>
+              <a:t>Multi-AZ · FinOps chiffré (~3 100 $/mois)</a:t>
             </a:r>
             <a:endParaRPr lang="en-US" sz="1500" dirty="0"/>
           </a:p>
@@ -3616,7 +3617,7 @@
                 <a:ea typeface="Calibri" pitchFamily="34" charset="-122"/>
                 <a:cs typeface="Calibri" pitchFamily="34" charset="-120"/>
               </a:rPr>
-              <a:t>PoC local testé en CI → cible cloud AWS managée</a:t>
+              <a:t>PoC testé en CI → cible AWS écrite en Terraform</a:t>
             </a:r>
             <a:endParaRPr lang="en-US" sz="1650" dirty="0"/>
           </a:p>
@@ -3843,6 +3844,100 @@
           <a:xfrm>
             <a:off x="461353" y="380000"/>
             <a:ext cx="11269293" cy="6098000"/>
+          </a:xfrm>
+          <a:prstGeom prst="rect">
+            <a:avLst/>
+          </a:prstGeom>
+        </p:spPr>
+      </p:pic>
+    </p:spTree>
+  </p:cSld>
+  <p:clrMapOvr>
+    <a:masterClrMapping/>
+  </p:clrMapOvr>
+</p:sld>
+</file>
+
+<file path=ppt/slides/slide15.xml><?xml version="1.0" encoding="utf-8"?>
+<p:sld xmlns:a="http://schemas.openxmlformats.org/drawingml/2006/main" xmlns:r="http://schemas.openxmlformats.org/officeDocument/2006/relationships" xmlns:p="http://schemas.openxmlformats.org/presentationml/2006/main">
+  <p:cSld>
+    <p:spTree>
+      <p:nvGrpSpPr>
+        <p:cNvPr id="1" name=""/>
+        <p:cNvGrpSpPr/>
+        <p:nvPr/>
+      </p:nvGrpSpPr>
+      <p:grpSpPr>
+        <a:xfrm>
+          <a:off x="0" y="0"/>
+          <a:ext cx="0" cy="0"/>
+          <a:chOff x="0" y="0"/>
+          <a:chExt cx="0" cy="0"/>
+        </a:xfrm>
+      </p:grpSpPr>
+      <p:sp>
+        <p:nvSpPr>
+          <p:cNvPr id="2" name="Rectangle 1"/>
+          <p:cNvSpPr/>
+          <p:nvPr/>
+        </p:nvSpPr>
+        <p:spPr>
+          <a:xfrm>
+            <a:off x="0" y="0"/>
+            <a:ext cx="12192000" cy="6858000"/>
+          </a:xfrm>
+          <a:prstGeom prst="rect">
+            <a:avLst/>
+          </a:prstGeom>
+          <a:solidFill>
+            <a:srgbClr val="FFFFFF"/>
+          </a:solidFill>
+          <a:ln>
+            <a:noFill/>
+          </a:ln>
+          <a:effectLst/>
+        </p:spPr>
+        <p:style>
+          <a:lnRef idx="1">
+            <a:schemeClr val="accent1"/>
+          </a:lnRef>
+          <a:fillRef idx="3">
+            <a:schemeClr val="accent1"/>
+          </a:fillRef>
+          <a:effectRef idx="2">
+            <a:schemeClr val="accent1"/>
+          </a:effectRef>
+          <a:fontRef idx="minor">
+            <a:schemeClr val="lt1"/>
+          </a:fontRef>
+        </p:style>
+        <p:txBody>
+          <a:bodyPr rtlCol="0" anchor="ctr"/>
+          <a:lstStyle/>
+          <a:p>
+            <a:pPr algn="ctr"/>
+            <a:endParaRPr/>
+          </a:p>
+        </p:txBody>
+      </p:sp>
+      <p:pic>
+        <p:nvPicPr>
+          <p:cNvPr id="3" name="Picture 2" descr="stripe_aws_cible.png"/>
+          <p:cNvPicPr>
+            <a:picLocks noChangeAspect="1"/>
+          </p:cNvPicPr>
+          <p:nvPr/>
+        </p:nvPicPr>
+        <p:blipFill>
+          <a:blip r:embed="rId2"/>
+          <a:stretch>
+            <a:fillRect/>
+          </a:stretch>
+        </p:blipFill>
+        <p:spPr>
+          <a:xfrm>
+            <a:off x="1409168" y="380000"/>
+            <a:ext cx="9373664" cy="6098000"/>
           </a:xfrm>
           <a:prstGeom prst="rect">
             <a:avLst/>

--- a/presentation/stripe_presentation_bloc2.pptx
+++ b/presentation/stripe_presentation_bloc2.pptx
@@ -2764,7 +2764,7 @@
                 <a:ea typeface="Calibri" pitchFamily="34" charset="-122"/>
                 <a:cs typeface="Calibri" pitchFamily="34" charset="-120"/>
               </a:rPr>
-              <a:t>Machine personnelle · Docker Compose</a:t>
+              <a:t>Docker Compose · localhost:8501 · admin / Bloc2-Demo-2026</a:t>
             </a:r>
             <a:endParaRPr lang="en-US" sz="1200" dirty="0"/>
           </a:p>
@@ -3748,8 +3748,8 @@
         </p:blipFill>
         <p:spPr>
           <a:xfrm>
-            <a:off x="380000" y="851780"/>
-            <a:ext cx="11432000" cy="5154439"/>
+            <a:off x="802619" y="380000"/>
+            <a:ext cx="10586761" cy="6098000"/>
           </a:xfrm>
           <a:prstGeom prst="rect">
             <a:avLst/>
@@ -3842,8 +3842,8 @@
         </p:blipFill>
         <p:spPr>
           <a:xfrm>
-            <a:off x="461353" y="380000"/>
-            <a:ext cx="11269293" cy="6098000"/>
+            <a:off x="828552" y="380000"/>
+            <a:ext cx="10534896" cy="6098000"/>
           </a:xfrm>
           <a:prstGeom prst="rect">
             <a:avLst/>
@@ -5701,8 +5701,8 @@
         </p:blipFill>
         <p:spPr>
           <a:xfrm>
-            <a:off x="1597883" y="380000"/>
-            <a:ext cx="8996233" cy="6098000"/>
+            <a:off x="1620920" y="380000"/>
+            <a:ext cx="8950160" cy="6098000"/>
           </a:xfrm>
           <a:prstGeom prst="rect">
             <a:avLst/>
@@ -8175,8 +8175,8 @@
         </p:blipFill>
         <p:spPr>
           <a:xfrm>
-            <a:off x="380000" y="669312"/>
-            <a:ext cx="11432000" cy="5519376"/>
+            <a:off x="1515802" y="380000"/>
+            <a:ext cx="9160396" cy="6098000"/>
           </a:xfrm>
           <a:prstGeom prst="rect">
             <a:avLst/>

--- a/presentation/stripe_presentation_bloc2.pptx
+++ b/presentation/stripe_presentation_bloc2.pptx
@@ -20,6 +20,7 @@
     <p:sldId id="274" r:id="rId19"/>
     <p:sldId id="263" r:id="rId11"/>
     <p:sldId id="271" r:id="rId12"/>
+    <p:sldId id="277" r:id="rId22"/>
     <p:sldId id="276" r:id="rId21"/>
     <p:sldId id="265" r:id="rId13"/>
     <p:sldId id="275" r:id="rId20"/>
@@ -3945,6 +3946,748 @@
         </p:spPr>
       </p:pic>
     </p:spTree>
+  </p:cSld>
+  <p:clrMapOvr>
+    <a:masterClrMapping/>
+  </p:clrMapOvr>
+</p:sld>
+</file>
+
+<file path=ppt/slides/slide16.xml><?xml version="1.0" encoding="utf-8"?>
+<p:sld xmlns:a="http://schemas.openxmlformats.org/drawingml/2006/main" xmlns:r="http://schemas.openxmlformats.org/officeDocument/2006/relationships" xmlns:p="http://schemas.openxmlformats.org/presentationml/2006/main">
+  <p:cSld name="Slide 9">
+    <p:bg>
+      <p:bgPr>
+        <a:solidFill>
+          <a:srgbClr val="F4F5FB"/>
+        </a:solidFill>
+        <a:effectLst/>
+      </p:bgPr>
+    </p:bg>
+    <p:spTree>
+      <p:nvGrpSpPr>
+        <p:cNvPr id="1" name=""/>
+        <p:cNvGrpSpPr/>
+        <p:nvPr/>
+      </p:nvGrpSpPr>
+      <p:grpSpPr>
+        <a:xfrm>
+          <a:off x="0" y="0"/>
+          <a:ext cx="0" cy="0"/>
+          <a:chOff x="0" y="0"/>
+          <a:chExt cx="0" cy="0"/>
+        </a:xfrm>
+      </p:grpSpPr>
+      <p:sp>
+        <p:nvSpPr>
+          <p:cNvPr id="2" name="Text 0"/>
+          <p:cNvSpPr/>
+          <p:nvPr/>
+        </p:nvSpPr>
+        <p:spPr>
+          <a:xfrm>
+            <a:off x="548640" y="330200"/>
+            <a:ext cx="10972800" cy="274320"/>
+          </a:xfrm>
+          <a:prstGeom prst="rect">
+            <a:avLst/>
+          </a:prstGeom>
+          <a:noFill/>
+          <a:ln/>
+        </p:spPr>
+        <p:txBody>
+          <a:bodyPr wrap="square" lIns="0" tIns="0" rIns="0" bIns="0" rtlCol="0" anchor="ctr"/>
+          <a:lstStyle/>
+          <a:p>
+            <a:pPr marL="0" indent="0">
+              <a:buNone/>
+            </a:pPr>
+            <a:r>
+              <a:rPr lang="en-US" sz="1200" b="1" kern="0" spc="300" dirty="0">
+                <a:solidFill>
+                  <a:srgbClr val="6C63FF"/>
+                </a:solidFill>
+                <a:latin typeface="Calibri" pitchFamily="34" charset="0"/>
+                <a:ea typeface="Calibri" pitchFamily="34" charset="-122"/>
+                <a:cs typeface="Calibri" pitchFamily="34" charset="-120"/>
+              </a:rPr>
+              <a:t>EXPLOITATION</a:t>
+            </a:r>
+            <a:endParaRPr lang="en-US" sz="1200" dirty="0"/>
+          </a:p>
+        </p:txBody>
+      </p:sp>
+      <p:sp>
+        <p:nvSpPr>
+          <p:cNvPr id="3" name="Text 1"/>
+          <p:cNvSpPr/>
+          <p:nvPr/>
+        </p:nvSpPr>
+        <p:spPr>
+          <a:xfrm>
+            <a:off x="548640" y="640080"/>
+            <a:ext cx="11064240" cy="640080"/>
+          </a:xfrm>
+          <a:prstGeom prst="rect">
+            <a:avLst/>
+          </a:prstGeom>
+          <a:noFill/>
+          <a:ln/>
+        </p:spPr>
+        <p:txBody>
+          <a:bodyPr wrap="square" lIns="0" tIns="0" rIns="0" bIns="0" rtlCol="0" anchor="ctr"/>
+          <a:lstStyle/>
+          <a:p>
+            <a:pPr marL="0" indent="0">
+              <a:buNone/>
+            </a:pPr>
+            <a:r>
+              <a:rPr lang="en-US" sz="3000" b="1" dirty="0">
+                <a:solidFill>
+                  <a:srgbClr val="1A1F36"/>
+                </a:solidFill>
+                <a:latin typeface="Georgia" pitchFamily="34" charset="0"/>
+                <a:ea typeface="Georgia" pitchFamily="34" charset="-122"/>
+                <a:cs typeface="Georgia" pitchFamily="34" charset="-120"/>
+              </a:rPr>
+              <a:t>Qualité, données et restitution</a:t>
+            </a:r>
+            <a:endParaRPr lang="en-US" sz="3000" dirty="0"/>
+          </a:p>
+        </p:txBody>
+      </p:sp>
+      <p:sp>
+        <p:nvSpPr>
+          <p:cNvPr id="4" name="Shape 2"/>
+          <p:cNvSpPr/>
+          <p:nvPr/>
+        </p:nvSpPr>
+        <p:spPr>
+          <a:xfrm>
+            <a:off x="548640" y="1508760"/>
+            <a:ext cx="5394960" cy="4064000"/>
+          </a:xfrm>
+          <a:prstGeom prst="rect">
+            <a:avLst/>
+          </a:prstGeom>
+          <a:solidFill>
+            <a:srgbClr val="FFFFFF"/>
+          </a:solidFill>
+          <a:ln w="12700">
+            <a:solidFill>
+              <a:srgbClr val="E3E5F0"/>
+            </a:solidFill>
+            <a:prstDash val="solid"/>
+          </a:ln>
+          <a:effectLst>
+            <a:outerShdw blurRad="114300" dist="38100" dir="8100000" algn="bl" rotWithShape="0">
+              <a:srgbClr val="000000">
+                <a:alpha val="16000"/>
+              </a:srgbClr>
+            </a:outerShdw>
+          </a:effectLst>
+        </p:spPr>
+        <p:txBody>
+          <a:bodyPr/>
+          <a:lstStyle/>
+          <a:p>
+            <a:endParaRPr lang="fr-FR"/>
+          </a:p>
+        </p:txBody>
+      </p:sp>
+      <p:sp>
+        <p:nvSpPr>
+          <p:cNvPr id="5" name="Shape 3"/>
+          <p:cNvSpPr/>
+          <p:nvPr/>
+        </p:nvSpPr>
+        <p:spPr>
+          <a:xfrm>
+            <a:off x="548640" y="1508760"/>
+            <a:ext cx="5394960" cy="868680"/>
+          </a:xfrm>
+          <a:prstGeom prst="rect">
+            <a:avLst/>
+          </a:prstGeom>
+          <a:solidFill>
+            <a:srgbClr val="1D9E75"/>
+          </a:solidFill>
+          <a:ln/>
+        </p:spPr>
+        <p:txBody>
+          <a:bodyPr/>
+          <a:lstStyle/>
+          <a:p>
+            <a:endParaRPr lang="fr-FR"/>
+          </a:p>
+        </p:txBody>
+      </p:sp>
+      <p:pic>
+        <p:nvPicPr>
+          <p:cNvPr id="6" name="Image 0" descr="preencoded.png"/>
+          <p:cNvPicPr>
+            <a:picLocks noChangeAspect="1"/>
+          </p:cNvPicPr>
+          <p:nvPr/>
+        </p:nvPicPr>
+        <p:blipFill>
+          <a:blip r:embed="rId3"/>
+          <a:stretch>
+            <a:fillRect/>
+          </a:stretch>
+        </p:blipFill>
+        <p:spPr>
+          <a:xfrm>
+            <a:off x="868680" y="1691640"/>
+            <a:ext cx="502920" cy="502920"/>
+          </a:xfrm>
+          <a:prstGeom prst="rect">
+            <a:avLst/>
+          </a:prstGeom>
+        </p:spPr>
+      </p:pic>
+      <p:sp>
+        <p:nvSpPr>
+          <p:cNvPr id="7" name="Text 4"/>
+          <p:cNvSpPr/>
+          <p:nvPr/>
+        </p:nvSpPr>
+        <p:spPr>
+          <a:xfrm>
+            <a:off x="1508760" y="1664208"/>
+            <a:ext cx="4297680" cy="320040"/>
+          </a:xfrm>
+          <a:prstGeom prst="rect">
+            <a:avLst/>
+          </a:prstGeom>
+          <a:noFill/>
+          <a:ln/>
+        </p:spPr>
+        <p:txBody>
+          <a:bodyPr wrap="square" lIns="0" tIns="0" rIns="0" bIns="0" rtlCol="0" anchor="ctr"/>
+          <a:lstStyle/>
+          <a:p>
+            <a:pPr marL="0" indent="0">
+              <a:buNone/>
+            </a:pPr>
+            <a:r>
+              <a:rPr lang="en-US" sz="1400" b="1" kern="0" spc="100" dirty="0">
+                <a:solidFill>
+                  <a:srgbClr val="FFFFFF"/>
+                </a:solidFill>
+                <a:latin typeface="Calibri" pitchFamily="34" charset="0"/>
+                <a:ea typeface="Calibri" pitchFamily="34" charset="-122"/>
+                <a:cs typeface="Calibri" pitchFamily="34" charset="-120"/>
+              </a:rPr>
+              <a:t>PREUVES EXÉCUTÉES</a:t>
+            </a:r>
+            <a:endParaRPr lang="en-US" sz="1400" dirty="0"/>
+          </a:p>
+        </p:txBody>
+      </p:sp>
+      <p:sp>
+        <p:nvSpPr>
+          <p:cNvPr id="8" name="Text 5"/>
+          <p:cNvSpPr/>
+          <p:nvPr/>
+        </p:nvSpPr>
+        <p:spPr>
+          <a:xfrm>
+            <a:off x="1508760" y="2006600"/>
+            <a:ext cx="4297680" cy="320040"/>
+          </a:xfrm>
+          <a:prstGeom prst="rect">
+            <a:avLst/>
+          </a:prstGeom>
+          <a:noFill/>
+          <a:ln/>
+        </p:spPr>
+        <p:txBody>
+          <a:bodyPr wrap="square" lIns="0" tIns="0" rIns="0" bIns="0" rtlCol="0" anchor="ctr"/>
+          <a:lstStyle/>
+          <a:p>
+            <a:pPr marL="0" indent="0">
+              <a:buNone/>
+            </a:pPr>
+            <a:r>
+              <a:rPr lang="en-US" sz="1200" dirty="0">
+                <a:solidFill>
+                  <a:srgbClr val="EAF0FA"/>
+                </a:solidFill>
+                <a:latin typeface="Calibri" pitchFamily="34" charset="0"/>
+                <a:ea typeface="Calibri" pitchFamily="34" charset="-122"/>
+                <a:cs typeface="Calibri" pitchFamily="34" charset="-120"/>
+              </a:rPr>
+              <a:t>make test · make queries-check · make tf-validate</a:t>
+            </a:r>
+            <a:endParaRPr lang="en-US" sz="1200" dirty="0"/>
+          </a:p>
+        </p:txBody>
+      </p:sp>
+      <p:sp>
+        <p:nvSpPr>
+          <p:cNvPr id="9" name="Text 6"/>
+          <p:cNvSpPr/>
+          <p:nvPr/>
+        </p:nvSpPr>
+        <p:spPr>
+          <a:xfrm>
+            <a:off x="914400" y="2697480"/>
+            <a:ext cx="4709160" cy="2743200"/>
+          </a:xfrm>
+          <a:prstGeom prst="rect">
+            <a:avLst/>
+          </a:prstGeom>
+          <a:noFill/>
+          <a:ln/>
+        </p:spPr>
+        <p:txBody>
+          <a:bodyPr wrap="square" lIns="0" tIns="0" rIns="0" bIns="0" rtlCol="0" anchor="t"/>
+          <a:lstStyle/>
+          <a:p>
+            <a:pPr marL="342900" indent="-342900">
+              <a:spcAft>
+                <a:spcPts val="4100"/>
+              </a:spcAft>
+              <a:buSzPct val="100000"/>
+              <a:buChar char="•"/>
+            </a:pPr>
+            <a:r>
+              <a:rPr lang="en-US" sz="1500" dirty="0">
+                <a:solidFill>
+                  <a:srgbClr val="1A1F36"/>
+                </a:solidFill>
+                <a:latin typeface="Calibri" pitchFamily="34" charset="0"/>
+                <a:ea typeface="Calibri" pitchFamily="34" charset="-122"/>
+                <a:cs typeface="Calibri" pitchFamily="34" charset="-120"/>
+              </a:rPr>
+              <a:t>16/16 tests de bout en bout au vert</a:t>
+            </a:r>
+            <a:endParaRPr lang="en-US" sz="1500" dirty="0"/>
+          </a:p>
+          <a:p>
+            <a:pPr marL="342900" indent="-342900">
+              <a:spcAft>
+                <a:spcPts val="4100"/>
+              </a:spcAft>
+              <a:buSzPct val="100000"/>
+              <a:buChar char="•"/>
+            </a:pPr>
+            <a:r>
+              <a:rPr lang="en-US" sz="1500" dirty="0">
+                <a:solidFill>
+                  <a:srgbClr val="1A1F36"/>
+                </a:solidFill>
+                <a:latin typeface="Calibri" pitchFamily="34" charset="0"/>
+                <a:ea typeface="Calibri" pitchFamily="34" charset="-122"/>
+                <a:cs typeface="Calibri" pitchFamily="34" charset="-120"/>
+              </a:rPr>
+              <a:t>Requêtes : 9 SQL + 11 MongoDB exécutées</a:t>
+            </a:r>
+            <a:endParaRPr lang="en-US" sz="1500" dirty="0"/>
+          </a:p>
+          <a:p>
+            <a:pPr marL="342900" indent="-342900">
+              <a:spcAft>
+                <a:spcPts val="4100"/>
+              </a:spcAft>
+              <a:buSzPct val="100000"/>
+              <a:buChar char="•"/>
+            </a:pPr>
+            <a:r>
+              <a:rPr lang="en-US" sz="1500" dirty="0">
+                <a:solidFill>
+                  <a:srgbClr val="1A1F36"/>
+                </a:solidFill>
+                <a:latin typeface="Calibri" pitchFamily="34" charset="0"/>
+                <a:ea typeface="Calibri" pitchFamily="34" charset="-122"/>
+                <a:cs typeface="Calibri" pitchFamily="34" charset="-120"/>
+              </a:rPr>
+              <a:t>RGPD : anonymize_customer() · TTL 90 j</a:t>
+            </a:r>
+            <a:endParaRPr lang="en-US" sz="1500" dirty="0"/>
+          </a:p>
+          <a:p>
+            <a:pPr marL="342900" indent="-342900">
+              <a:spcAft>
+                <a:spcPts val="4100"/>
+              </a:spcAft>
+              <a:buSzPct val="100000"/>
+              <a:buChar char="•"/>
+            </a:pPr>
+            <a:r>
+              <a:rPr lang="en-US" sz="1500" dirty="0">
+                <a:solidFill>
+                  <a:srgbClr val="1A1F36"/>
+                </a:solidFill>
+                <a:latin typeface="Calibri" pitchFamily="34" charset="0"/>
+                <a:ea typeface="Calibri" pitchFamily="34" charset="-122"/>
+                <a:cs typeface="Calibri" pitchFamily="34" charset="-120"/>
+              </a:rPr>
+              <a:t>Score + fraud_indicators en 1 transaction</a:t>
+            </a:r>
+            <a:endParaRPr lang="en-US" sz="1500" dirty="0"/>
+          </a:p>
+        </p:txBody>
+      </p:sp>
+      <p:sp>
+        <p:nvSpPr>
+          <p:cNvPr id="10" name="Shape 7"/>
+          <p:cNvSpPr/>
+          <p:nvPr/>
+        </p:nvSpPr>
+        <p:spPr>
+          <a:xfrm>
+            <a:off x="6172200" y="1508760"/>
+            <a:ext cx="5394960" cy="4064000"/>
+          </a:xfrm>
+          <a:prstGeom prst="rect">
+            <a:avLst/>
+          </a:prstGeom>
+          <a:solidFill>
+            <a:srgbClr val="FFFFFF"/>
+          </a:solidFill>
+          <a:ln w="12700">
+            <a:solidFill>
+              <a:srgbClr val="E3E5F0"/>
+            </a:solidFill>
+            <a:prstDash val="solid"/>
+          </a:ln>
+          <a:effectLst>
+            <a:outerShdw blurRad="114300" dist="38100" dir="8100000" algn="bl" rotWithShape="0">
+              <a:srgbClr val="000000">
+                <a:alpha val="16000"/>
+              </a:srgbClr>
+            </a:outerShdw>
+          </a:effectLst>
+        </p:spPr>
+        <p:txBody>
+          <a:bodyPr/>
+          <a:lstStyle/>
+          <a:p>
+            <a:endParaRPr lang="fr-FR"/>
+          </a:p>
+        </p:txBody>
+      </p:sp>
+      <p:sp>
+        <p:nvSpPr>
+          <p:cNvPr id="11" name="Shape 8"/>
+          <p:cNvSpPr/>
+          <p:nvPr/>
+        </p:nvSpPr>
+        <p:spPr>
+          <a:xfrm>
+            <a:off x="6172200" y="1508760"/>
+            <a:ext cx="5394960" cy="868680"/>
+          </a:xfrm>
+          <a:prstGeom prst="rect">
+            <a:avLst/>
+          </a:prstGeom>
+          <a:solidFill>
+            <a:srgbClr val="2F7BD6"/>
+          </a:solidFill>
+          <a:ln/>
+        </p:spPr>
+        <p:txBody>
+          <a:bodyPr/>
+          <a:lstStyle/>
+          <a:p>
+            <a:endParaRPr lang="fr-FR"/>
+          </a:p>
+        </p:txBody>
+      </p:sp>
+      <p:pic>
+        <p:nvPicPr>
+          <p:cNvPr id="12" name="Image 1" descr="preencoded.png"/>
+          <p:cNvPicPr>
+            <a:picLocks noChangeAspect="1"/>
+          </p:cNvPicPr>
+          <p:nvPr/>
+        </p:nvPicPr>
+        <p:blipFill>
+          <a:blip r:embed="rId4"/>
+          <a:stretch>
+            <a:fillRect/>
+          </a:stretch>
+        </p:blipFill>
+        <p:spPr>
+          <a:xfrm>
+            <a:off x="6492240" y="1691640"/>
+            <a:ext cx="502920" cy="502920"/>
+          </a:xfrm>
+          <a:prstGeom prst="rect">
+            <a:avLst/>
+          </a:prstGeom>
+        </p:spPr>
+      </p:pic>
+      <p:sp>
+        <p:nvSpPr>
+          <p:cNvPr id="13" name="Text 9"/>
+          <p:cNvSpPr/>
+          <p:nvPr/>
+        </p:nvSpPr>
+        <p:spPr>
+          <a:xfrm>
+            <a:off x="7132320" y="1664208"/>
+            <a:ext cx="4297680" cy="320040"/>
+          </a:xfrm>
+          <a:prstGeom prst="rect">
+            <a:avLst/>
+          </a:prstGeom>
+          <a:noFill/>
+          <a:ln/>
+        </p:spPr>
+        <p:txBody>
+          <a:bodyPr wrap="square" lIns="0" tIns="0" rIns="0" bIns="0" rtlCol="0" anchor="ctr"/>
+          <a:lstStyle/>
+          <a:p>
+            <a:pPr marL="0" indent="0">
+              <a:buNone/>
+            </a:pPr>
+            <a:r>
+              <a:rPr lang="en-US" sz="1400" b="1" kern="0" spc="100" dirty="0">
+                <a:solidFill>
+                  <a:srgbClr val="FFFFFF"/>
+                </a:solidFill>
+                <a:latin typeface="Calibri" pitchFamily="34" charset="0"/>
+                <a:ea typeface="Calibri" pitchFamily="34" charset="-122"/>
+                <a:cs typeface="Calibri" pitchFamily="34" charset="-120"/>
+              </a:rPr>
+              <a:t>DASHBOARD &amp; MLOPS</a:t>
+            </a:r>
+            <a:endParaRPr lang="en-US" sz="1400" dirty="0"/>
+          </a:p>
+        </p:txBody>
+      </p:sp>
+      <p:sp>
+        <p:nvSpPr>
+          <p:cNvPr id="14" name="Text 10"/>
+          <p:cNvSpPr/>
+          <p:nvPr/>
+        </p:nvSpPr>
+        <p:spPr>
+          <a:xfrm>
+            <a:off x="7132320" y="2006600"/>
+            <a:ext cx="4297680" cy="320040"/>
+          </a:xfrm>
+          <a:prstGeom prst="rect">
+            <a:avLst/>
+          </a:prstGeom>
+          <a:noFill/>
+          <a:ln/>
+        </p:spPr>
+        <p:txBody>
+          <a:bodyPr wrap="square" lIns="0" tIns="0" rIns="0" bIns="0" rtlCol="0" anchor="ctr"/>
+          <a:lstStyle/>
+          <a:p>
+            <a:pPr marL="0" indent="0">
+              <a:buNone/>
+            </a:pPr>
+            <a:r>
+              <a:rPr lang="en-US" sz="1200" dirty="0">
+                <a:solidFill>
+                  <a:srgbClr val="EAF0FA"/>
+                </a:solidFill>
+                <a:latin typeface="Calibri" pitchFamily="34" charset="0"/>
+                <a:ea typeface="Calibri" pitchFamily="34" charset="-122"/>
+                <a:cs typeface="Calibri" pitchFamily="34" charset="-120"/>
+              </a:rPr>
+              <a:t>localhost:8501 · admin / Bloc2-Demo-2026</a:t>
+            </a:r>
+            <a:endParaRPr lang="en-US" sz="1200" dirty="0"/>
+          </a:p>
+        </p:txBody>
+      </p:sp>
+      <p:sp>
+        <p:nvSpPr>
+          <p:cNvPr id="15" name="Text 11"/>
+          <p:cNvSpPr/>
+          <p:nvPr/>
+        </p:nvSpPr>
+        <p:spPr>
+          <a:xfrm>
+            <a:off x="6537960" y="2697480"/>
+            <a:ext cx="4709160" cy="2743200"/>
+          </a:xfrm>
+          <a:prstGeom prst="rect">
+            <a:avLst/>
+          </a:prstGeom>
+          <a:noFill/>
+          <a:ln/>
+        </p:spPr>
+        <p:txBody>
+          <a:bodyPr wrap="square" lIns="0" tIns="0" rIns="0" bIns="0" rtlCol="0" anchor="t"/>
+          <a:lstStyle/>
+          <a:p>
+            <a:pPr marL="342900" indent="-342900">
+              <a:spcAft>
+                <a:spcPts val="4100"/>
+              </a:spcAft>
+              <a:buSzPct val="100000"/>
+              <a:buChar char="•"/>
+            </a:pPr>
+            <a:r>
+              <a:rPr lang="en-US" sz="1500" dirty="0">
+                <a:solidFill>
+                  <a:srgbClr val="1A1F36"/>
+                </a:solidFill>
+                <a:latin typeface="Calibri" pitchFamily="34" charset="0"/>
+                <a:ea typeface="Calibri" pitchFamily="34" charset="-122"/>
+                <a:cs typeface="Calibri" pitchFamily="34" charset="-120"/>
+              </a:rPr>
+              <a:t>Vue d’ensemble : KPIs, alertes, suspects</a:t>
+            </a:r>
+            <a:endParaRPr lang="en-US" sz="1500" dirty="0"/>
+          </a:p>
+          <a:p>
+            <a:pPr marL="342900" indent="-342900">
+              <a:spcAft>
+                <a:spcPts val="4100"/>
+              </a:spcAft>
+              <a:buSzPct val="100000"/>
+              <a:buChar char="•"/>
+            </a:pPr>
+            <a:r>
+              <a:rPr lang="en-US" sz="1500" dirty="0">
+                <a:solidFill>
+                  <a:srgbClr val="1A1F36"/>
+                </a:solidFill>
+                <a:latin typeface="Calibri" pitchFamily="34" charset="0"/>
+                <a:ea typeface="Calibri" pitchFamily="34" charset="-122"/>
+                <a:cs typeface="Calibri" pitchFamily="34" charset="-120"/>
+              </a:rPr>
+              <a:t>Performance ML : dérive, précision servie</a:t>
+            </a:r>
+            <a:endParaRPr lang="en-US" sz="1500" dirty="0"/>
+          </a:p>
+          <a:p>
+            <a:pPr marL="342900" indent="-342900">
+              <a:spcAft>
+                <a:spcPts val="4100"/>
+              </a:spcAft>
+              <a:buSzPct val="100000"/>
+              <a:buChar char="•"/>
+            </a:pPr>
+            <a:r>
+              <a:rPr lang="en-US" sz="1500" dirty="0">
+                <a:solidFill>
+                  <a:srgbClr val="1A1F36"/>
+                </a:solidFill>
+                <a:latin typeface="Calibri" pitchFamily="34" charset="0"/>
+                <a:ea typeface="Calibri" pitchFamily="34" charset="-122"/>
+                <a:cs typeface="Calibri" pitchFamily="34" charset="-120"/>
+              </a:rPr>
+              <a:t>MLflow · Evidently · retrain automatique</a:t>
+            </a:r>
+            <a:endParaRPr lang="en-US" sz="1500" dirty="0"/>
+          </a:p>
+          <a:p>
+            <a:pPr marL="342900" indent="-342900">
+              <a:spcAft>
+                <a:spcPts val="4100"/>
+              </a:spcAft>
+              <a:buSzPct val="100000"/>
+              <a:buChar char="•"/>
+            </a:pPr>
+            <a:r>
+              <a:rPr lang="en-US" sz="1500" dirty="0">
+                <a:solidFill>
+                  <a:srgbClr val="1A1F36"/>
+                </a:solidFill>
+                <a:latin typeface="Calibri" pitchFamily="34" charset="0"/>
+                <a:ea typeface="Calibri" pitchFamily="34" charset="-122"/>
+                <a:cs typeface="Calibri" pitchFamily="34" charset="-120"/>
+              </a:rPr>
+              <a:t>Diagrammes régénérés depuis le code</a:t>
+            </a:r>
+            <a:endParaRPr lang="en-US" sz="1500" dirty="0"/>
+          </a:p>
+        </p:txBody>
+      </p:sp>
+      <p:sp>
+        <p:nvSpPr>
+          <p:cNvPr id="16" name="Text 12"/>
+          <p:cNvSpPr/>
+          <p:nvPr/>
+        </p:nvSpPr>
+        <p:spPr>
+          <a:xfrm>
+            <a:off x="548640" y="5740400"/>
+            <a:ext cx="11064240" cy="365760"/>
+          </a:xfrm>
+          <a:prstGeom prst="rect">
+            <a:avLst/>
+          </a:prstGeom>
+          <a:noFill/>
+          <a:ln/>
+        </p:spPr>
+        <p:txBody>
+          <a:bodyPr wrap="square" lIns="0" tIns="0" rIns="0" bIns="0" rtlCol="0" anchor="ctr"/>
+          <a:lstStyle/>
+          <a:p>
+            <a:pPr marL="0" indent="0" algn="ctr">
+              <a:buNone/>
+            </a:pPr>
+            <a:r>
+              <a:rPr lang="en-US" sz="1300" i="1" dirty="0">
+                <a:solidFill>
+                  <a:srgbClr val="6B7280"/>
+                </a:solidFill>
+                <a:latin typeface="Calibri" pitchFamily="34" charset="0"/>
+                <a:ea typeface="Calibri" pitchFamily="34" charset="-122"/>
+                <a:cs typeface="Calibri" pitchFamily="34" charset="-120"/>
+              </a:rPr>
+              <a:t>Chaque affirmation se vérifie par une commande du Makefile ou un onglet du dashboard.</a:t>
+            </a:r>
+            <a:endParaRPr lang="en-US" sz="1300" dirty="0"/>
+          </a:p>
+        </p:txBody>
+      </p:sp>
+      <p:sp>
+        <p:nvSpPr>
+          <p:cNvPr id="17" name="Text 13"/>
+          <p:cNvSpPr/>
+          <p:nvPr/>
+        </p:nvSpPr>
+        <p:spPr>
+          <a:xfrm>
+            <a:off x="11430000" y="6355080"/>
+            <a:ext cx="548640" cy="274320"/>
+          </a:xfrm>
+          <a:prstGeom prst="rect">
+            <a:avLst/>
+          </a:prstGeom>
+          <a:noFill/>
+          <a:ln/>
+        </p:spPr>
+        <p:txBody>
+          <a:bodyPr wrap="square" lIns="0" tIns="0" rIns="0" bIns="0" rtlCol="0" anchor="ctr"/>
+          <a:lstStyle/>
+          <a:p>
+            <a:pPr marL="0" indent="0" algn="r">
+              <a:buNone/>
+            </a:pPr>
+            <a:r>
+              <a:rPr lang="en-US" sz="1100" dirty="0">
+                <a:solidFill>
+                  <a:srgbClr val="6B7280"/>
+                </a:solidFill>
+                <a:latin typeface="Calibri" pitchFamily="34" charset="0"/>
+                <a:ea typeface="Calibri" pitchFamily="34" charset="-122"/>
+                <a:cs typeface="Calibri" pitchFamily="34" charset="-120"/>
+              </a:rPr>
+              <a:t>10</a:t>
+            </a:r>
+            <a:endParaRPr lang="en-US" sz="1100" dirty="0"/>
+          </a:p>
+        </p:txBody>
+      </p:sp>
+    </p:spTree>
+    <p:extLst>
+      <p:ext uri="{BB962C8B-B14F-4D97-AF65-F5344CB8AC3E}">
+        <p14:creationId xmlns:p14="http://schemas.microsoft.com/office/powerpoint/2010/main" val="3302546916"/>
+      </p:ext>
+    </p:extLst>
   </p:cSld>
   <p:clrMapOvr>
     <a:masterClrMapping/>

--- a/presentation/stripe_presentation_bloc2.pptx
+++ b/presentation/stripe_presentation_bloc2.pptx
@@ -17,12 +17,12 @@
     <p:sldId id="267" r:id="rId8"/>
     <p:sldId id="273" r:id="rId9"/>
     <p:sldId id="262" r:id="rId10"/>
-    <p:sldId id="274" r:id="rId19"/>
     <p:sldId id="263" r:id="rId11"/>
     <p:sldId id="271" r:id="rId12"/>
     <p:sldId id="277" r:id="rId22"/>
+    <p:sldId id="265" r:id="rId13"/>
+    <p:sldId id="274" r:id="rId19"/>
     <p:sldId id="276" r:id="rId21"/>
-    <p:sldId id="265" r:id="rId13"/>
     <p:sldId id="275" r:id="rId20"/>
   </p:sldIdLst>
   <p:sldSz cx="12192000" cy="6858000"/>
@@ -2237,7 +2237,7 @@
                 <a:ea typeface="Calibri" pitchFamily="34" charset="-122"/>
                 <a:cs typeface="Calibri" pitchFamily="34" charset="-120"/>
               </a:rPr>
-              <a:t>XGBoost (MLflow) ou 5 règles en fallback ; seuils 0.60 / 0.85</a:t>
+              <a:t>XGBoost (MLflow) ou 5 règles en repli ; seuils 0.60 / 0.85</a:t>
             </a:r>
             <a:endParaRPr lang="en-US" sz="1500" dirty="0"/>
           </a:p>
@@ -4577,7 +4577,7 @@
                 <a:ea typeface="Calibri" pitchFamily="34" charset="-122"/>
                 <a:cs typeface="Calibri" pitchFamily="34" charset="-120"/>
               </a:rPr>
-              <a:t>MLflow · Evidently · retrain automatique</a:t>
+              <a:t>MLflow · Evidently · réentraînement automatique</a:t>
             </a:r>
             <a:endParaRPr lang="en-US" sz="1500" dirty="0"/>
           </a:p>
@@ -10440,7 +10440,7 @@
                 <a:ea typeface="Calibri" pitchFamily="34" charset="-122"/>
                 <a:cs typeface="Calibri" pitchFamily="34" charset="-120"/>
               </a:rPr>
-              <a:t>Snapshot de features par client (upsert sur customer_id). ml_monitoring : dérive et précision servie (Evidently).</a:t>
+              <a:t>Instantané de features par client (upsert sur customer_id). ml_monitoring : dérive et précision servie (Evidently).</a:t>
             </a:r>
             <a:endParaRPr lang="en-US" sz="1400" dirty="0"/>
           </a:p>

--- a/presentation/stripe_presentation_bloc2.pptx
+++ b/presentation/stripe_presentation_bloc2.pptx
@@ -6274,7 +6274,7 @@
                 <a:ea typeface="Georgia" pitchFamily="34" charset="-122"/>
                 <a:cs typeface="Georgia" pitchFamily="34" charset="-120"/>
               </a:rPr>
-              <a:t>Kafka + Flink</a:t>
+              <a:t>Kafka + scoring Python</a:t>
             </a:r>
             <a:endParaRPr lang="en-US" sz="2300" dirty="0"/>
           </a:p>
@@ -7435,7 +7435,7 @@
                 <a:ea typeface="Calibri" pitchFamily="34" charset="-122"/>
                 <a:cs typeface="Calibri" pitchFamily="34" charset="-120"/>
               </a:rPr>
-              <a:t>Flink + Redis</a:t>
+              <a:t>Scorer + Redis</a:t>
             </a:r>
             <a:endParaRPr lang="en-US" sz="1400" dirty="0"/>
           </a:p>

--- a/presentation/stripe_presentation_bloc2.pptx
+++ b/presentation/stripe_presentation_bloc2.pptx
@@ -2447,7 +2447,7 @@
                 <a:ea typeface="Calibri" pitchFamily="34" charset="-122"/>
                 <a:cs typeface="Calibri" pitchFamily="34" charset="-120"/>
               </a:rPr>
-              <a:t>Evidently suit la dérive · servi : précision 0,93 · rappel 0,96</a:t>
+              <a:t>Evidently suit la dérive · servi : précision 0,88 · rappel 0,64</a:t>
             </a:r>
             <a:endParaRPr lang="en-US" sz="1500" dirty="0"/>
           </a:p>
